--- a/ContractOS_Pitch.pptx
+++ b/ContractOS_Pitch.pptx
@@ -5,19 +5,20 @@
     <p:sldMasterId id="2147483648" r:id="rId1"/>
   </p:sldMasterIdLst>
   <p:notesMasterIdLst>
-    <p:notesMasterId r:id="rId12"/>
+    <p:notesMasterId r:id="rId13"/>
   </p:notesMasterIdLst>
   <p:sldIdLst>
     <p:sldId id="256" r:id="rId2"/>
     <p:sldId id="257" r:id="rId3"/>
     <p:sldId id="258" r:id="rId4"/>
     <p:sldId id="259" r:id="rId5"/>
-    <p:sldId id="260" r:id="rId6"/>
+    <p:sldId id="266" r:id="rId6"/>
     <p:sldId id="261" r:id="rId7"/>
-    <p:sldId id="262" r:id="rId8"/>
-    <p:sldId id="263" r:id="rId9"/>
-    <p:sldId id="264" r:id="rId10"/>
-    <p:sldId id="265" r:id="rId11"/>
+    <p:sldId id="267" r:id="rId8"/>
+    <p:sldId id="262" r:id="rId9"/>
+    <p:sldId id="263" r:id="rId10"/>
+    <p:sldId id="264" r:id="rId11"/>
+    <p:sldId id="265" r:id="rId12"/>
   </p:sldIdLst>
   <p:sldSz cx="9144000" cy="5143500" type="screen16x9"/>
   <p:notesSz cx="5143500" cy="9144000"/>
@@ -414,6 +415,90 @@
 </p:notes>
 </file>
 
+<file path=ppt/notesSlides/notesSlide11.xml><?xml version="1.0" encoding="utf-8"?>
+<p:notes xmlns:a="http://schemas.openxmlformats.org/drawingml/2006/main" xmlns:r="http://schemas.openxmlformats.org/officeDocument/2006/relationships" xmlns:p="http://schemas.openxmlformats.org/presentationml/2006/main">
+  <p:cSld>
+    <p:spTree>
+      <p:nvGrpSpPr>
+        <p:cNvPr id="1" name=""/>
+        <p:cNvGrpSpPr/>
+        <p:nvPr/>
+      </p:nvGrpSpPr>
+      <p:grpSpPr>
+        <a:xfrm>
+          <a:off x="0" y="0"/>
+          <a:ext cx="0" cy="0"/>
+          <a:chOff x="0" y="0"/>
+          <a:chExt cx="0" cy="0"/>
+        </a:xfrm>
+      </p:grpSpPr>
+      <p:sp>
+        <p:nvSpPr>
+          <p:cNvPr id="2" name="Slide Image Placeholder 1"/>
+          <p:cNvSpPr>
+            <a:spLocks noGrp="1" noRot="1" noChangeAspect="1"/>
+          </p:cNvSpPr>
+          <p:nvPr>
+            <p:ph type="sldImg"/>
+          </p:nvPr>
+        </p:nvSpPr>
+        <p:spPr/>
+      </p:sp>
+      <p:sp>
+        <p:nvSpPr>
+          <p:cNvPr id="3" name="Notes Placeholder 2"/>
+          <p:cNvSpPr>
+            <a:spLocks noGrp="1"/>
+          </p:cNvSpPr>
+          <p:nvPr>
+            <p:ph type="body" idx="1"/>
+          </p:nvPr>
+        </p:nvSpPr>
+        <p:spPr/>
+        <p:txBody>
+          <a:bodyPr/>
+          <a:lstStyle/>
+          <a:p>
+            <a:endParaRPr lang="en-US" dirty="0"/>
+          </a:p>
+        </p:txBody>
+      </p:sp>
+      <p:sp>
+        <p:nvSpPr>
+          <p:cNvPr id="4" name="Slide Number Placeholder 3"/>
+          <p:cNvSpPr>
+            <a:spLocks noGrp="1"/>
+          </p:cNvSpPr>
+          <p:nvPr>
+            <p:ph type="sldNum" sz="quarter" idx="10"/>
+          </p:nvPr>
+        </p:nvSpPr>
+        <p:spPr/>
+        <p:txBody>
+          <a:bodyPr/>
+          <a:lstStyle/>
+          <a:p>
+            <a:fld id="{F7021451-1387-4CA6-816F-3879F97B5CBC}" type="slidenum">
+              <a:rPr lang="en-US"/>
+              <a:t>11</a:t>
+            </a:fld>
+            <a:endParaRPr lang="en-US"/>
+          </a:p>
+        </p:txBody>
+      </p:sp>
+    </p:spTree>
+    <p:extLst>
+      <p:ext uri="{BB962C8B-B14F-4D97-AF65-F5344CB8AC3E}">
+        <p14:creationId xmlns:p14="http://schemas.microsoft.com/office/powerpoint/2010/main" val="1024086991"/>
+      </p:ext>
+    </p:extLst>
+  </p:cSld>
+  <p:clrMapOvr>
+    <a:masterClrMapping/>
+  </p:clrMapOvr>
+</p:notes>
+</file>
+
 <file path=ppt/notesSlides/notesSlide2.xml><?xml version="1.0" encoding="utf-8"?>
 <p:notes xmlns:a="http://schemas.openxmlformats.org/drawingml/2006/main" xmlns:r="http://schemas.openxmlformats.org/officeDocument/2006/relationships" xmlns:p="http://schemas.openxmlformats.org/presentationml/2006/main">
   <p:cSld>
@@ -2126,6 +2211,1198 @@
 
 <file path=ppt/slides/slide10.xml><?xml version="1.0" encoding="utf-8"?>
 <p:sld xmlns:a="http://schemas.openxmlformats.org/drawingml/2006/main" xmlns:r="http://schemas.openxmlformats.org/officeDocument/2006/relationships" xmlns:p="http://schemas.openxmlformats.org/presentationml/2006/main">
+  <p:cSld name="Slide 9">
+    <p:bg>
+      <p:bgPr>
+        <a:solidFill>
+          <a:srgbClr val="FFFFFF"/>
+        </a:solidFill>
+        <a:effectLst/>
+      </p:bgPr>
+    </p:bg>
+    <p:spTree>
+      <p:nvGrpSpPr>
+        <p:cNvPr id="1" name=""/>
+        <p:cNvGrpSpPr/>
+        <p:nvPr/>
+      </p:nvGrpSpPr>
+      <p:grpSpPr>
+        <a:xfrm>
+          <a:off x="0" y="0"/>
+          <a:ext cx="0" cy="0"/>
+          <a:chOff x="0" y="0"/>
+          <a:chExt cx="0" cy="0"/>
+        </a:xfrm>
+      </p:grpSpPr>
+      <p:sp>
+        <p:nvSpPr>
+          <p:cNvPr id="3" name="Text 1"/>
+          <p:cNvSpPr/>
+          <p:nvPr/>
+        </p:nvSpPr>
+        <p:spPr>
+          <a:xfrm>
+            <a:off x="8430768" y="4681728"/>
+            <a:ext cx="530352" cy="329184"/>
+          </a:xfrm>
+          <a:prstGeom prst="rect">
+            <a:avLst/>
+          </a:prstGeom>
+          <a:noFill/>
+          <a:ln/>
+        </p:spPr>
+        <p:txBody>
+          <a:bodyPr wrap="square" lIns="0" tIns="0" rIns="0" bIns="0" rtlCol="0" anchor="ctr"/>
+          <a:lstStyle/>
+          <a:p>
+            <a:pPr marL="0" indent="0" algn="ctr">
+              <a:buNone/>
+            </a:pPr>
+            <a:r>
+              <a:rPr lang="en-US" sz="1200" b="1" dirty="0">
+                <a:solidFill>
+                  <a:srgbClr val="FFFFFF"/>
+                </a:solidFill>
+                <a:latin typeface="Arial" pitchFamily="34" charset="0"/>
+                <a:ea typeface="Arial" pitchFamily="34" charset="-122"/>
+                <a:cs typeface="Arial" pitchFamily="34" charset="-120"/>
+              </a:rPr>
+              <a:t>ih</a:t>
+            </a:r>
+            <a:endParaRPr lang="en-US" sz="1200" dirty="0"/>
+          </a:p>
+        </p:txBody>
+      </p:sp>
+      <p:sp>
+        <p:nvSpPr>
+          <p:cNvPr id="4" name="Shape 2"/>
+          <p:cNvSpPr/>
+          <p:nvPr/>
+        </p:nvSpPr>
+        <p:spPr>
+          <a:xfrm>
+            <a:off x="457200" y="822960"/>
+            <a:ext cx="8229600" cy="27432"/>
+          </a:xfrm>
+          <a:prstGeom prst="rect">
+            <a:avLst/>
+          </a:prstGeom>
+          <a:solidFill>
+            <a:srgbClr val="005AEE"/>
+          </a:solidFill>
+          <a:ln w="12700">
+            <a:solidFill>
+              <a:srgbClr val="005AEE"/>
+            </a:solidFill>
+            <a:prstDash val="solid"/>
+          </a:ln>
+        </p:spPr>
+        <p:txBody>
+          <a:bodyPr/>
+          <a:lstStyle/>
+          <a:p>
+            <a:endParaRPr lang="de-DE"/>
+          </a:p>
+        </p:txBody>
+      </p:sp>
+      <p:sp>
+        <p:nvSpPr>
+          <p:cNvPr id="5" name="Text 3"/>
+          <p:cNvSpPr/>
+          <p:nvPr/>
+        </p:nvSpPr>
+        <p:spPr>
+          <a:xfrm>
+            <a:off x="457200" y="109728"/>
+            <a:ext cx="7955280" cy="676656"/>
+          </a:xfrm>
+          <a:prstGeom prst="rect">
+            <a:avLst/>
+          </a:prstGeom>
+          <a:noFill/>
+          <a:ln/>
+        </p:spPr>
+        <p:txBody>
+          <a:bodyPr wrap="square" lIns="0" tIns="0" rIns="0" bIns="0" rtlCol="0" anchor="ctr"/>
+          <a:lstStyle/>
+          <a:p>
+            <a:pPr marL="0" indent="0" algn="l">
+              <a:buNone/>
+            </a:pPr>
+            <a:r>
+              <a:rPr lang="en-US" sz="2600" b="1" dirty="0">
+                <a:solidFill>
+                  <a:srgbClr val="111111"/>
+                </a:solidFill>
+                <a:latin typeface="Arial" pitchFamily="34" charset="0"/>
+                <a:ea typeface="Arial" pitchFamily="34" charset="-122"/>
+                <a:cs typeface="Arial" pitchFamily="34" charset="-120"/>
+              </a:rPr>
+              <a:t>The black box has windows — every AI decision is logged and auditable</a:t>
+            </a:r>
+            <a:endParaRPr lang="en-US" sz="2600" dirty="0"/>
+          </a:p>
+        </p:txBody>
+      </p:sp>
+      <p:sp>
+        <p:nvSpPr>
+          <p:cNvPr id="6" name="Text 4"/>
+          <p:cNvSpPr/>
+          <p:nvPr/>
+        </p:nvSpPr>
+        <p:spPr>
+          <a:xfrm>
+            <a:off x="457200" y="868680"/>
+            <a:ext cx="8229600" cy="237744"/>
+          </a:xfrm>
+          <a:prstGeom prst="rect">
+            <a:avLst/>
+          </a:prstGeom>
+          <a:noFill/>
+          <a:ln/>
+        </p:spPr>
+        <p:txBody>
+          <a:bodyPr wrap="square" lIns="0" tIns="0" rIns="0" bIns="0" rtlCol="0" anchor="ctr"/>
+          <a:lstStyle/>
+          <a:p>
+            <a:pPr marL="0" indent="0" algn="r">
+              <a:buNone/>
+            </a:pPr>
+            <a:r>
+              <a:rPr lang="en-US" sz="850" b="1" dirty="0">
+                <a:solidFill>
+                  <a:srgbClr val="005AEE"/>
+                </a:solidFill>
+                <a:latin typeface="Arial" pitchFamily="34" charset="0"/>
+                <a:ea typeface="Arial" pitchFamily="34" charset="-122"/>
+                <a:cs typeface="Arial" pitchFamily="34" charset="-120"/>
+              </a:rPr>
+              <a:t>04  MONITORING</a:t>
+            </a:r>
+            <a:endParaRPr lang="en-US" sz="850" dirty="0"/>
+          </a:p>
+        </p:txBody>
+      </p:sp>
+      <p:sp>
+        <p:nvSpPr>
+          <p:cNvPr id="7" name="Shape 5"/>
+          <p:cNvSpPr/>
+          <p:nvPr/>
+        </p:nvSpPr>
+        <p:spPr>
+          <a:xfrm>
+            <a:off x="457200" y="1261872"/>
+            <a:ext cx="8229600" cy="475488"/>
+          </a:xfrm>
+          <a:prstGeom prst="rect">
+            <a:avLst/>
+          </a:prstGeom>
+          <a:solidFill>
+            <a:srgbClr val="E8F0FD"/>
+          </a:solidFill>
+          <a:ln w="12700">
+            <a:solidFill>
+              <a:srgbClr val="005AEE"/>
+            </a:solidFill>
+            <a:prstDash val="solid"/>
+          </a:ln>
+        </p:spPr>
+        <p:txBody>
+          <a:bodyPr/>
+          <a:lstStyle/>
+          <a:p>
+            <a:endParaRPr lang="de-DE"/>
+          </a:p>
+        </p:txBody>
+      </p:sp>
+      <p:sp>
+        <p:nvSpPr>
+          <p:cNvPr id="8" name="Shape 6"/>
+          <p:cNvSpPr/>
+          <p:nvPr/>
+        </p:nvSpPr>
+        <p:spPr>
+          <a:xfrm>
+            <a:off x="457200" y="1261872"/>
+            <a:ext cx="54864" cy="475488"/>
+          </a:xfrm>
+          <a:prstGeom prst="rect">
+            <a:avLst/>
+          </a:prstGeom>
+          <a:solidFill>
+            <a:srgbClr val="005AEE"/>
+          </a:solidFill>
+          <a:ln w="12700">
+            <a:solidFill>
+              <a:srgbClr val="005AEE"/>
+            </a:solidFill>
+            <a:prstDash val="solid"/>
+          </a:ln>
+        </p:spPr>
+        <p:txBody>
+          <a:bodyPr/>
+          <a:lstStyle/>
+          <a:p>
+            <a:endParaRPr lang="de-DE"/>
+          </a:p>
+        </p:txBody>
+      </p:sp>
+      <p:sp>
+        <p:nvSpPr>
+          <p:cNvPr id="9" name="Text 7"/>
+          <p:cNvSpPr/>
+          <p:nvPr/>
+        </p:nvSpPr>
+        <p:spPr>
+          <a:xfrm>
+            <a:off x="640080" y="1261872"/>
+            <a:ext cx="7955280" cy="475488"/>
+          </a:xfrm>
+          <a:prstGeom prst="rect">
+            <a:avLst/>
+          </a:prstGeom>
+          <a:noFill/>
+          <a:ln/>
+        </p:spPr>
+        <p:txBody>
+          <a:bodyPr wrap="square" lIns="0" tIns="0" rIns="0" bIns="0" rtlCol="0" anchor="ctr"/>
+          <a:lstStyle/>
+          <a:p>
+            <a:pPr marL="0" indent="0" algn="l">
+              <a:buNone/>
+            </a:pPr>
+            <a:r>
+              <a:rPr lang="en-US" sz="1300" b="1" i="1" dirty="0">
+                <a:solidFill>
+                  <a:srgbClr val="222222"/>
+                </a:solidFill>
+                <a:latin typeface="Arial" pitchFamily="34" charset="0"/>
+                <a:ea typeface="Arial" pitchFamily="34" charset="-122"/>
+                <a:cs typeface="Arial" pitchFamily="34" charset="-120"/>
+              </a:rPr>
+              <a:t>If a regulator asks what happened with a specific contractor's data, we show the complete chain in under five minutes.</a:t>
+            </a:r>
+            <a:endParaRPr lang="en-US" sz="1300" dirty="0"/>
+          </a:p>
+        </p:txBody>
+      </p:sp>
+      <p:sp>
+        <p:nvSpPr>
+          <p:cNvPr id="10" name="Shape 8"/>
+          <p:cNvSpPr/>
+          <p:nvPr/>
+        </p:nvSpPr>
+        <p:spPr>
+          <a:xfrm>
+            <a:off x="457200" y="1847088"/>
+            <a:ext cx="4023360" cy="530352"/>
+          </a:xfrm>
+          <a:prstGeom prst="rect">
+            <a:avLst/>
+          </a:prstGeom>
+          <a:solidFill>
+            <a:srgbClr val="FFFFFF"/>
+          </a:solidFill>
+          <a:ln w="12700">
+            <a:solidFill>
+              <a:srgbClr val="E2E8F0"/>
+            </a:solidFill>
+            <a:prstDash val="solid"/>
+          </a:ln>
+          <a:effectLst>
+            <a:outerShdw blurRad="127000" dist="25400" dir="8100000" algn="bl" rotWithShape="0">
+              <a:srgbClr val="000000">
+                <a:alpha val="7000"/>
+              </a:srgbClr>
+            </a:outerShdw>
+          </a:effectLst>
+        </p:spPr>
+        <p:txBody>
+          <a:bodyPr/>
+          <a:lstStyle/>
+          <a:p>
+            <a:endParaRPr lang="de-DE"/>
+          </a:p>
+        </p:txBody>
+      </p:sp>
+      <p:sp>
+        <p:nvSpPr>
+          <p:cNvPr id="11" name="Shape 9"/>
+          <p:cNvSpPr/>
+          <p:nvPr/>
+        </p:nvSpPr>
+        <p:spPr>
+          <a:xfrm>
+            <a:off x="457200" y="1847088"/>
+            <a:ext cx="45720" cy="530352"/>
+          </a:xfrm>
+          <a:prstGeom prst="rect">
+            <a:avLst/>
+          </a:prstGeom>
+          <a:solidFill>
+            <a:srgbClr val="005AEE"/>
+          </a:solidFill>
+          <a:ln w="12700">
+            <a:solidFill>
+              <a:srgbClr val="005AEE"/>
+            </a:solidFill>
+            <a:prstDash val="solid"/>
+          </a:ln>
+        </p:spPr>
+        <p:txBody>
+          <a:bodyPr/>
+          <a:lstStyle/>
+          <a:p>
+            <a:endParaRPr lang="de-DE"/>
+          </a:p>
+        </p:txBody>
+      </p:sp>
+      <p:sp>
+        <p:nvSpPr>
+          <p:cNvPr id="12" name="Text 10"/>
+          <p:cNvSpPr/>
+          <p:nvPr/>
+        </p:nvSpPr>
+        <p:spPr>
+          <a:xfrm>
+            <a:off x="621792" y="1847088"/>
+            <a:ext cx="3730752" cy="530352"/>
+          </a:xfrm>
+          <a:prstGeom prst="rect">
+            <a:avLst/>
+          </a:prstGeom>
+          <a:noFill/>
+          <a:ln/>
+        </p:spPr>
+        <p:txBody>
+          <a:bodyPr wrap="square" lIns="0" tIns="0" rIns="0" bIns="0" rtlCol="0" anchor="ctr"/>
+          <a:lstStyle/>
+          <a:p>
+            <a:pPr marL="0" indent="0" algn="l">
+              <a:buNone/>
+            </a:pPr>
+            <a:r>
+              <a:rPr lang="en-US" sz="1100" b="1" dirty="0">
+                <a:solidFill>
+                  <a:srgbClr val="111111"/>
+                </a:solidFill>
+                <a:latin typeface="Arial" pitchFamily="34" charset="0"/>
+                <a:ea typeface="Arial" pitchFamily="34" charset="-122"/>
+                <a:cs typeface="Arial" pitchFamily="34" charset="-120"/>
+              </a:rPr>
+              <a:t>Extraction confidence  </a:t>
+            </a:r>
+            <a:r>
+              <a:rPr lang="en-US" sz="1100" dirty="0">
+                <a:solidFill>
+                  <a:srgbClr val="4A4A4A"/>
+                </a:solidFill>
+                <a:latin typeface="Arial" pitchFamily="34" charset="0"/>
+                <a:ea typeface="Arial" pitchFamily="34" charset="-122"/>
+                <a:cs typeface="Arial" pitchFamily="34" charset="-120"/>
+              </a:rPr>
+              <a:t>Alert &lt; 0.80 on rate, jurisdiction, IP</a:t>
+            </a:r>
+            <a:endParaRPr lang="en-US" sz="1100" dirty="0"/>
+          </a:p>
+        </p:txBody>
+      </p:sp>
+      <p:sp>
+        <p:nvSpPr>
+          <p:cNvPr id="13" name="Shape 11"/>
+          <p:cNvSpPr/>
+          <p:nvPr/>
+        </p:nvSpPr>
+        <p:spPr>
+          <a:xfrm>
+            <a:off x="457200" y="2450592"/>
+            <a:ext cx="4023360" cy="530352"/>
+          </a:xfrm>
+          <a:prstGeom prst="rect">
+            <a:avLst/>
+          </a:prstGeom>
+          <a:solidFill>
+            <a:srgbClr val="FFFFFF"/>
+          </a:solidFill>
+          <a:ln w="12700">
+            <a:solidFill>
+              <a:srgbClr val="E2E8F0"/>
+            </a:solidFill>
+            <a:prstDash val="solid"/>
+          </a:ln>
+          <a:effectLst>
+            <a:outerShdw blurRad="127000" dist="25400" dir="8100000" algn="bl" rotWithShape="0">
+              <a:srgbClr val="000000">
+                <a:alpha val="7000"/>
+              </a:srgbClr>
+            </a:outerShdw>
+          </a:effectLst>
+        </p:spPr>
+        <p:txBody>
+          <a:bodyPr/>
+          <a:lstStyle/>
+          <a:p>
+            <a:endParaRPr lang="de-DE"/>
+          </a:p>
+        </p:txBody>
+      </p:sp>
+      <p:sp>
+        <p:nvSpPr>
+          <p:cNvPr id="14" name="Shape 12"/>
+          <p:cNvSpPr/>
+          <p:nvPr/>
+        </p:nvSpPr>
+        <p:spPr>
+          <a:xfrm>
+            <a:off x="457200" y="2450592"/>
+            <a:ext cx="45720" cy="530352"/>
+          </a:xfrm>
+          <a:prstGeom prst="rect">
+            <a:avLst/>
+          </a:prstGeom>
+          <a:solidFill>
+            <a:srgbClr val="005AEE"/>
+          </a:solidFill>
+          <a:ln w="12700">
+            <a:solidFill>
+              <a:srgbClr val="005AEE"/>
+            </a:solidFill>
+            <a:prstDash val="solid"/>
+          </a:ln>
+        </p:spPr>
+        <p:txBody>
+          <a:bodyPr/>
+          <a:lstStyle/>
+          <a:p>
+            <a:endParaRPr lang="de-DE"/>
+          </a:p>
+        </p:txBody>
+      </p:sp>
+      <p:sp>
+        <p:nvSpPr>
+          <p:cNvPr id="15" name="Text 13"/>
+          <p:cNvSpPr/>
+          <p:nvPr/>
+        </p:nvSpPr>
+        <p:spPr>
+          <a:xfrm>
+            <a:off x="621792" y="2450592"/>
+            <a:ext cx="3730752" cy="530352"/>
+          </a:xfrm>
+          <a:prstGeom prst="rect">
+            <a:avLst/>
+          </a:prstGeom>
+          <a:noFill/>
+          <a:ln/>
+        </p:spPr>
+        <p:txBody>
+          <a:bodyPr wrap="square" lIns="0" tIns="0" rIns="0" bIns="0" rtlCol="0" anchor="ctr"/>
+          <a:lstStyle/>
+          <a:p>
+            <a:pPr marL="0" indent="0" algn="l">
+              <a:buNone/>
+            </a:pPr>
+            <a:r>
+              <a:rPr lang="en-US" sz="1100" b="1" dirty="0">
+                <a:solidFill>
+                  <a:srgbClr val="111111"/>
+                </a:solidFill>
+                <a:latin typeface="Arial" pitchFamily="34" charset="0"/>
+                <a:ea typeface="Arial" pitchFamily="34" charset="-122"/>
+                <a:cs typeface="Arial" pitchFamily="34" charset="-120"/>
+              </a:rPr>
+              <a:t>Human override rate  </a:t>
+            </a:r>
+            <a:r>
+              <a:rPr lang="en-US" sz="1100" dirty="0">
+                <a:solidFill>
+                  <a:srgbClr val="4A4A4A"/>
+                </a:solidFill>
+                <a:latin typeface="Arial" pitchFamily="34" charset="0"/>
+                <a:ea typeface="Arial" pitchFamily="34" charset="-122"/>
+                <a:cs typeface="Arial" pitchFamily="34" charset="-120"/>
+              </a:rPr>
+              <a:t>Alert &gt; 20% in 7-day window</a:t>
+            </a:r>
+            <a:endParaRPr lang="en-US" sz="1100" dirty="0"/>
+          </a:p>
+        </p:txBody>
+      </p:sp>
+      <p:sp>
+        <p:nvSpPr>
+          <p:cNvPr id="16" name="Shape 14"/>
+          <p:cNvSpPr/>
+          <p:nvPr/>
+        </p:nvSpPr>
+        <p:spPr>
+          <a:xfrm>
+            <a:off x="457200" y="3054096"/>
+            <a:ext cx="4023360" cy="530352"/>
+          </a:xfrm>
+          <a:prstGeom prst="rect">
+            <a:avLst/>
+          </a:prstGeom>
+          <a:solidFill>
+            <a:srgbClr val="FFFFFF"/>
+          </a:solidFill>
+          <a:ln w="12700">
+            <a:solidFill>
+              <a:srgbClr val="E2E8F0"/>
+            </a:solidFill>
+            <a:prstDash val="solid"/>
+          </a:ln>
+          <a:effectLst>
+            <a:outerShdw blurRad="127000" dist="25400" dir="8100000" algn="bl" rotWithShape="0">
+              <a:srgbClr val="000000">
+                <a:alpha val="7000"/>
+              </a:srgbClr>
+            </a:outerShdw>
+          </a:effectLst>
+        </p:spPr>
+        <p:txBody>
+          <a:bodyPr/>
+          <a:lstStyle/>
+          <a:p>
+            <a:endParaRPr lang="de-DE"/>
+          </a:p>
+        </p:txBody>
+      </p:sp>
+      <p:sp>
+        <p:nvSpPr>
+          <p:cNvPr id="17" name="Shape 15"/>
+          <p:cNvSpPr/>
+          <p:nvPr/>
+        </p:nvSpPr>
+        <p:spPr>
+          <a:xfrm>
+            <a:off x="457200" y="3054096"/>
+            <a:ext cx="45720" cy="530352"/>
+          </a:xfrm>
+          <a:prstGeom prst="rect">
+            <a:avLst/>
+          </a:prstGeom>
+          <a:solidFill>
+            <a:srgbClr val="005AEE"/>
+          </a:solidFill>
+          <a:ln w="12700">
+            <a:solidFill>
+              <a:srgbClr val="005AEE"/>
+            </a:solidFill>
+            <a:prstDash val="solid"/>
+          </a:ln>
+        </p:spPr>
+        <p:txBody>
+          <a:bodyPr/>
+          <a:lstStyle/>
+          <a:p>
+            <a:endParaRPr lang="de-DE"/>
+          </a:p>
+        </p:txBody>
+      </p:sp>
+      <p:sp>
+        <p:nvSpPr>
+          <p:cNvPr id="18" name="Text 16"/>
+          <p:cNvSpPr/>
+          <p:nvPr/>
+        </p:nvSpPr>
+        <p:spPr>
+          <a:xfrm>
+            <a:off x="621792" y="3054096"/>
+            <a:ext cx="3730752" cy="530352"/>
+          </a:xfrm>
+          <a:prstGeom prst="rect">
+            <a:avLst/>
+          </a:prstGeom>
+          <a:noFill/>
+          <a:ln/>
+        </p:spPr>
+        <p:txBody>
+          <a:bodyPr wrap="square" lIns="0" tIns="0" rIns="0" bIns="0" rtlCol="0" anchor="ctr"/>
+          <a:lstStyle/>
+          <a:p>
+            <a:pPr marL="0" indent="0" algn="l">
+              <a:buNone/>
+            </a:pPr>
+            <a:r>
+              <a:rPr lang="en-US" sz="1100" b="1" dirty="0">
+                <a:solidFill>
+                  <a:srgbClr val="111111"/>
+                </a:solidFill>
+                <a:latin typeface="Arial" pitchFamily="34" charset="0"/>
+                <a:ea typeface="Arial" pitchFamily="34" charset="-122"/>
+                <a:cs typeface="Arial" pitchFamily="34" charset="-120"/>
+              </a:rPr>
+              <a:t>Latency per agent  </a:t>
+            </a:r>
+            <a:r>
+              <a:rPr lang="en-US" sz="1100" dirty="0">
+                <a:solidFill>
+                  <a:srgbClr val="4A4A4A"/>
+                </a:solidFill>
+                <a:latin typeface="Arial" pitchFamily="34" charset="0"/>
+                <a:ea typeface="Arial" pitchFamily="34" charset="-122"/>
+                <a:cs typeface="Arial" pitchFamily="34" charset="-120"/>
+              </a:rPr>
+              <a:t>Alert p95 &gt; 30 seconds</a:t>
+            </a:r>
+            <a:endParaRPr lang="en-US" sz="1100" dirty="0"/>
+          </a:p>
+        </p:txBody>
+      </p:sp>
+      <p:sp>
+        <p:nvSpPr>
+          <p:cNvPr id="19" name="Shape 17"/>
+          <p:cNvSpPr/>
+          <p:nvPr/>
+        </p:nvSpPr>
+        <p:spPr>
+          <a:xfrm>
+            <a:off x="4663440" y="1847088"/>
+            <a:ext cx="4023360" cy="530352"/>
+          </a:xfrm>
+          <a:prstGeom prst="rect">
+            <a:avLst/>
+          </a:prstGeom>
+          <a:solidFill>
+            <a:srgbClr val="FFFFFF"/>
+          </a:solidFill>
+          <a:ln w="12700">
+            <a:solidFill>
+              <a:srgbClr val="E2E8F0"/>
+            </a:solidFill>
+            <a:prstDash val="solid"/>
+          </a:ln>
+          <a:effectLst>
+            <a:outerShdw blurRad="127000" dist="25400" dir="8100000" algn="bl" rotWithShape="0">
+              <a:srgbClr val="000000">
+                <a:alpha val="7000"/>
+              </a:srgbClr>
+            </a:outerShdw>
+          </a:effectLst>
+        </p:spPr>
+        <p:txBody>
+          <a:bodyPr/>
+          <a:lstStyle/>
+          <a:p>
+            <a:endParaRPr lang="de-DE"/>
+          </a:p>
+        </p:txBody>
+      </p:sp>
+      <p:sp>
+        <p:nvSpPr>
+          <p:cNvPr id="20" name="Shape 18"/>
+          <p:cNvSpPr/>
+          <p:nvPr/>
+        </p:nvSpPr>
+        <p:spPr>
+          <a:xfrm>
+            <a:off x="4663440" y="1847088"/>
+            <a:ext cx="45720" cy="530352"/>
+          </a:xfrm>
+          <a:prstGeom prst="rect">
+            <a:avLst/>
+          </a:prstGeom>
+          <a:solidFill>
+            <a:srgbClr val="005AEE"/>
+          </a:solidFill>
+          <a:ln w="12700">
+            <a:solidFill>
+              <a:srgbClr val="005AEE"/>
+            </a:solidFill>
+            <a:prstDash val="solid"/>
+          </a:ln>
+        </p:spPr>
+        <p:txBody>
+          <a:bodyPr/>
+          <a:lstStyle/>
+          <a:p>
+            <a:endParaRPr lang="de-DE"/>
+          </a:p>
+        </p:txBody>
+      </p:sp>
+      <p:sp>
+        <p:nvSpPr>
+          <p:cNvPr id="21" name="Text 19"/>
+          <p:cNvSpPr/>
+          <p:nvPr/>
+        </p:nvSpPr>
+        <p:spPr>
+          <a:xfrm>
+            <a:off x="4828032" y="1847088"/>
+            <a:ext cx="3730752" cy="530352"/>
+          </a:xfrm>
+          <a:prstGeom prst="rect">
+            <a:avLst/>
+          </a:prstGeom>
+          <a:noFill/>
+          <a:ln/>
+        </p:spPr>
+        <p:txBody>
+          <a:bodyPr wrap="square" lIns="0" tIns="0" rIns="0" bIns="0" rtlCol="0" anchor="ctr"/>
+          <a:lstStyle/>
+          <a:p>
+            <a:pPr marL="0" indent="0" algn="l">
+              <a:buNone/>
+            </a:pPr>
+            <a:r>
+              <a:rPr lang="en-US" sz="1100" b="1" dirty="0">
+                <a:solidFill>
+                  <a:srgbClr val="111111"/>
+                </a:solidFill>
+                <a:latin typeface="Arial" pitchFamily="34" charset="0"/>
+                <a:ea typeface="Arial" pitchFamily="34" charset="-122"/>
+                <a:cs typeface="Arial" pitchFamily="34" charset="-120"/>
+              </a:rPr>
+              <a:t>Failed extractions  </a:t>
+            </a:r>
+            <a:r>
+              <a:rPr lang="en-US" sz="1100" dirty="0">
+                <a:solidFill>
+                  <a:srgbClr val="4A4A4A"/>
+                </a:solidFill>
+                <a:latin typeface="Arial" pitchFamily="34" charset="0"/>
+                <a:ea typeface="Arial" pitchFamily="34" charset="-122"/>
+                <a:cs typeface="Arial" pitchFamily="34" charset="-120"/>
+              </a:rPr>
+              <a:t>Zero tolerance — immediate alert</a:t>
+            </a:r>
+            <a:endParaRPr lang="en-US" sz="1100" dirty="0"/>
+          </a:p>
+        </p:txBody>
+      </p:sp>
+      <p:sp>
+        <p:nvSpPr>
+          <p:cNvPr id="22" name="Shape 20"/>
+          <p:cNvSpPr/>
+          <p:nvPr/>
+        </p:nvSpPr>
+        <p:spPr>
+          <a:xfrm>
+            <a:off x="4663440" y="2450592"/>
+            <a:ext cx="4023360" cy="530352"/>
+          </a:xfrm>
+          <a:prstGeom prst="rect">
+            <a:avLst/>
+          </a:prstGeom>
+          <a:solidFill>
+            <a:srgbClr val="FFFFFF"/>
+          </a:solidFill>
+          <a:ln w="12700">
+            <a:solidFill>
+              <a:srgbClr val="E2E8F0"/>
+            </a:solidFill>
+            <a:prstDash val="solid"/>
+          </a:ln>
+          <a:effectLst>
+            <a:outerShdw blurRad="127000" dist="25400" dir="8100000" algn="bl" rotWithShape="0">
+              <a:srgbClr val="000000">
+                <a:alpha val="7000"/>
+              </a:srgbClr>
+            </a:outerShdw>
+          </a:effectLst>
+        </p:spPr>
+        <p:txBody>
+          <a:bodyPr/>
+          <a:lstStyle/>
+          <a:p>
+            <a:endParaRPr lang="de-DE"/>
+          </a:p>
+        </p:txBody>
+      </p:sp>
+      <p:sp>
+        <p:nvSpPr>
+          <p:cNvPr id="23" name="Shape 21"/>
+          <p:cNvSpPr/>
+          <p:nvPr/>
+        </p:nvSpPr>
+        <p:spPr>
+          <a:xfrm>
+            <a:off x="4663440" y="2450592"/>
+            <a:ext cx="45720" cy="530352"/>
+          </a:xfrm>
+          <a:prstGeom prst="rect">
+            <a:avLst/>
+          </a:prstGeom>
+          <a:solidFill>
+            <a:srgbClr val="005AEE"/>
+          </a:solidFill>
+          <a:ln w="12700">
+            <a:solidFill>
+              <a:srgbClr val="005AEE"/>
+            </a:solidFill>
+            <a:prstDash val="solid"/>
+          </a:ln>
+        </p:spPr>
+        <p:txBody>
+          <a:bodyPr/>
+          <a:lstStyle/>
+          <a:p>
+            <a:endParaRPr lang="de-DE"/>
+          </a:p>
+        </p:txBody>
+      </p:sp>
+      <p:sp>
+        <p:nvSpPr>
+          <p:cNvPr id="24" name="Text 22"/>
+          <p:cNvSpPr/>
+          <p:nvPr/>
+        </p:nvSpPr>
+        <p:spPr>
+          <a:xfrm>
+            <a:off x="4828032" y="2450592"/>
+            <a:ext cx="3730752" cy="530352"/>
+          </a:xfrm>
+          <a:prstGeom prst="rect">
+            <a:avLst/>
+          </a:prstGeom>
+          <a:noFill/>
+          <a:ln/>
+        </p:spPr>
+        <p:txBody>
+          <a:bodyPr wrap="square" lIns="0" tIns="0" rIns="0" bIns="0" rtlCol="0" anchor="ctr"/>
+          <a:lstStyle/>
+          <a:p>
+            <a:pPr marL="0" indent="0" algn="l">
+              <a:buNone/>
+            </a:pPr>
+            <a:r>
+              <a:rPr lang="en-US" sz="1100" b="1" dirty="0">
+                <a:solidFill>
+                  <a:srgbClr val="111111"/>
+                </a:solidFill>
+                <a:latin typeface="Arial" pitchFamily="34" charset="0"/>
+                <a:ea typeface="Arial" pitchFamily="34" charset="-122"/>
+                <a:cs typeface="Arial" pitchFamily="34" charset="-120"/>
+              </a:rPr>
+              <a:t>Compliance flag trend  </a:t>
+            </a:r>
+            <a:r>
+              <a:rPr lang="en-US" sz="1100" dirty="0">
+                <a:solidFill>
+                  <a:srgbClr val="4A4A4A"/>
+                </a:solidFill>
+                <a:latin typeface="Arial" pitchFamily="34" charset="0"/>
+                <a:ea typeface="Arial" pitchFamily="34" charset="-122"/>
+                <a:cs typeface="Arial" pitchFamily="34" charset="-120"/>
+              </a:rPr>
+              <a:t>Alert if Red &gt; 10% of new contracts</a:t>
+            </a:r>
+            <a:endParaRPr lang="en-US" sz="1100" dirty="0"/>
+          </a:p>
+        </p:txBody>
+      </p:sp>
+      <p:sp>
+        <p:nvSpPr>
+          <p:cNvPr id="25" name="Shape 23"/>
+          <p:cNvSpPr/>
+          <p:nvPr/>
+        </p:nvSpPr>
+        <p:spPr>
+          <a:xfrm>
+            <a:off x="4663440" y="3054096"/>
+            <a:ext cx="4023360" cy="530352"/>
+          </a:xfrm>
+          <a:prstGeom prst="rect">
+            <a:avLst/>
+          </a:prstGeom>
+          <a:solidFill>
+            <a:srgbClr val="FFFFFF"/>
+          </a:solidFill>
+          <a:ln w="12700">
+            <a:solidFill>
+              <a:srgbClr val="E2E8F0"/>
+            </a:solidFill>
+            <a:prstDash val="solid"/>
+          </a:ln>
+          <a:effectLst>
+            <a:outerShdw blurRad="127000" dist="25400" dir="8100000" algn="bl" rotWithShape="0">
+              <a:srgbClr val="000000">
+                <a:alpha val="7000"/>
+              </a:srgbClr>
+            </a:outerShdw>
+          </a:effectLst>
+        </p:spPr>
+        <p:txBody>
+          <a:bodyPr/>
+          <a:lstStyle/>
+          <a:p>
+            <a:endParaRPr lang="de-DE"/>
+          </a:p>
+        </p:txBody>
+      </p:sp>
+      <p:sp>
+        <p:nvSpPr>
+          <p:cNvPr id="26" name="Shape 24"/>
+          <p:cNvSpPr/>
+          <p:nvPr/>
+        </p:nvSpPr>
+        <p:spPr>
+          <a:xfrm>
+            <a:off x="4663440" y="3054096"/>
+            <a:ext cx="45720" cy="530352"/>
+          </a:xfrm>
+          <a:prstGeom prst="rect">
+            <a:avLst/>
+          </a:prstGeom>
+          <a:solidFill>
+            <a:srgbClr val="005AEE"/>
+          </a:solidFill>
+          <a:ln w="12700">
+            <a:solidFill>
+              <a:srgbClr val="005AEE"/>
+            </a:solidFill>
+            <a:prstDash val="solid"/>
+          </a:ln>
+        </p:spPr>
+        <p:txBody>
+          <a:bodyPr/>
+          <a:lstStyle/>
+          <a:p>
+            <a:endParaRPr lang="de-DE"/>
+          </a:p>
+        </p:txBody>
+      </p:sp>
+      <p:sp>
+        <p:nvSpPr>
+          <p:cNvPr id="27" name="Text 25"/>
+          <p:cNvSpPr/>
+          <p:nvPr/>
+        </p:nvSpPr>
+        <p:spPr>
+          <a:xfrm>
+            <a:off x="4828032" y="3054096"/>
+            <a:ext cx="3730752" cy="530352"/>
+          </a:xfrm>
+          <a:prstGeom prst="rect">
+            <a:avLst/>
+          </a:prstGeom>
+          <a:noFill/>
+          <a:ln/>
+        </p:spPr>
+        <p:txBody>
+          <a:bodyPr wrap="square" lIns="0" tIns="0" rIns="0" bIns="0" rtlCol="0" anchor="ctr"/>
+          <a:lstStyle/>
+          <a:p>
+            <a:pPr marL="0" indent="0" algn="l">
+              <a:buNone/>
+            </a:pPr>
+            <a:r>
+              <a:rPr lang="en-US" sz="1100" b="1" dirty="0">
+                <a:solidFill>
+                  <a:srgbClr val="111111"/>
+                </a:solidFill>
+                <a:latin typeface="Arial" pitchFamily="34" charset="0"/>
+                <a:ea typeface="Arial" pitchFamily="34" charset="-122"/>
+                <a:cs typeface="Arial" pitchFamily="34" charset="-120"/>
+              </a:rPr>
+              <a:t>PII redaction audit  </a:t>
+            </a:r>
+            <a:r>
+              <a:rPr lang="en-US" sz="1100" dirty="0">
+                <a:solidFill>
+                  <a:srgbClr val="4A4A4A"/>
+                </a:solidFill>
+                <a:latin typeface="Arial" pitchFamily="34" charset="0"/>
+                <a:ea typeface="Arial" pitchFamily="34" charset="-122"/>
+                <a:cs typeface="Arial" pitchFamily="34" charset="-120"/>
+              </a:rPr>
+              <a:t>Weekly — zero tolerance for PII in traces</a:t>
+            </a:r>
+            <a:endParaRPr lang="en-US" sz="1100" dirty="0"/>
+          </a:p>
+        </p:txBody>
+      </p:sp>
+      <p:sp>
+        <p:nvSpPr>
+          <p:cNvPr id="28" name="Shape 26"/>
+          <p:cNvSpPr/>
+          <p:nvPr/>
+        </p:nvSpPr>
+        <p:spPr>
+          <a:xfrm>
+            <a:off x="457200" y="3712464"/>
+            <a:ext cx="8229600" cy="1353312"/>
+          </a:xfrm>
+          <a:prstGeom prst="rect">
+            <a:avLst/>
+          </a:prstGeom>
+          <a:solidFill>
+            <a:srgbClr val="F0FDF4"/>
+          </a:solidFill>
+          <a:ln w="12700">
+            <a:solidFill>
+              <a:srgbClr val="16A34A"/>
+            </a:solidFill>
+            <a:prstDash val="solid"/>
+          </a:ln>
+        </p:spPr>
+        <p:txBody>
+          <a:bodyPr/>
+          <a:lstStyle/>
+          <a:p>
+            <a:endParaRPr lang="de-DE"/>
+          </a:p>
+        </p:txBody>
+      </p:sp>
+      <p:sp>
+        <p:nvSpPr>
+          <p:cNvPr id="29" name="Shape 27"/>
+          <p:cNvSpPr/>
+          <p:nvPr/>
+        </p:nvSpPr>
+        <p:spPr>
+          <a:xfrm>
+            <a:off x="457200" y="3712464"/>
+            <a:ext cx="45720" cy="1353312"/>
+          </a:xfrm>
+          <a:prstGeom prst="rect">
+            <a:avLst/>
+          </a:prstGeom>
+          <a:solidFill>
+            <a:srgbClr val="16A34A"/>
+          </a:solidFill>
+          <a:ln w="12700">
+            <a:solidFill>
+              <a:srgbClr val="16A34A"/>
+            </a:solidFill>
+            <a:prstDash val="solid"/>
+          </a:ln>
+        </p:spPr>
+        <p:txBody>
+          <a:bodyPr/>
+          <a:lstStyle/>
+          <a:p>
+            <a:endParaRPr lang="de-DE"/>
+          </a:p>
+        </p:txBody>
+      </p:sp>
+      <p:sp>
+        <p:nvSpPr>
+          <p:cNvPr id="30" name="Text 28"/>
+          <p:cNvSpPr/>
+          <p:nvPr/>
+        </p:nvSpPr>
+        <p:spPr>
+          <a:xfrm>
+            <a:off x="640080" y="3767328"/>
+            <a:ext cx="7863840" cy="329184"/>
+          </a:xfrm>
+          <a:prstGeom prst="rect">
+            <a:avLst/>
+          </a:prstGeom>
+          <a:noFill/>
+          <a:ln/>
+        </p:spPr>
+        <p:txBody>
+          <a:bodyPr wrap="square" lIns="0" tIns="0" rIns="0" bIns="0" rtlCol="0" anchor="ctr"/>
+          <a:lstStyle/>
+          <a:p>
+            <a:pPr marL="0" indent="0" algn="l">
+              <a:buNone/>
+            </a:pPr>
+            <a:r>
+              <a:rPr lang="en-US" sz="1200" b="1" dirty="0">
+                <a:solidFill>
+                  <a:srgbClr val="16A34A"/>
+                </a:solidFill>
+                <a:latin typeface="Arial" pitchFamily="34" charset="0"/>
+                <a:ea typeface="Arial" pitchFamily="34" charset="-122"/>
+                <a:cs typeface="Arial" pitchFamily="34" charset="-120"/>
+              </a:rPr>
+              <a:t>✓  Live — contractos-oracle-prod</a:t>
+            </a:r>
+            <a:endParaRPr lang="en-US" sz="1200" dirty="0"/>
+          </a:p>
+        </p:txBody>
+      </p:sp>
+      <p:sp>
+        <p:nvSpPr>
+          <p:cNvPr id="31" name="Text 29"/>
+          <p:cNvSpPr/>
+          <p:nvPr/>
+        </p:nvSpPr>
+        <p:spPr>
+          <a:xfrm>
+            <a:off x="640080" y="4114800"/>
+            <a:ext cx="7863840" cy="274320"/>
+          </a:xfrm>
+          <a:prstGeom prst="rect">
+            <a:avLst/>
+          </a:prstGeom>
+          <a:noFill/>
+          <a:ln/>
+        </p:spPr>
+        <p:txBody>
+          <a:bodyPr wrap="square" lIns="0" tIns="0" rIns="0" bIns="0" rtlCol="0" anchor="ctr"/>
+          <a:lstStyle/>
+          <a:p>
+            <a:pPr marL="0" indent="0" algn="l">
+              <a:buNone/>
+            </a:pPr>
+            <a:r>
+              <a:rPr lang="en-US" sz="1050" dirty="0">
+                <a:solidFill>
+                  <a:srgbClr val="166534"/>
+                </a:solidFill>
+                <a:latin typeface="Arial" pitchFamily="34" charset="0"/>
+                <a:ea typeface="Arial" pitchFamily="34" charset="-122"/>
+                <a:cs typeface="Arial" pitchFamily="34" charset="-120"/>
+              </a:rPr>
+              <a:t>6 runs complete  ·  All 5 agents traced  ·  EU endpoint: eu.api.smith.langchain.com  ·  PII redacted</a:t>
+            </a:r>
+            <a:endParaRPr lang="en-US" sz="1050" dirty="0"/>
+          </a:p>
+        </p:txBody>
+      </p:sp>
+      <p:sp>
+        <p:nvSpPr>
+          <p:cNvPr id="32" name="Text 30"/>
+          <p:cNvSpPr/>
+          <p:nvPr/>
+        </p:nvSpPr>
+        <p:spPr>
+          <a:xfrm>
+            <a:off x="640080" y="4434840"/>
+            <a:ext cx="7863840" cy="548640"/>
+          </a:xfrm>
+          <a:prstGeom prst="rect">
+            <a:avLst/>
+          </a:prstGeom>
+          <a:noFill/>
+          <a:ln/>
+        </p:spPr>
+        <p:txBody>
+          <a:bodyPr wrap="square" lIns="0" tIns="0" rIns="0" bIns="0" rtlCol="0" anchor="ctr"/>
+          <a:lstStyle/>
+          <a:p>
+            <a:pPr marL="0" indent="0" algn="l">
+              <a:buNone/>
+            </a:pPr>
+            <a:r>
+              <a:rPr lang="en-US" sz="1050" i="1" dirty="0">
+                <a:solidFill>
+                  <a:srgbClr val="166534"/>
+                </a:solidFill>
+                <a:latin typeface="Arial" pitchFamily="34" charset="0"/>
+                <a:ea typeface="Arial" pitchFamily="34" charset="-122"/>
+                <a:cs typeface="Arial" pitchFamily="34" charset="-120"/>
+              </a:rPr>
+              <a:t>"Here is where you can see everything the AI did, catch a mistake before it costs you money, and prove to an auditor exactly what happened — in under five minutes."</a:t>
+            </a:r>
+            <a:endParaRPr lang="en-US" sz="1050" dirty="0"/>
+          </a:p>
+        </p:txBody>
+      </p:sp>
+    </p:spTree>
+  </p:cSld>
+  <p:clrMapOvr>
+    <a:masterClrMapping/>
+  </p:clrMapOvr>
+</p:sld>
+</file>
+
+<file path=ppt/slides/slide11.xml><?xml version="1.0" encoding="utf-8"?>
+<p:sld xmlns:a="http://schemas.openxmlformats.org/drawingml/2006/main" xmlns:r="http://schemas.openxmlformats.org/officeDocument/2006/relationships" xmlns:p="http://schemas.openxmlformats.org/presentationml/2006/main">
   <p:cSld name="Slide 10">
     <p:bg>
       <p:bgPr>
@@ -3832,7 +5109,7 @@
                 <a:ea typeface="Arial" pitchFamily="34" charset="-122"/>
                 <a:cs typeface="Arial" pitchFamily="34" charset="-120"/>
               </a:rPr>
-              <a:t>9 pain points discovered blind — all confirmed by verbatim transcript. Revenue side cannot be fixed. Only lever is cost.</a:t>
+              <a:t>9 pain points discovered blind. Revenue side cannot be fixed. Only lever is cost.</a:t>
             </a:r>
             <a:endParaRPr lang="en-US" sz="1050" dirty="0"/>
           </a:p>
@@ -4646,9 +5923,8 @@
                 <a:ea typeface="Arial" pitchFamily="34" charset="-122"/>
                 <a:cs typeface="Arial" pitchFamily="34" charset="-120"/>
               </a:rPr>
-              <a:t>Eugen — mission-driven, product rather financials focused</a:t>
-            </a:r>
-            <a:endParaRPr lang="en-US" sz="1100" dirty="0"/>
+              <a:t>Eugen </a:t>
+            </a:r>
           </a:p>
         </p:txBody>
       </p:sp>
@@ -4696,7 +5972,7 @@
                 <a:ea typeface="Arial" pitchFamily="34" charset="-122"/>
                 <a:cs typeface="Arial" pitchFamily="34" charset="-120"/>
               </a:rPr>
-              <a:t>Thibaud — new to AI, break even is a priority</a:t>
+              <a:t>Thibaud</a:t>
             </a:r>
             <a:endParaRPr lang="en-US" sz="1100" dirty="0"/>
           </a:p>
@@ -6332,15 +7608,7 @@
 
 <file path=ppt/slides/slide5.xml><?xml version="1.0" encoding="utf-8"?>
 <p:sld xmlns:a="http://schemas.openxmlformats.org/drawingml/2006/main" xmlns:r="http://schemas.openxmlformats.org/officeDocument/2006/relationships" xmlns:p="http://schemas.openxmlformats.org/presentationml/2006/main">
-  <p:cSld name="Slide 5">
-    <p:bg>
-      <p:bgPr>
-        <a:solidFill>
-          <a:srgbClr val="FFFFFF"/>
-        </a:solidFill>
-        <a:effectLst/>
-      </p:bgPr>
-    </p:bg>
+  <p:cSld>
     <p:spTree>
       <p:nvGrpSpPr>
         <p:cNvPr id="1" name=""/>
@@ -6388,7 +7656,7 @@
                 <a:ea typeface="Arial" pitchFamily="34" charset="-122"/>
                 <a:cs typeface="Arial" pitchFamily="34" charset="-120"/>
               </a:rPr>
-              <a:t>ih</a:t>
+              <a:t>h</a:t>
             </a:r>
             <a:endParaRPr lang="en-US" sz="1200" dirty="0"/>
           </a:p>
@@ -6434,45 +7702,6 @@
         </p:nvSpPr>
         <p:spPr>
           <a:xfrm>
-            <a:off x="457200" y="109728"/>
-            <a:ext cx="7955280" cy="676656"/>
-          </a:xfrm>
-          <a:prstGeom prst="rect">
-            <a:avLst/>
-          </a:prstGeom>
-          <a:noFill/>
-          <a:ln/>
-        </p:spPr>
-        <p:txBody>
-          <a:bodyPr wrap="square" lIns="0" tIns="0" rIns="0" bIns="0" rtlCol="0" anchor="ctr"/>
-          <a:lstStyle/>
-          <a:p>
-            <a:pPr marL="0" indent="0" algn="l">
-              <a:buNone/>
-            </a:pPr>
-            <a:r>
-              <a:rPr lang="en-US" sz="2600" b="1" dirty="0">
-                <a:solidFill>
-                  <a:srgbClr val="111111"/>
-                </a:solidFill>
-                <a:latin typeface="Arial" pitchFamily="34" charset="0"/>
-                <a:ea typeface="Arial" pitchFamily="34" charset="-122"/>
-                <a:cs typeface="Arial" pitchFamily="34" charset="-120"/>
-              </a:rPr>
-              <a:t>ContractOS — five agents, one per capability, zero automated decisions</a:t>
-            </a:r>
-            <a:endParaRPr lang="en-US" sz="2600" dirty="0"/>
-          </a:p>
-        </p:txBody>
-      </p:sp>
-      <p:sp>
-        <p:nvSpPr>
-          <p:cNvPr id="6" name="Text 4"/>
-          <p:cNvSpPr/>
-          <p:nvPr/>
-        </p:nvSpPr>
-        <p:spPr>
-          <a:xfrm>
             <a:off x="457200" y="868680"/>
             <a:ext cx="8229600" cy="237744"/>
           </a:xfrm>
@@ -6506,14 +7735,53 @@
       </p:sp>
       <p:sp>
         <p:nvSpPr>
+          <p:cNvPr id="6" name="Text 4"/>
+          <p:cNvSpPr/>
+          <p:nvPr/>
+        </p:nvSpPr>
+        <p:spPr>
+          <a:xfrm>
+            <a:off x="457200" y="91440"/>
+            <a:ext cx="7955280" cy="694944"/>
+          </a:xfrm>
+          <a:prstGeom prst="rect">
+            <a:avLst/>
+          </a:prstGeom>
+          <a:noFill/>
+          <a:ln/>
+        </p:spPr>
+        <p:txBody>
+          <a:bodyPr wrap="square" lIns="0" tIns="0" rIns="0" bIns="0" rtlCol="0" anchor="ctr"/>
+          <a:lstStyle/>
+          <a:p>
+            <a:pPr marL="0" indent="0" algn="l">
+              <a:buNone/>
+            </a:pPr>
+            <a:r>
+              <a:rPr lang="en-US" sz="2200" b="1" dirty="0">
+                <a:solidFill>
+                  <a:srgbClr val="111111"/>
+                </a:solidFill>
+                <a:latin typeface="Arial" pitchFamily="34" charset="0"/>
+                <a:ea typeface="Arial" pitchFamily="34" charset="-122"/>
+                <a:cs typeface="Arial" pitchFamily="34" charset="-120"/>
+              </a:rPr>
+              <a:t>ContractOS — five agents, one per capability, zero automated decisions</a:t>
+            </a:r>
+            <a:endParaRPr lang="en-US" sz="2200" dirty="0"/>
+          </a:p>
+        </p:txBody>
+      </p:sp>
+      <p:sp>
+        <p:nvSpPr>
           <p:cNvPr id="7" name="Shape 5"/>
           <p:cNvSpPr/>
           <p:nvPr/>
         </p:nvSpPr>
         <p:spPr>
           <a:xfrm>
-            <a:off x="457200" y="1261872"/>
-            <a:ext cx="8229600" cy="420624"/>
+            <a:off x="457200" y="1170432"/>
+            <a:ext cx="8229600" cy="402336"/>
           </a:xfrm>
           <a:prstGeom prst="rect">
             <a:avLst/>
@@ -6544,8 +7812,8 @@
         </p:nvSpPr>
         <p:spPr>
           <a:xfrm>
-            <a:off x="457200" y="1261872"/>
-            <a:ext cx="54864" cy="420624"/>
+            <a:off x="457200" y="1170432"/>
+            <a:ext cx="45720" cy="402336"/>
           </a:xfrm>
           <a:prstGeom prst="rect">
             <a:avLst/>
@@ -6576,8 +7844,8 @@
         </p:nvSpPr>
         <p:spPr>
           <a:xfrm>
-            <a:off x="640080" y="1261872"/>
-            <a:ext cx="7955280" cy="420624"/>
+            <a:off x="621792" y="1170432"/>
+            <a:ext cx="7955280" cy="402336"/>
           </a:xfrm>
           <a:prstGeom prst="rect">
             <a:avLst/>
@@ -6593,9 +7861,9 @@
               <a:buNone/>
             </a:pPr>
             <a:r>
-              <a:rPr lang="en-US" sz="1300" b="1" i="1" dirty="0">
-                <a:solidFill>
-                  <a:srgbClr val="222222"/>
+              <a:rPr lang="en-US" sz="1150" b="1" i="1" dirty="0">
+                <a:solidFill>
+                  <a:srgbClr val="111111"/>
                 </a:solidFill>
                 <a:latin typeface="Arial" pitchFamily="34" charset="0"/>
                 <a:ea typeface="Arial" pitchFamily="34" charset="-122"/>
@@ -6603,7 +7871,7 @@
               </a:rPr>
               <a:t>One interface. Five AI agents orchestrated by LangGraph. Every output goes to a human before any action.</a:t>
             </a:r>
-            <a:endParaRPr lang="en-US" sz="1300" dirty="0"/>
+            <a:endParaRPr lang="en-US" sz="1150" dirty="0"/>
           </a:p>
         </p:txBody>
       </p:sp>
@@ -6615,8 +7883,8 @@
         </p:nvSpPr>
         <p:spPr>
           <a:xfrm>
-            <a:off x="292608" y="1847088"/>
-            <a:ext cx="1591056" cy="2816352"/>
+            <a:off x="292608" y="1682496"/>
+            <a:ext cx="1591056" cy="2962656"/>
           </a:xfrm>
           <a:prstGeom prst="rect">
             <a:avLst/>
@@ -6631,9 +7899,9 @@
             <a:prstDash val="solid"/>
           </a:ln>
           <a:effectLst>
-            <a:outerShdw blurRad="127000" dist="25400" dir="8100000" algn="bl" rotWithShape="0">
+            <a:outerShdw blurRad="101600" dist="25400" dir="8100000" algn="bl" rotWithShape="0">
               <a:srgbClr val="000000">
-                <a:alpha val="7000"/>
+                <a:alpha val="6000"/>
               </a:srgbClr>
             </a:outerShdw>
           </a:effectLst>
@@ -6654,7 +7922,7 @@
         </p:nvSpPr>
         <p:spPr>
           <a:xfrm>
-            <a:off x="292608" y="1847088"/>
+            <a:off x="292608" y="1682496"/>
             <a:ext cx="1591056" cy="54864"/>
           </a:xfrm>
           <a:prstGeom prst="rect">
@@ -6686,7 +7954,7 @@
         </p:nvSpPr>
         <p:spPr>
           <a:xfrm>
-            <a:off x="795528" y="1993392"/>
+            <a:off x="795528" y="1810512"/>
             <a:ext cx="585216" cy="585216"/>
           </a:xfrm>
           <a:prstGeom prst="ellipse">
@@ -6718,7 +7986,7 @@
         </p:nvSpPr>
         <p:spPr>
           <a:xfrm>
-            <a:off x="795528" y="1993392"/>
+            <a:off x="795528" y="1810512"/>
             <a:ext cx="585216" cy="585216"/>
           </a:xfrm>
           <a:prstGeom prst="rect">
@@ -6735,7 +8003,7 @@
               <a:buNone/>
             </a:pPr>
             <a:r>
-              <a:rPr lang="en-US" sz="1600" b="1" dirty="0">
+              <a:rPr lang="en-US" sz="1800" b="1" dirty="0">
                 <a:solidFill>
                   <a:srgbClr val="FFFFFF"/>
                 </a:solidFill>
@@ -6745,7 +8013,7 @@
               </a:rPr>
               <a:t>1</a:t>
             </a:r>
-            <a:endParaRPr lang="en-US" sz="1600" dirty="0"/>
+            <a:endParaRPr lang="en-US" sz="1800" dirty="0"/>
           </a:p>
         </p:txBody>
       </p:sp>
@@ -6757,8 +8025,8 @@
         </p:nvSpPr>
         <p:spPr>
           <a:xfrm>
-            <a:off x="365760" y="2706624"/>
-            <a:ext cx="1444752" cy="502920"/>
+            <a:off x="347472" y="2487168"/>
+            <a:ext cx="1481328" cy="475488"/>
           </a:xfrm>
           <a:prstGeom prst="rect">
             <a:avLst/>
@@ -6774,7 +8042,7 @@
               <a:buNone/>
             </a:pPr>
             <a:r>
-              <a:rPr lang="en-US" sz="1150" b="1" dirty="0">
+              <a:rPr lang="en-US" sz="1100" b="1" dirty="0">
                 <a:solidFill>
                   <a:srgbClr val="111111"/>
                 </a:solidFill>
@@ -6784,14 +8052,14 @@
               </a:rPr>
               <a:t>Contract</a:t>
             </a:r>
-            <a:endParaRPr lang="en-US" sz="1150" dirty="0"/>
+            <a:endParaRPr lang="en-US" sz="1100" dirty="0"/>
           </a:p>
           <a:p>
             <a:pPr marL="0" indent="0" algn="ctr">
               <a:buNone/>
             </a:pPr>
             <a:r>
-              <a:rPr lang="en-US" sz="1150" b="1" dirty="0">
+              <a:rPr lang="en-US" sz="1100" b="1" dirty="0">
                 <a:solidFill>
                   <a:srgbClr val="111111"/>
                 </a:solidFill>
@@ -6801,7 +8069,7 @@
               </a:rPr>
               <a:t>Intelligence</a:t>
             </a:r>
-            <a:endParaRPr lang="en-US" sz="1150" dirty="0"/>
+            <a:endParaRPr lang="en-US" sz="1100" dirty="0"/>
           </a:p>
         </p:txBody>
       </p:sp>
@@ -6813,8 +8081,8 @@
         </p:nvSpPr>
         <p:spPr>
           <a:xfrm>
-            <a:off x="365760" y="3246120"/>
-            <a:ext cx="1444752" cy="274320"/>
+            <a:off x="347472" y="2980944"/>
+            <a:ext cx="1481328" cy="237744"/>
           </a:xfrm>
           <a:prstGeom prst="rect">
             <a:avLst/>
@@ -6830,7 +8098,7 @@
               <a:buNone/>
             </a:pPr>
             <a:r>
-              <a:rPr lang="en-US" sz="950" dirty="0">
+              <a:rPr lang="en-US" sz="900" b="1" dirty="0">
                 <a:solidFill>
                   <a:srgbClr val="005AEE"/>
                 </a:solidFill>
@@ -6840,36 +8108,73 @@
               </a:rPr>
               <a:t>Agent 1</a:t>
             </a:r>
-            <a:endParaRPr lang="en-US" sz="950" dirty="0"/>
-          </a:p>
-        </p:txBody>
-      </p:sp>
-      <p:sp>
-        <p:nvSpPr>
-          <p:cNvPr id="16" name="Text 14"/>
-          <p:cNvSpPr/>
-          <p:nvPr/>
-        </p:nvSpPr>
-        <p:spPr>
-          <a:xfrm>
-            <a:off x="365760" y="3566160"/>
-            <a:ext cx="1444752" cy="685800"/>
-          </a:xfrm>
-          <a:prstGeom prst="rect">
-            <a:avLst/>
-          </a:prstGeom>
-          <a:noFill/>
-          <a:ln/>
-        </p:spPr>
-        <p:txBody>
-          <a:bodyPr wrap="square" lIns="0" tIns="0" rIns="0" bIns="0" rtlCol="0" anchor="ctr"/>
-          <a:lstStyle/>
-          <a:p>
-            <a:pPr marL="0" indent="0" algn="ctr">
-              <a:buNone/>
-            </a:pPr>
-            <a:r>
-              <a:rPr lang="en-US" sz="950" dirty="0">
+            <a:endParaRPr lang="en-US" sz="900" dirty="0">
+              <a:solidFill>
+                <a:srgbClr val="005AEE"/>
+              </a:solidFill>
+            </a:endParaRPr>
+          </a:p>
+        </p:txBody>
+      </p:sp>
+      <p:sp>
+        <p:nvSpPr>
+          <p:cNvPr id="16" name="Shape 14"/>
+          <p:cNvSpPr/>
+          <p:nvPr/>
+        </p:nvSpPr>
+        <p:spPr>
+          <a:xfrm>
+            <a:off x="429768" y="3255264"/>
+            <a:ext cx="1316736" cy="18288"/>
+          </a:xfrm>
+          <a:prstGeom prst="rect">
+            <a:avLst/>
+          </a:prstGeom>
+          <a:solidFill>
+            <a:srgbClr val="E2E8F0"/>
+          </a:solidFill>
+          <a:ln w="12700">
+            <a:solidFill>
+              <a:srgbClr val="E2E8F0"/>
+            </a:solidFill>
+            <a:prstDash val="solid"/>
+          </a:ln>
+        </p:spPr>
+        <p:txBody>
+          <a:bodyPr/>
+          <a:lstStyle/>
+          <a:p>
+            <a:endParaRPr lang="de-DE"/>
+          </a:p>
+        </p:txBody>
+      </p:sp>
+      <p:sp>
+        <p:nvSpPr>
+          <p:cNvPr id="17" name="Text 15"/>
+          <p:cNvSpPr/>
+          <p:nvPr/>
+        </p:nvSpPr>
+        <p:spPr>
+          <a:xfrm>
+            <a:off x="365760" y="3328416"/>
+            <a:ext cx="1444752" cy="1243584"/>
+          </a:xfrm>
+          <a:prstGeom prst="rect">
+            <a:avLst/>
+          </a:prstGeom>
+          <a:noFill/>
+          <a:ln/>
+        </p:spPr>
+        <p:txBody>
+          <a:bodyPr wrap="square" lIns="0" tIns="0" rIns="0" bIns="0" rtlCol="0" anchor="ctr"/>
+          <a:lstStyle/>
+          <a:p>
+            <a:pPr marL="171450" indent="-171450" algn="l">
+              <a:buFont typeface="Wingdings" panose="05000000000000000000" pitchFamily="2" charset="2"/>
+              <a:buChar char="§"/>
+            </a:pPr>
+            <a:r>
+              <a:rPr lang="en-US" sz="780" dirty="0">
                 <a:solidFill>
                   <a:srgbClr val="4A4A4A"/>
                 </a:solidFill>
@@ -6877,93 +8182,56 @@
                 <a:ea typeface="Arial" pitchFamily="34" charset="-122"/>
                 <a:cs typeface="Arial" pitchFamily="34" charset="-120"/>
               </a:rPr>
-              <a:t>Reads contracts, extracts all key terms</a:t>
-            </a:r>
-            <a:endParaRPr lang="en-US" sz="950" dirty="0"/>
-          </a:p>
-        </p:txBody>
-      </p:sp>
-      <p:sp>
-        <p:nvSpPr>
-          <p:cNvPr id="17" name="Shape 15"/>
-          <p:cNvSpPr/>
-          <p:nvPr/>
-        </p:nvSpPr>
-        <p:spPr>
-          <a:xfrm>
-            <a:off x="722376" y="4279392"/>
-            <a:ext cx="731520" cy="219456"/>
-          </a:xfrm>
-          <a:prstGeom prst="rect">
-            <a:avLst/>
-          </a:prstGeom>
-          <a:solidFill>
-            <a:srgbClr val="E8F0FD"/>
-          </a:solidFill>
-          <a:ln w="12700">
-            <a:solidFill>
-              <a:srgbClr val="C5D9FA"/>
-            </a:solidFill>
-            <a:prstDash val="solid"/>
-          </a:ln>
-        </p:spPr>
-        <p:txBody>
-          <a:bodyPr/>
-          <a:lstStyle/>
-          <a:p>
-            <a:endParaRPr lang="de-DE"/>
-          </a:p>
-        </p:txBody>
-      </p:sp>
-      <p:sp>
-        <p:nvSpPr>
-          <p:cNvPr id="18" name="Text 16"/>
-          <p:cNvSpPr/>
-          <p:nvPr/>
-        </p:nvSpPr>
-        <p:spPr>
-          <a:xfrm>
-            <a:off x="722376" y="4279392"/>
-            <a:ext cx="731520" cy="219456"/>
-          </a:xfrm>
-          <a:prstGeom prst="rect">
-            <a:avLst/>
-          </a:prstGeom>
-          <a:noFill/>
-          <a:ln/>
-        </p:spPr>
-        <p:txBody>
-          <a:bodyPr wrap="square" lIns="0" tIns="0" rIns="0" bIns="0" rtlCol="0" anchor="ctr"/>
-          <a:lstStyle/>
-          <a:p>
-            <a:pPr marL="0" indent="0" algn="ctr">
-              <a:buNone/>
-            </a:pPr>
-            <a:r>
-              <a:rPr lang="en-US" sz="850" b="1" dirty="0">
-                <a:solidFill>
-                  <a:srgbClr val="005AEE"/>
-                </a:solidFill>
-                <a:latin typeface="Arial" pitchFamily="34" charset="0"/>
-                <a:ea typeface="Arial" pitchFamily="34" charset="-122"/>
-                <a:cs typeface="Arial" pitchFamily="34" charset="-120"/>
-              </a:rPr>
-              <a:t>AI</a:t>
-            </a:r>
-            <a:endParaRPr lang="en-US" sz="850" dirty="0"/>
-          </a:p>
-        </p:txBody>
-      </p:sp>
-      <p:sp>
-        <p:nvSpPr>
-          <p:cNvPr id="19" name="Shape 17"/>
-          <p:cNvSpPr/>
-          <p:nvPr/>
-        </p:nvSpPr>
-        <p:spPr>
-          <a:xfrm>
-            <a:off x="2011680" y="1847088"/>
-            <a:ext cx="1591056" cy="2816352"/>
+              <a:t>LLM ingests contract documents. </a:t>
+            </a:r>
+          </a:p>
+          <a:p>
+            <a:pPr marL="171450" indent="-171450" algn="l">
+              <a:buFont typeface="Wingdings" panose="05000000000000000000" pitchFamily="2" charset="2"/>
+              <a:buChar char="§"/>
+            </a:pPr>
+            <a:r>
+              <a:rPr lang="en-US" sz="780" dirty="0">
+                <a:solidFill>
+                  <a:srgbClr val="4A4A4A"/>
+                </a:solidFill>
+                <a:latin typeface="Arial" pitchFamily="34" charset="0"/>
+                <a:ea typeface="Arial" pitchFamily="34" charset="-122"/>
+                <a:cs typeface="Arial" pitchFamily="34" charset="-120"/>
+              </a:rPr>
+              <a:t>Structured extraction prompt returns JSON: name, role, rate, currency, jurisdiction, notice period, IP clause status, GDPR clause status, working arrangement description. </a:t>
+            </a:r>
+          </a:p>
+          <a:p>
+            <a:pPr marL="171450" indent="-171450" algn="l">
+              <a:buFont typeface="Wingdings" panose="05000000000000000000" pitchFamily="2" charset="2"/>
+              <a:buChar char="§"/>
+            </a:pPr>
+            <a:r>
+              <a:rPr lang="en-US" sz="780" dirty="0">
+                <a:solidFill>
+                  <a:srgbClr val="4A4A4A"/>
+                </a:solidFill>
+                <a:latin typeface="Arial" pitchFamily="34" charset="0"/>
+                <a:ea typeface="Arial" pitchFamily="34" charset="-122"/>
+                <a:cs typeface="Arial" pitchFamily="34" charset="-120"/>
+              </a:rPr>
+              <a:t>Output stored in Contract Register DB.</a:t>
+            </a:r>
+            <a:endParaRPr lang="en-US" sz="780" dirty="0"/>
+          </a:p>
+        </p:txBody>
+      </p:sp>
+      <p:sp>
+        <p:nvSpPr>
+          <p:cNvPr id="20" name="Shape 18"/>
+          <p:cNvSpPr/>
+          <p:nvPr/>
+        </p:nvSpPr>
+        <p:spPr>
+          <a:xfrm>
+            <a:off x="2011680" y="1682496"/>
+            <a:ext cx="1591056" cy="2962656"/>
           </a:xfrm>
           <a:prstGeom prst="rect">
             <a:avLst/>
@@ -6978,9 +8246,9 @@
             <a:prstDash val="solid"/>
           </a:ln>
           <a:effectLst>
-            <a:outerShdw blurRad="127000" dist="25400" dir="8100000" algn="bl" rotWithShape="0">
+            <a:outerShdw blurRad="101600" dist="25400" dir="8100000" algn="bl" rotWithShape="0">
               <a:srgbClr val="000000">
-                <a:alpha val="7000"/>
+                <a:alpha val="6000"/>
               </a:srgbClr>
             </a:outerShdw>
           </a:effectLst>
@@ -6995,13 +8263,13 @@
       </p:sp>
       <p:sp>
         <p:nvSpPr>
-          <p:cNvPr id="20" name="Shape 18"/>
-          <p:cNvSpPr/>
-          <p:nvPr/>
-        </p:nvSpPr>
-        <p:spPr>
-          <a:xfrm>
-            <a:off x="2011680" y="1847088"/>
+          <p:cNvPr id="21" name="Shape 19"/>
+          <p:cNvSpPr/>
+          <p:nvPr/>
+        </p:nvSpPr>
+        <p:spPr>
+          <a:xfrm>
+            <a:off x="2011680" y="1682496"/>
             <a:ext cx="1591056" cy="54864"/>
           </a:xfrm>
           <a:prstGeom prst="rect">
@@ -7027,13 +8295,13 @@
       </p:sp>
       <p:sp>
         <p:nvSpPr>
-          <p:cNvPr id="21" name="Shape 19"/>
-          <p:cNvSpPr/>
-          <p:nvPr/>
-        </p:nvSpPr>
-        <p:spPr>
-          <a:xfrm>
-            <a:off x="2514600" y="1993392"/>
+          <p:cNvPr id="22" name="Shape 20"/>
+          <p:cNvSpPr/>
+          <p:nvPr/>
+        </p:nvSpPr>
+        <p:spPr>
+          <a:xfrm>
+            <a:off x="2514600" y="1810512"/>
             <a:ext cx="585216" cy="585216"/>
           </a:xfrm>
           <a:prstGeom prst="ellipse">
@@ -7059,13 +8327,13 @@
       </p:sp>
       <p:sp>
         <p:nvSpPr>
-          <p:cNvPr id="22" name="Text 20"/>
-          <p:cNvSpPr/>
-          <p:nvPr/>
-        </p:nvSpPr>
-        <p:spPr>
-          <a:xfrm>
-            <a:off x="2514600" y="1993392"/>
+          <p:cNvPr id="23" name="Text 21"/>
+          <p:cNvSpPr/>
+          <p:nvPr/>
+        </p:nvSpPr>
+        <p:spPr>
+          <a:xfrm>
+            <a:off x="2514600" y="1810512"/>
             <a:ext cx="585216" cy="585216"/>
           </a:xfrm>
           <a:prstGeom prst="rect">
@@ -7082,7 +8350,7 @@
               <a:buNone/>
             </a:pPr>
             <a:r>
-              <a:rPr lang="en-US" sz="1600" b="1" dirty="0">
+              <a:rPr lang="en-US" sz="1800" b="1" dirty="0">
                 <a:solidFill>
                   <a:srgbClr val="FFFFFF"/>
                 </a:solidFill>
@@ -7092,20 +8360,20 @@
               </a:rPr>
               <a:t>2</a:t>
             </a:r>
-            <a:endParaRPr lang="en-US" sz="1600" dirty="0"/>
-          </a:p>
-        </p:txBody>
-      </p:sp>
-      <p:sp>
-        <p:nvSpPr>
-          <p:cNvPr id="23" name="Text 21"/>
-          <p:cNvSpPr/>
-          <p:nvPr/>
-        </p:nvSpPr>
-        <p:spPr>
-          <a:xfrm>
-            <a:off x="2084832" y="2706624"/>
-            <a:ext cx="1444752" cy="502920"/>
+            <a:endParaRPr lang="en-US" sz="1800" dirty="0"/>
+          </a:p>
+        </p:txBody>
+      </p:sp>
+      <p:sp>
+        <p:nvSpPr>
+          <p:cNvPr id="24" name="Text 22"/>
+          <p:cNvSpPr/>
+          <p:nvPr/>
+        </p:nvSpPr>
+        <p:spPr>
+          <a:xfrm>
+            <a:off x="2066544" y="2487168"/>
+            <a:ext cx="1481328" cy="475488"/>
           </a:xfrm>
           <a:prstGeom prst="rect">
             <a:avLst/>
@@ -7121,7 +8389,7 @@
               <a:buNone/>
             </a:pPr>
             <a:r>
-              <a:rPr lang="en-US" sz="1150" b="1" dirty="0">
+              <a:rPr lang="en-US" sz="1100" b="1" dirty="0">
                 <a:solidFill>
                   <a:srgbClr val="111111"/>
                 </a:solidFill>
@@ -7131,14 +8399,14 @@
               </a:rPr>
               <a:t>Invoice</a:t>
             </a:r>
-            <a:endParaRPr lang="en-US" sz="1150" dirty="0"/>
+            <a:endParaRPr lang="en-US" sz="1100" dirty="0"/>
           </a:p>
           <a:p>
             <a:pPr marL="0" indent="0" algn="ctr">
               <a:buNone/>
             </a:pPr>
             <a:r>
-              <a:rPr lang="en-US" sz="1150" b="1" dirty="0">
+              <a:rPr lang="en-US" sz="1100" b="1" dirty="0">
                 <a:solidFill>
                   <a:srgbClr val="111111"/>
                 </a:solidFill>
@@ -7148,20 +8416,20 @@
               </a:rPr>
               <a:t>Validation</a:t>
             </a:r>
-            <a:endParaRPr lang="en-US" sz="1150" dirty="0"/>
-          </a:p>
-        </p:txBody>
-      </p:sp>
-      <p:sp>
-        <p:nvSpPr>
-          <p:cNvPr id="24" name="Text 22"/>
-          <p:cNvSpPr/>
-          <p:nvPr/>
-        </p:nvSpPr>
-        <p:spPr>
-          <a:xfrm>
-            <a:off x="2084832" y="3246120"/>
-            <a:ext cx="1444752" cy="274320"/>
+            <a:endParaRPr lang="en-US" sz="1100" dirty="0"/>
+          </a:p>
+        </p:txBody>
+      </p:sp>
+      <p:sp>
+        <p:nvSpPr>
+          <p:cNvPr id="25" name="Text 23"/>
+          <p:cNvSpPr/>
+          <p:nvPr/>
+        </p:nvSpPr>
+        <p:spPr>
+          <a:xfrm>
+            <a:off x="2066544" y="2980944"/>
+            <a:ext cx="1481328" cy="237744"/>
           </a:xfrm>
           <a:prstGeom prst="rect">
             <a:avLst/>
@@ -7177,7 +8445,7 @@
               <a:buNone/>
             </a:pPr>
             <a:r>
-              <a:rPr lang="en-US" sz="950" dirty="0">
+              <a:rPr lang="en-US" sz="900" b="1" dirty="0">
                 <a:solidFill>
                   <a:srgbClr val="005AEE"/>
                 </a:solidFill>
@@ -7187,36 +8455,69 @@
               </a:rPr>
               <a:t>Agent 2</a:t>
             </a:r>
-            <a:endParaRPr lang="en-US" sz="950" dirty="0"/>
-          </a:p>
-        </p:txBody>
-      </p:sp>
-      <p:sp>
-        <p:nvSpPr>
-          <p:cNvPr id="25" name="Text 23"/>
-          <p:cNvSpPr/>
-          <p:nvPr/>
-        </p:nvSpPr>
-        <p:spPr>
-          <a:xfrm>
-            <a:off x="2084832" y="3566160"/>
-            <a:ext cx="1444752" cy="685800"/>
-          </a:xfrm>
-          <a:prstGeom prst="rect">
-            <a:avLst/>
-          </a:prstGeom>
-          <a:noFill/>
-          <a:ln/>
-        </p:spPr>
-        <p:txBody>
-          <a:bodyPr wrap="square" lIns="0" tIns="0" rIns="0" bIns="0" rtlCol="0" anchor="ctr"/>
-          <a:lstStyle/>
-          <a:p>
-            <a:pPr marL="0" indent="0" algn="ctr">
-              <a:buNone/>
-            </a:pPr>
-            <a:r>
-              <a:rPr lang="en-US" sz="950" dirty="0">
+            <a:endParaRPr lang="en-US" sz="900" dirty="0"/>
+          </a:p>
+        </p:txBody>
+      </p:sp>
+      <p:sp>
+        <p:nvSpPr>
+          <p:cNvPr id="26" name="Shape 24"/>
+          <p:cNvSpPr/>
+          <p:nvPr/>
+        </p:nvSpPr>
+        <p:spPr>
+          <a:xfrm>
+            <a:off x="2148840" y="3255264"/>
+            <a:ext cx="1316736" cy="18288"/>
+          </a:xfrm>
+          <a:prstGeom prst="rect">
+            <a:avLst/>
+          </a:prstGeom>
+          <a:solidFill>
+            <a:srgbClr val="E2E8F0"/>
+          </a:solidFill>
+          <a:ln w="12700">
+            <a:solidFill>
+              <a:srgbClr val="E2E8F0"/>
+            </a:solidFill>
+            <a:prstDash val="solid"/>
+          </a:ln>
+        </p:spPr>
+        <p:txBody>
+          <a:bodyPr/>
+          <a:lstStyle/>
+          <a:p>
+            <a:endParaRPr lang="de-DE"/>
+          </a:p>
+        </p:txBody>
+      </p:sp>
+      <p:sp>
+        <p:nvSpPr>
+          <p:cNvPr id="27" name="Text 25"/>
+          <p:cNvSpPr/>
+          <p:nvPr/>
+        </p:nvSpPr>
+        <p:spPr>
+          <a:xfrm>
+            <a:off x="2084832" y="3328416"/>
+            <a:ext cx="1444752" cy="1243584"/>
+          </a:xfrm>
+          <a:prstGeom prst="rect">
+            <a:avLst/>
+          </a:prstGeom>
+          <a:noFill/>
+          <a:ln/>
+        </p:spPr>
+        <p:txBody>
+          <a:bodyPr wrap="square" lIns="0" tIns="0" rIns="0" bIns="0" rtlCol="0" anchor="ctr"/>
+          <a:lstStyle/>
+          <a:p>
+            <a:pPr marL="92075" indent="-92075" algn="l">
+              <a:buFont typeface="Wingdings" panose="05000000000000000000" pitchFamily="2" charset="2"/>
+              <a:buChar char="§"/>
+            </a:pPr>
+            <a:r>
+              <a:rPr lang="en-US" sz="780" dirty="0">
                 <a:solidFill>
                   <a:srgbClr val="4A4A4A"/>
                 </a:solidFill>
@@ -7224,93 +8525,56 @@
                 <a:ea typeface="Arial" pitchFamily="34" charset="-122"/>
                 <a:cs typeface="Arial" pitchFamily="34" charset="-120"/>
               </a:rPr>
-              <a:t>Validates invoices vs contract terms</a:t>
-            </a:r>
-            <a:endParaRPr lang="en-US" sz="950" dirty="0"/>
-          </a:p>
-        </p:txBody>
-      </p:sp>
-      <p:sp>
-        <p:nvSpPr>
-          <p:cNvPr id="26" name="Shape 24"/>
-          <p:cNvSpPr/>
-          <p:nvPr/>
-        </p:nvSpPr>
-        <p:spPr>
-          <a:xfrm>
-            <a:off x="2441448" y="4279392"/>
-            <a:ext cx="731520" cy="219456"/>
-          </a:xfrm>
-          <a:prstGeom prst="rect">
-            <a:avLst/>
-          </a:prstGeom>
-          <a:solidFill>
-            <a:srgbClr val="E8F0FD"/>
-          </a:solidFill>
-          <a:ln w="12700">
-            <a:solidFill>
-              <a:srgbClr val="C5D9FA"/>
-            </a:solidFill>
-            <a:prstDash val="solid"/>
-          </a:ln>
-        </p:spPr>
-        <p:txBody>
-          <a:bodyPr/>
-          <a:lstStyle/>
-          <a:p>
-            <a:endParaRPr lang="de-DE"/>
-          </a:p>
-        </p:txBody>
-      </p:sp>
-      <p:sp>
-        <p:nvSpPr>
-          <p:cNvPr id="27" name="Text 25"/>
-          <p:cNvSpPr/>
-          <p:nvPr/>
-        </p:nvSpPr>
-        <p:spPr>
-          <a:xfrm>
-            <a:off x="2441448" y="4279392"/>
-            <a:ext cx="731520" cy="219456"/>
-          </a:xfrm>
-          <a:prstGeom prst="rect">
-            <a:avLst/>
-          </a:prstGeom>
-          <a:noFill/>
-          <a:ln/>
-        </p:spPr>
-        <p:txBody>
-          <a:bodyPr wrap="square" lIns="0" tIns="0" rIns="0" bIns="0" rtlCol="0" anchor="ctr"/>
-          <a:lstStyle/>
-          <a:p>
-            <a:pPr marL="0" indent="0" algn="ctr">
-              <a:buNone/>
-            </a:pPr>
-            <a:r>
-              <a:rPr lang="en-US" sz="850" b="1" dirty="0">
-                <a:solidFill>
-                  <a:srgbClr val="005AEE"/>
-                </a:solidFill>
-                <a:latin typeface="Arial" pitchFamily="34" charset="0"/>
-                <a:ea typeface="Arial" pitchFamily="34" charset="-122"/>
-                <a:cs typeface="Arial" pitchFamily="34" charset="-120"/>
-              </a:rPr>
-              <a:t>AI</a:t>
-            </a:r>
-            <a:endParaRPr lang="en-US" sz="850" dirty="0"/>
-          </a:p>
-        </p:txBody>
-      </p:sp>
-      <p:sp>
-        <p:nvSpPr>
-          <p:cNvPr id="28" name="Shape 26"/>
-          <p:cNvSpPr/>
-          <p:nvPr/>
-        </p:nvSpPr>
-        <p:spPr>
-          <a:xfrm>
-            <a:off x="3730752" y="1847088"/>
-            <a:ext cx="1591056" cy="2816352"/>
+              <a:t>LLM reads incoming invoice text and compares it against extracted contract terms.</a:t>
+            </a:r>
+          </a:p>
+          <a:p>
+            <a:pPr marL="92075" indent="-92075" algn="l">
+              <a:buFont typeface="Wingdings" panose="05000000000000000000" pitchFamily="2" charset="2"/>
+              <a:buChar char="§"/>
+            </a:pPr>
+            <a:r>
+              <a:rPr lang="en-US" sz="780" dirty="0">
+                <a:solidFill>
+                  <a:srgbClr val="4A4A4A"/>
+                </a:solidFill>
+                <a:latin typeface="Arial" pitchFamily="34" charset="0"/>
+                <a:ea typeface="Arial" pitchFamily="34" charset="-122"/>
+                <a:cs typeface="Arial" pitchFamily="34" charset="-120"/>
+              </a:rPr>
+              <a:t>Flags discrepancies in amount, currency, scope, and billing period.</a:t>
+            </a:r>
+          </a:p>
+          <a:p>
+            <a:pPr marL="92075" indent="-92075" algn="l">
+              <a:buFont typeface="Wingdings" panose="05000000000000000000" pitchFamily="2" charset="2"/>
+              <a:buChar char="§"/>
+            </a:pPr>
+            <a:r>
+              <a:rPr lang="en-US" sz="780" dirty="0">
+                <a:solidFill>
+                  <a:srgbClr val="4A4A4A"/>
+                </a:solidFill>
+                <a:latin typeface="Arial" pitchFamily="34" charset="0"/>
+                <a:ea typeface="Arial" pitchFamily="34" charset="-122"/>
+                <a:cs typeface="Arial" pitchFamily="34" charset="-120"/>
+              </a:rPr>
+              <a:t> Output: validated / flagged + specific mismatch detail.</a:t>
+            </a:r>
+            <a:endParaRPr lang="en-US" sz="780" dirty="0"/>
+          </a:p>
+        </p:txBody>
+      </p:sp>
+      <p:sp>
+        <p:nvSpPr>
+          <p:cNvPr id="30" name="Shape 28"/>
+          <p:cNvSpPr/>
+          <p:nvPr/>
+        </p:nvSpPr>
+        <p:spPr>
+          <a:xfrm>
+            <a:off x="3730752" y="1682496"/>
+            <a:ext cx="1591056" cy="2962656"/>
           </a:xfrm>
           <a:prstGeom prst="rect">
             <a:avLst/>
@@ -7325,9 +8589,9 @@
             <a:prstDash val="solid"/>
           </a:ln>
           <a:effectLst>
-            <a:outerShdw blurRad="127000" dist="25400" dir="8100000" algn="bl" rotWithShape="0">
+            <a:outerShdw blurRad="101600" dist="25400" dir="8100000" algn="bl" rotWithShape="0">
               <a:srgbClr val="000000">
-                <a:alpha val="7000"/>
+                <a:alpha val="6000"/>
               </a:srgbClr>
             </a:outerShdw>
           </a:effectLst>
@@ -7342,13 +8606,13 @@
       </p:sp>
       <p:sp>
         <p:nvSpPr>
-          <p:cNvPr id="29" name="Shape 27"/>
-          <p:cNvSpPr/>
-          <p:nvPr/>
-        </p:nvSpPr>
-        <p:spPr>
-          <a:xfrm>
-            <a:off x="3730752" y="1847088"/>
+          <p:cNvPr id="31" name="Shape 29"/>
+          <p:cNvSpPr/>
+          <p:nvPr/>
+        </p:nvSpPr>
+        <p:spPr>
+          <a:xfrm>
+            <a:off x="3730752" y="1682496"/>
             <a:ext cx="1591056" cy="54864"/>
           </a:xfrm>
           <a:prstGeom prst="rect">
@@ -7374,13 +8638,13 @@
       </p:sp>
       <p:sp>
         <p:nvSpPr>
-          <p:cNvPr id="30" name="Shape 28"/>
-          <p:cNvSpPr/>
-          <p:nvPr/>
-        </p:nvSpPr>
-        <p:spPr>
-          <a:xfrm>
-            <a:off x="4233672" y="1993392"/>
+          <p:cNvPr id="32" name="Shape 30"/>
+          <p:cNvSpPr/>
+          <p:nvPr/>
+        </p:nvSpPr>
+        <p:spPr>
+          <a:xfrm>
+            <a:off x="4233672" y="1810512"/>
             <a:ext cx="585216" cy="585216"/>
           </a:xfrm>
           <a:prstGeom prst="ellipse">
@@ -7406,13 +8670,13 @@
       </p:sp>
       <p:sp>
         <p:nvSpPr>
-          <p:cNvPr id="31" name="Text 29"/>
-          <p:cNvSpPr/>
-          <p:nvPr/>
-        </p:nvSpPr>
-        <p:spPr>
-          <a:xfrm>
-            <a:off x="4233672" y="1993392"/>
+          <p:cNvPr id="33" name="Text 31"/>
+          <p:cNvSpPr/>
+          <p:nvPr/>
+        </p:nvSpPr>
+        <p:spPr>
+          <a:xfrm>
+            <a:off x="4233672" y="1810512"/>
             <a:ext cx="585216" cy="585216"/>
           </a:xfrm>
           <a:prstGeom prst="rect">
@@ -7429,7 +8693,7 @@
               <a:buNone/>
             </a:pPr>
             <a:r>
-              <a:rPr lang="en-US" sz="1600" b="1" dirty="0">
+              <a:rPr lang="en-US" sz="1800" b="1" dirty="0">
                 <a:solidFill>
                   <a:srgbClr val="FFFFFF"/>
                 </a:solidFill>
@@ -7439,20 +8703,20 @@
               </a:rPr>
               <a:t>3</a:t>
             </a:r>
-            <a:endParaRPr lang="en-US" sz="1600" dirty="0"/>
-          </a:p>
-        </p:txBody>
-      </p:sp>
-      <p:sp>
-        <p:nvSpPr>
-          <p:cNvPr id="32" name="Text 30"/>
-          <p:cNvSpPr/>
-          <p:nvPr/>
-        </p:nvSpPr>
-        <p:spPr>
-          <a:xfrm>
-            <a:off x="3803904" y="2706624"/>
-            <a:ext cx="1444752" cy="502920"/>
+            <a:endParaRPr lang="en-US" sz="1800" dirty="0"/>
+          </a:p>
+        </p:txBody>
+      </p:sp>
+      <p:sp>
+        <p:nvSpPr>
+          <p:cNvPr id="34" name="Text 32"/>
+          <p:cNvSpPr/>
+          <p:nvPr/>
+        </p:nvSpPr>
+        <p:spPr>
+          <a:xfrm>
+            <a:off x="3785616" y="2487168"/>
+            <a:ext cx="1481328" cy="475488"/>
           </a:xfrm>
           <a:prstGeom prst="rect">
             <a:avLst/>
@@ -7468,7 +8732,7 @@
               <a:buNone/>
             </a:pPr>
             <a:r>
-              <a:rPr lang="en-US" sz="1150" b="1" dirty="0">
+              <a:rPr lang="en-US" sz="1100" b="1" dirty="0">
                 <a:solidFill>
                   <a:srgbClr val="111111"/>
                 </a:solidFill>
@@ -7478,14 +8742,14 @@
               </a:rPr>
               <a:t>Overlap</a:t>
             </a:r>
-            <a:endParaRPr lang="en-US" sz="1150" dirty="0"/>
+            <a:endParaRPr lang="en-US" sz="1100" dirty="0"/>
           </a:p>
           <a:p>
             <a:pPr marL="0" indent="0" algn="ctr">
               <a:buNone/>
             </a:pPr>
             <a:r>
-              <a:rPr lang="en-US" sz="1150" b="1" dirty="0">
+              <a:rPr lang="en-US" sz="1100" b="1" dirty="0">
                 <a:solidFill>
                   <a:srgbClr val="111111"/>
                 </a:solidFill>
@@ -7495,20 +8759,20 @@
               </a:rPr>
               <a:t>Detection</a:t>
             </a:r>
-            <a:endParaRPr lang="en-US" sz="1150" dirty="0"/>
-          </a:p>
-        </p:txBody>
-      </p:sp>
-      <p:sp>
-        <p:nvSpPr>
-          <p:cNvPr id="33" name="Text 31"/>
-          <p:cNvSpPr/>
-          <p:nvPr/>
-        </p:nvSpPr>
-        <p:spPr>
-          <a:xfrm>
-            <a:off x="3803904" y="3246120"/>
-            <a:ext cx="1444752" cy="274320"/>
+            <a:endParaRPr lang="en-US" sz="1100" dirty="0"/>
+          </a:p>
+        </p:txBody>
+      </p:sp>
+      <p:sp>
+        <p:nvSpPr>
+          <p:cNvPr id="35" name="Text 33"/>
+          <p:cNvSpPr/>
+          <p:nvPr/>
+        </p:nvSpPr>
+        <p:spPr>
+          <a:xfrm>
+            <a:off x="3785616" y="2980944"/>
+            <a:ext cx="1481328" cy="237744"/>
           </a:xfrm>
           <a:prstGeom prst="rect">
             <a:avLst/>
@@ -7524,7 +8788,7 @@
               <a:buNone/>
             </a:pPr>
             <a:r>
-              <a:rPr lang="en-US" sz="950" dirty="0">
+              <a:rPr lang="en-US" sz="900" b="1" dirty="0">
                 <a:solidFill>
                   <a:srgbClr val="005AEE"/>
                 </a:solidFill>
@@ -7534,130 +8798,122 @@
               </a:rPr>
               <a:t>Agent 3</a:t>
             </a:r>
-            <a:endParaRPr lang="en-US" sz="950" dirty="0"/>
-          </a:p>
-        </p:txBody>
-      </p:sp>
-      <p:sp>
-        <p:nvSpPr>
-          <p:cNvPr id="34" name="Text 32"/>
-          <p:cNvSpPr/>
-          <p:nvPr/>
-        </p:nvSpPr>
-        <p:spPr>
-          <a:xfrm>
-            <a:off x="3803904" y="3566160"/>
-            <a:ext cx="1444752" cy="685800"/>
-          </a:xfrm>
-          <a:prstGeom prst="rect">
-            <a:avLst/>
-          </a:prstGeom>
-          <a:noFill/>
-          <a:ln/>
-        </p:spPr>
-        <p:txBody>
-          <a:bodyPr wrap="square" lIns="0" tIns="0" rIns="0" bIns="0" rtlCol="0" anchor="ctr"/>
-          <a:lstStyle/>
-          <a:p>
-            <a:pPr marL="0" indent="0" algn="ctr">
-              <a:buNone/>
-            </a:pPr>
-            <a:r>
-              <a:rPr lang="en-US" sz="950" dirty="0">
+            <a:endParaRPr lang="en-US" sz="900" dirty="0"/>
+          </a:p>
+        </p:txBody>
+      </p:sp>
+      <p:sp>
+        <p:nvSpPr>
+          <p:cNvPr id="36" name="Shape 34"/>
+          <p:cNvSpPr/>
+          <p:nvPr/>
+        </p:nvSpPr>
+        <p:spPr>
+          <a:xfrm>
+            <a:off x="3867912" y="3255264"/>
+            <a:ext cx="1316736" cy="18288"/>
+          </a:xfrm>
+          <a:prstGeom prst="rect">
+            <a:avLst/>
+          </a:prstGeom>
+          <a:solidFill>
+            <a:srgbClr val="E2E8F0"/>
+          </a:solidFill>
+          <a:ln w="12700">
+            <a:solidFill>
+              <a:srgbClr val="E2E8F0"/>
+            </a:solidFill>
+            <a:prstDash val="solid"/>
+          </a:ln>
+        </p:spPr>
+        <p:txBody>
+          <a:bodyPr/>
+          <a:lstStyle/>
+          <a:p>
+            <a:endParaRPr lang="de-DE"/>
+          </a:p>
+        </p:txBody>
+      </p:sp>
+      <p:sp>
+        <p:nvSpPr>
+          <p:cNvPr id="37" name="Text 35"/>
+          <p:cNvSpPr/>
+          <p:nvPr/>
+        </p:nvSpPr>
+        <p:spPr>
+          <a:xfrm>
+            <a:off x="3803904" y="3328416"/>
+            <a:ext cx="1444752" cy="1243584"/>
+          </a:xfrm>
+          <a:prstGeom prst="rect">
+            <a:avLst/>
+          </a:prstGeom>
+          <a:noFill/>
+          <a:ln/>
+        </p:spPr>
+        <p:txBody>
+          <a:bodyPr wrap="square" lIns="0" tIns="0" rIns="0" bIns="0" rtlCol="0" anchor="ctr"/>
+          <a:lstStyle/>
+          <a:p>
+            <a:pPr marL="92075" indent="-92075">
+              <a:buFont typeface="Wingdings" panose="05000000000000000000" pitchFamily="2" charset="2"/>
+              <a:buChar char="§"/>
+            </a:pPr>
+            <a:r>
+              <a:rPr lang="en-US" sz="780" dirty="0">
                 <a:solidFill>
                   <a:srgbClr val="4A4A4A"/>
                 </a:solidFill>
                 <a:latin typeface="Arial" pitchFamily="34" charset="0"/>
-                <a:ea typeface="Arial" pitchFamily="34" charset="-122"/>
-                <a:cs typeface="Arial" pitchFamily="34" charset="-120"/>
-              </a:rPr>
-              <a:t>Flags duplicate contractor/employee spend</a:t>
-            </a:r>
-            <a:endParaRPr lang="en-US" sz="950" dirty="0"/>
-          </a:p>
-        </p:txBody>
-      </p:sp>
-      <p:sp>
-        <p:nvSpPr>
-          <p:cNvPr id="35" name="Shape 33"/>
-          <p:cNvSpPr/>
-          <p:nvPr/>
-        </p:nvSpPr>
-        <p:spPr>
-          <a:xfrm>
-            <a:off x="4160520" y="4279392"/>
-            <a:ext cx="731520" cy="219456"/>
-          </a:xfrm>
-          <a:prstGeom prst="rect">
-            <a:avLst/>
-          </a:prstGeom>
-          <a:solidFill>
-            <a:srgbClr val="E8F0FD"/>
-          </a:solidFill>
-          <a:ln w="12700">
-            <a:solidFill>
-              <a:srgbClr val="C5D9FA"/>
-            </a:solidFill>
-            <a:prstDash val="solid"/>
-          </a:ln>
-        </p:spPr>
-        <p:txBody>
-          <a:bodyPr/>
-          <a:lstStyle/>
-          <a:p>
-            <a:endParaRPr lang="de-DE"/>
-          </a:p>
-        </p:txBody>
-      </p:sp>
-      <p:sp>
-        <p:nvSpPr>
-          <p:cNvPr id="36" name="Text 34"/>
-          <p:cNvSpPr/>
-          <p:nvPr/>
-        </p:nvSpPr>
-        <p:spPr>
-          <a:xfrm>
-            <a:off x="4160520" y="4279392"/>
-            <a:ext cx="731520" cy="219456"/>
-          </a:xfrm>
-          <a:prstGeom prst="rect">
-            <a:avLst/>
-          </a:prstGeom>
-          <a:noFill/>
-          <a:ln/>
-        </p:spPr>
-        <p:txBody>
-          <a:bodyPr wrap="square" lIns="0" tIns="0" rIns="0" bIns="0" rtlCol="0" anchor="ctr"/>
-          <a:lstStyle/>
-          <a:p>
-            <a:pPr marL="0" indent="0" algn="ctr">
-              <a:buNone/>
-            </a:pPr>
-            <a:r>
-              <a:rPr lang="en-US" sz="850" b="1" dirty="0">
-                <a:solidFill>
-                  <a:srgbClr val="005AEE"/>
-                </a:solidFill>
-                <a:latin typeface="Arial" pitchFamily="34" charset="0"/>
-                <a:ea typeface="Arial" pitchFamily="34" charset="-122"/>
-                <a:cs typeface="Arial" pitchFamily="34" charset="-120"/>
-              </a:rPr>
-              <a:t>AI</a:t>
-            </a:r>
-            <a:endParaRPr lang="en-US" sz="850" dirty="0"/>
-          </a:p>
-        </p:txBody>
-      </p:sp>
-      <p:sp>
-        <p:nvSpPr>
-          <p:cNvPr id="37" name="Shape 35"/>
-          <p:cNvSpPr/>
-          <p:nvPr/>
-        </p:nvSpPr>
-        <p:spPr>
-          <a:xfrm>
-            <a:off x="5449824" y="1847088"/>
-            <a:ext cx="1591056" cy="2816352"/>
+                <a:cs typeface="Arial" pitchFamily="34" charset="-120"/>
+              </a:rPr>
+              <a:t>LLM compares contractor working arrangement descriptions against internal job role descriptions using semantic similarity. </a:t>
+            </a:r>
+          </a:p>
+          <a:p>
+            <a:pPr marL="92075" indent="-92075">
+              <a:buFont typeface="Wingdings" panose="05000000000000000000" pitchFamily="2" charset="2"/>
+              <a:buChar char="§"/>
+            </a:pPr>
+            <a:r>
+              <a:rPr lang="en-US" sz="780" dirty="0">
+                <a:solidFill>
+                  <a:srgbClr val="4A4A4A"/>
+                </a:solidFill>
+                <a:latin typeface="Arial" pitchFamily="34" charset="0"/>
+                <a:cs typeface="Arial" pitchFamily="34" charset="-120"/>
+              </a:rPr>
+              <a:t>Flags pairs where scope overlap exceeds threshold.</a:t>
+            </a:r>
+          </a:p>
+          <a:p>
+            <a:pPr marL="92075" indent="-92075">
+              <a:buFont typeface="Wingdings" panose="05000000000000000000" pitchFamily="2" charset="2"/>
+              <a:buChar char="§"/>
+            </a:pPr>
+            <a:r>
+              <a:rPr lang="en-US" sz="780" dirty="0">
+                <a:solidFill>
+                  <a:srgbClr val="4A4A4A"/>
+                </a:solidFill>
+                <a:latin typeface="Arial" pitchFamily="34" charset="0"/>
+                <a:cs typeface="Arial" pitchFamily="34" charset="-120"/>
+              </a:rPr>
+              <a:t>Output: overlap alert with contractor name, internal role, estimated duplicate cost.</a:t>
+            </a:r>
+          </a:p>
+        </p:txBody>
+      </p:sp>
+      <p:sp>
+        <p:nvSpPr>
+          <p:cNvPr id="40" name="Shape 38"/>
+          <p:cNvSpPr/>
+          <p:nvPr/>
+        </p:nvSpPr>
+        <p:spPr>
+          <a:xfrm>
+            <a:off x="5449824" y="1682496"/>
+            <a:ext cx="1591056" cy="2962656"/>
           </a:xfrm>
           <a:prstGeom prst="rect">
             <a:avLst/>
@@ -7672,9 +8928,9 @@
             <a:prstDash val="solid"/>
           </a:ln>
           <a:effectLst>
-            <a:outerShdw blurRad="127000" dist="25400" dir="8100000" algn="bl" rotWithShape="0">
+            <a:outerShdw blurRad="101600" dist="25400" dir="8100000" algn="bl" rotWithShape="0">
               <a:srgbClr val="000000">
-                <a:alpha val="7000"/>
+                <a:alpha val="6000"/>
               </a:srgbClr>
             </a:outerShdw>
           </a:effectLst>
@@ -7689,13 +8945,13 @@
       </p:sp>
       <p:sp>
         <p:nvSpPr>
-          <p:cNvPr id="38" name="Shape 36"/>
-          <p:cNvSpPr/>
-          <p:nvPr/>
-        </p:nvSpPr>
-        <p:spPr>
-          <a:xfrm>
-            <a:off x="5449824" y="1847088"/>
+          <p:cNvPr id="41" name="Shape 39"/>
+          <p:cNvSpPr/>
+          <p:nvPr/>
+        </p:nvSpPr>
+        <p:spPr>
+          <a:xfrm>
+            <a:off x="5449824" y="1682496"/>
             <a:ext cx="1591056" cy="54864"/>
           </a:xfrm>
           <a:prstGeom prst="rect">
@@ -7721,13 +8977,13 @@
       </p:sp>
       <p:sp>
         <p:nvSpPr>
-          <p:cNvPr id="39" name="Shape 37"/>
-          <p:cNvSpPr/>
-          <p:nvPr/>
-        </p:nvSpPr>
-        <p:spPr>
-          <a:xfrm>
-            <a:off x="5952744" y="1993392"/>
+          <p:cNvPr id="42" name="Shape 40"/>
+          <p:cNvSpPr/>
+          <p:nvPr/>
+        </p:nvSpPr>
+        <p:spPr>
+          <a:xfrm>
+            <a:off x="5952744" y="1810512"/>
             <a:ext cx="585216" cy="585216"/>
           </a:xfrm>
           <a:prstGeom prst="ellipse">
@@ -7753,13 +9009,13 @@
       </p:sp>
       <p:sp>
         <p:nvSpPr>
-          <p:cNvPr id="40" name="Text 38"/>
-          <p:cNvSpPr/>
-          <p:nvPr/>
-        </p:nvSpPr>
-        <p:spPr>
-          <a:xfrm>
-            <a:off x="5952744" y="1993392"/>
+          <p:cNvPr id="43" name="Text 41"/>
+          <p:cNvSpPr/>
+          <p:nvPr/>
+        </p:nvSpPr>
+        <p:spPr>
+          <a:xfrm>
+            <a:off x="5952744" y="1810512"/>
             <a:ext cx="585216" cy="585216"/>
           </a:xfrm>
           <a:prstGeom prst="rect">
@@ -7776,7 +9032,7 @@
               <a:buNone/>
             </a:pPr>
             <a:r>
-              <a:rPr lang="en-US" sz="1600" b="1" dirty="0">
+              <a:rPr lang="en-US" sz="1800" b="1" dirty="0">
                 <a:solidFill>
                   <a:srgbClr val="FFFFFF"/>
                 </a:solidFill>
@@ -7786,20 +9042,20 @@
               </a:rPr>
               <a:t>4</a:t>
             </a:r>
-            <a:endParaRPr lang="en-US" sz="1600" dirty="0"/>
-          </a:p>
-        </p:txBody>
-      </p:sp>
-      <p:sp>
-        <p:nvSpPr>
-          <p:cNvPr id="41" name="Text 39"/>
-          <p:cNvSpPr/>
-          <p:nvPr/>
-        </p:nvSpPr>
-        <p:spPr>
-          <a:xfrm>
-            <a:off x="5522976" y="2706624"/>
-            <a:ext cx="1444752" cy="502920"/>
+            <a:endParaRPr lang="en-US" sz="1800" dirty="0"/>
+          </a:p>
+        </p:txBody>
+      </p:sp>
+      <p:sp>
+        <p:nvSpPr>
+          <p:cNvPr id="44" name="Text 42"/>
+          <p:cNvSpPr/>
+          <p:nvPr/>
+        </p:nvSpPr>
+        <p:spPr>
+          <a:xfrm>
+            <a:off x="5504688" y="2487168"/>
+            <a:ext cx="1481328" cy="475488"/>
           </a:xfrm>
           <a:prstGeom prst="rect">
             <a:avLst/>
@@ -7815,7 +9071,7 @@
               <a:buNone/>
             </a:pPr>
             <a:r>
-              <a:rPr lang="en-US" sz="1150" b="1" dirty="0">
+              <a:rPr lang="en-US" sz="1100" b="1" dirty="0">
                 <a:solidFill>
                   <a:srgbClr val="111111"/>
                 </a:solidFill>
@@ -7825,14 +9081,14 @@
               </a:rPr>
               <a:t>Compliance</a:t>
             </a:r>
-            <a:endParaRPr lang="en-US" sz="1150" dirty="0"/>
+            <a:endParaRPr lang="en-US" sz="1100" dirty="0"/>
           </a:p>
           <a:p>
             <a:pPr marL="0" indent="0" algn="ctr">
               <a:buNone/>
             </a:pPr>
             <a:r>
-              <a:rPr lang="en-US" sz="1150" b="1" dirty="0">
+              <a:rPr lang="en-US" sz="1100" b="1" dirty="0">
                 <a:solidFill>
                   <a:srgbClr val="111111"/>
                 </a:solidFill>
@@ -7842,20 +9098,20 @@
               </a:rPr>
               <a:t>Flagging</a:t>
             </a:r>
-            <a:endParaRPr lang="en-US" sz="1150" dirty="0"/>
-          </a:p>
-        </p:txBody>
-      </p:sp>
-      <p:sp>
-        <p:nvSpPr>
-          <p:cNvPr id="42" name="Text 40"/>
-          <p:cNvSpPr/>
-          <p:nvPr/>
-        </p:nvSpPr>
-        <p:spPr>
-          <a:xfrm>
-            <a:off x="5522976" y="3246120"/>
-            <a:ext cx="1444752" cy="274320"/>
+            <a:endParaRPr lang="en-US" sz="1100" dirty="0"/>
+          </a:p>
+        </p:txBody>
+      </p:sp>
+      <p:sp>
+        <p:nvSpPr>
+          <p:cNvPr id="45" name="Text 43"/>
+          <p:cNvSpPr/>
+          <p:nvPr/>
+        </p:nvSpPr>
+        <p:spPr>
+          <a:xfrm>
+            <a:off x="5504688" y="2980944"/>
+            <a:ext cx="1481328" cy="237744"/>
           </a:xfrm>
           <a:prstGeom prst="rect">
             <a:avLst/>
@@ -7871,7 +9127,7 @@
               <a:buNone/>
             </a:pPr>
             <a:r>
-              <a:rPr lang="en-US" sz="950" dirty="0">
+              <a:rPr lang="en-US" sz="900" b="1" dirty="0">
                 <a:solidFill>
                   <a:srgbClr val="005AEE"/>
                 </a:solidFill>
@@ -7881,130 +9137,90 @@
               </a:rPr>
               <a:t>Agent 4</a:t>
             </a:r>
-            <a:endParaRPr lang="en-US" sz="950" dirty="0"/>
-          </a:p>
-        </p:txBody>
-      </p:sp>
-      <p:sp>
-        <p:nvSpPr>
-          <p:cNvPr id="43" name="Text 41"/>
-          <p:cNvSpPr/>
-          <p:nvPr/>
-        </p:nvSpPr>
-        <p:spPr>
-          <a:xfrm>
-            <a:off x="5522976" y="3566160"/>
-            <a:ext cx="1444752" cy="685800"/>
-          </a:xfrm>
-          <a:prstGeom prst="rect">
-            <a:avLst/>
-          </a:prstGeom>
-          <a:noFill/>
-          <a:ln/>
-        </p:spPr>
-        <p:txBody>
-          <a:bodyPr wrap="square" lIns="0" tIns="0" rIns="0" bIns="0" rtlCol="0" anchor="ctr"/>
-          <a:lstStyle/>
-          <a:p>
-            <a:pPr marL="0" indent="0" algn="ctr">
-              <a:buNone/>
-            </a:pPr>
-            <a:r>
-              <a:rPr lang="en-US" sz="950" dirty="0">
+            <a:endParaRPr lang="en-US" sz="900" dirty="0"/>
+          </a:p>
+        </p:txBody>
+      </p:sp>
+      <p:sp>
+        <p:nvSpPr>
+          <p:cNvPr id="46" name="Shape 44"/>
+          <p:cNvSpPr/>
+          <p:nvPr/>
+        </p:nvSpPr>
+        <p:spPr>
+          <a:xfrm>
+            <a:off x="5586984" y="3255264"/>
+            <a:ext cx="1316736" cy="18288"/>
+          </a:xfrm>
+          <a:prstGeom prst="rect">
+            <a:avLst/>
+          </a:prstGeom>
+          <a:solidFill>
+            <a:srgbClr val="E2E8F0"/>
+          </a:solidFill>
+          <a:ln w="12700">
+            <a:solidFill>
+              <a:srgbClr val="E2E8F0"/>
+            </a:solidFill>
+            <a:prstDash val="solid"/>
+          </a:ln>
+        </p:spPr>
+        <p:txBody>
+          <a:bodyPr/>
+          <a:lstStyle/>
+          <a:p>
+            <a:endParaRPr lang="de-DE"/>
+          </a:p>
+        </p:txBody>
+      </p:sp>
+      <p:sp>
+        <p:nvSpPr>
+          <p:cNvPr id="47" name="Text 45"/>
+          <p:cNvSpPr/>
+          <p:nvPr/>
+        </p:nvSpPr>
+        <p:spPr>
+          <a:xfrm>
+            <a:off x="5522976" y="3328416"/>
+            <a:ext cx="1444752" cy="1243584"/>
+          </a:xfrm>
+          <a:prstGeom prst="rect">
+            <a:avLst/>
+          </a:prstGeom>
+          <a:noFill/>
+          <a:ln/>
+        </p:spPr>
+        <p:txBody>
+          <a:bodyPr wrap="square" lIns="0" tIns="0" rIns="0" bIns="0" rtlCol="0" anchor="ctr"/>
+          <a:lstStyle/>
+          <a:p>
+            <a:pPr marL="92075" indent="-92075">
+              <a:buFont typeface="Arial" panose="020B0604020202020204" pitchFamily="34" charset="0"/>
+              <a:buChar char="•"/>
+            </a:pPr>
+            <a:r>
+              <a:rPr lang="en-US" sz="780" dirty="0">
                 <a:solidFill>
                   <a:srgbClr val="4A4A4A"/>
                 </a:solidFill>
                 <a:latin typeface="Arial" pitchFamily="34" charset="0"/>
-                <a:ea typeface="Arial" pitchFamily="34" charset="-122"/>
-                <a:cs typeface="Arial" pitchFamily="34" charset="-120"/>
-              </a:rPr>
-              <a:t>Red/Amber/Green per contract, 5 jurisdictions</a:t>
-            </a:r>
-            <a:endParaRPr lang="en-US" sz="950" dirty="0"/>
-          </a:p>
-        </p:txBody>
-      </p:sp>
-      <p:sp>
-        <p:nvSpPr>
-          <p:cNvPr id="44" name="Shape 42"/>
-          <p:cNvSpPr/>
-          <p:nvPr/>
-        </p:nvSpPr>
-        <p:spPr>
-          <a:xfrm>
-            <a:off x="5879592" y="4279392"/>
-            <a:ext cx="731520" cy="219456"/>
-          </a:xfrm>
-          <a:prstGeom prst="rect">
-            <a:avLst/>
-          </a:prstGeom>
-          <a:solidFill>
-            <a:srgbClr val="E8F0FD"/>
-          </a:solidFill>
-          <a:ln w="12700">
-            <a:solidFill>
-              <a:srgbClr val="C5D9FA"/>
-            </a:solidFill>
-            <a:prstDash val="solid"/>
-          </a:ln>
-        </p:spPr>
-        <p:txBody>
-          <a:bodyPr/>
-          <a:lstStyle/>
-          <a:p>
-            <a:endParaRPr lang="de-DE"/>
-          </a:p>
-        </p:txBody>
-      </p:sp>
-      <p:sp>
-        <p:nvSpPr>
-          <p:cNvPr id="45" name="Text 43"/>
-          <p:cNvSpPr/>
-          <p:nvPr/>
-        </p:nvSpPr>
-        <p:spPr>
-          <a:xfrm>
-            <a:off x="5879592" y="4279392"/>
-            <a:ext cx="731520" cy="219456"/>
-          </a:xfrm>
-          <a:prstGeom prst="rect">
-            <a:avLst/>
-          </a:prstGeom>
-          <a:noFill/>
-          <a:ln/>
-        </p:spPr>
-        <p:txBody>
-          <a:bodyPr wrap="square" lIns="0" tIns="0" rIns="0" bIns="0" rtlCol="0" anchor="ctr"/>
-          <a:lstStyle/>
-          <a:p>
-            <a:pPr marL="0" indent="0" algn="ctr">
-              <a:buNone/>
-            </a:pPr>
-            <a:r>
-              <a:rPr lang="en-US" sz="850" b="1" dirty="0">
-                <a:solidFill>
-                  <a:srgbClr val="005AEE"/>
-                </a:solidFill>
-                <a:latin typeface="Arial" pitchFamily="34" charset="0"/>
-                <a:ea typeface="Arial" pitchFamily="34" charset="-122"/>
-                <a:cs typeface="Arial" pitchFamily="34" charset="-120"/>
-              </a:rPr>
-              <a:t>AI</a:t>
-            </a:r>
-            <a:endParaRPr lang="en-US" sz="850" dirty="0"/>
-          </a:p>
-        </p:txBody>
-      </p:sp>
-      <p:sp>
-        <p:nvSpPr>
-          <p:cNvPr id="46" name="Shape 44"/>
-          <p:cNvSpPr/>
-          <p:nvPr/>
-        </p:nvSpPr>
-        <p:spPr>
-          <a:xfrm>
-            <a:off x="7168896" y="1847088"/>
-            <a:ext cx="1591056" cy="2816352"/>
+                <a:cs typeface="Arial" pitchFamily="34" charset="-120"/>
+              </a:rPr>
+              <a:t>LLM checks extracted contract data against jurisdiction-specific rule sets: GDPR clause presence, IP assignment clarity, misclassification indicators, notice period minimums. Output: Red / Amber / Green status + specific flags per contract.</a:t>
+            </a:r>
+          </a:p>
+        </p:txBody>
+      </p:sp>
+      <p:sp>
+        <p:nvSpPr>
+          <p:cNvPr id="50" name="Shape 48"/>
+          <p:cNvSpPr/>
+          <p:nvPr/>
+        </p:nvSpPr>
+        <p:spPr>
+          <a:xfrm>
+            <a:off x="7168896" y="1682496"/>
+            <a:ext cx="1591056" cy="2962656"/>
           </a:xfrm>
           <a:prstGeom prst="rect">
             <a:avLst/>
@@ -8019,9 +9235,9 @@
             <a:prstDash val="solid"/>
           </a:ln>
           <a:effectLst>
-            <a:outerShdw blurRad="127000" dist="25400" dir="8100000" algn="bl" rotWithShape="0">
+            <a:outerShdw blurRad="101600" dist="25400" dir="8100000" algn="bl" rotWithShape="0">
               <a:srgbClr val="000000">
-                <a:alpha val="7000"/>
+                <a:alpha val="6000"/>
               </a:srgbClr>
             </a:outerShdw>
           </a:effectLst>
@@ -8036,13 +9252,13 @@
       </p:sp>
       <p:sp>
         <p:nvSpPr>
-          <p:cNvPr id="47" name="Shape 45"/>
-          <p:cNvSpPr/>
-          <p:nvPr/>
-        </p:nvSpPr>
-        <p:spPr>
-          <a:xfrm>
-            <a:off x="7168896" y="1847088"/>
+          <p:cNvPr id="51" name="Shape 49"/>
+          <p:cNvSpPr/>
+          <p:nvPr/>
+        </p:nvSpPr>
+        <p:spPr>
+          <a:xfrm>
+            <a:off x="7168896" y="1682496"/>
             <a:ext cx="1591056" cy="54864"/>
           </a:xfrm>
           <a:prstGeom prst="rect">
@@ -8068,13 +9284,13 @@
       </p:sp>
       <p:sp>
         <p:nvSpPr>
-          <p:cNvPr id="48" name="Shape 46"/>
-          <p:cNvSpPr/>
-          <p:nvPr/>
-        </p:nvSpPr>
-        <p:spPr>
-          <a:xfrm>
-            <a:off x="7671816" y="1993392"/>
+          <p:cNvPr id="52" name="Shape 50"/>
+          <p:cNvSpPr/>
+          <p:nvPr/>
+        </p:nvSpPr>
+        <p:spPr>
+          <a:xfrm>
+            <a:off x="7671816" y="1810512"/>
             <a:ext cx="585216" cy="585216"/>
           </a:xfrm>
           <a:prstGeom prst="ellipse">
@@ -8100,13 +9316,13 @@
       </p:sp>
       <p:sp>
         <p:nvSpPr>
-          <p:cNvPr id="49" name="Text 47"/>
-          <p:cNvSpPr/>
-          <p:nvPr/>
-        </p:nvSpPr>
-        <p:spPr>
-          <a:xfrm>
-            <a:off x="7671816" y="1993392"/>
+          <p:cNvPr id="53" name="Text 51"/>
+          <p:cNvSpPr/>
+          <p:nvPr/>
+        </p:nvSpPr>
+        <p:spPr>
+          <a:xfrm>
+            <a:off x="7671816" y="1810512"/>
             <a:ext cx="585216" cy="585216"/>
           </a:xfrm>
           <a:prstGeom prst="rect">
@@ -8123,7 +9339,7 @@
               <a:buNone/>
             </a:pPr>
             <a:r>
-              <a:rPr lang="en-US" sz="1600" b="1" dirty="0">
+              <a:rPr lang="en-US" sz="1800" b="1" dirty="0">
                 <a:solidFill>
                   <a:srgbClr val="FFFFFF"/>
                 </a:solidFill>
@@ -8133,20 +9349,20 @@
               </a:rPr>
               <a:t>5</a:t>
             </a:r>
-            <a:endParaRPr lang="en-US" sz="1600" dirty="0"/>
-          </a:p>
-        </p:txBody>
-      </p:sp>
-      <p:sp>
-        <p:nvSpPr>
-          <p:cNvPr id="50" name="Text 48"/>
-          <p:cNvSpPr/>
-          <p:nvPr/>
-        </p:nvSpPr>
-        <p:spPr>
-          <a:xfrm>
-            <a:off x="7242048" y="2706624"/>
-            <a:ext cx="1444752" cy="502920"/>
+            <a:endParaRPr lang="en-US" sz="1800" dirty="0"/>
+          </a:p>
+        </p:txBody>
+      </p:sp>
+      <p:sp>
+        <p:nvSpPr>
+          <p:cNvPr id="54" name="Text 52"/>
+          <p:cNvSpPr/>
+          <p:nvPr/>
+        </p:nvSpPr>
+        <p:spPr>
+          <a:xfrm>
+            <a:off x="7223760" y="2487168"/>
+            <a:ext cx="1481328" cy="475488"/>
           </a:xfrm>
           <a:prstGeom prst="rect">
             <a:avLst/>
@@ -8162,7 +9378,7 @@
               <a:buNone/>
             </a:pPr>
             <a:r>
-              <a:rPr lang="en-US" sz="1150" b="1" dirty="0">
+              <a:rPr lang="en-US" sz="1100" b="1" dirty="0">
                 <a:solidFill>
                   <a:srgbClr val="111111"/>
                 </a:solidFill>
@@ -8172,14 +9388,14 @@
               </a:rPr>
               <a:t>Cost</a:t>
             </a:r>
-            <a:endParaRPr lang="en-US" sz="1150" dirty="0"/>
+            <a:endParaRPr lang="en-US" sz="1100" dirty="0"/>
           </a:p>
           <a:p>
             <a:pPr marL="0" indent="0" algn="ctr">
               <a:buNone/>
             </a:pPr>
             <a:r>
-              <a:rPr lang="en-US" sz="1150" b="1" dirty="0">
+              <a:rPr lang="en-US" sz="1100" b="1" dirty="0">
                 <a:solidFill>
                   <a:srgbClr val="111111"/>
                 </a:solidFill>
@@ -8189,20 +9405,20 @@
               </a:rPr>
               <a:t>Categorisation</a:t>
             </a:r>
-            <a:endParaRPr lang="en-US" sz="1150" dirty="0"/>
-          </a:p>
-        </p:txBody>
-      </p:sp>
-      <p:sp>
-        <p:nvSpPr>
-          <p:cNvPr id="51" name="Text 49"/>
-          <p:cNvSpPr/>
-          <p:nvPr/>
-        </p:nvSpPr>
-        <p:spPr>
-          <a:xfrm>
-            <a:off x="7242048" y="3246120"/>
-            <a:ext cx="1444752" cy="274320"/>
+            <a:endParaRPr lang="en-US" sz="1100" dirty="0"/>
+          </a:p>
+        </p:txBody>
+      </p:sp>
+      <p:sp>
+        <p:nvSpPr>
+          <p:cNvPr id="55" name="Text 53"/>
+          <p:cNvSpPr/>
+          <p:nvPr/>
+        </p:nvSpPr>
+        <p:spPr>
+          <a:xfrm>
+            <a:off x="7223760" y="2980944"/>
+            <a:ext cx="1481328" cy="237744"/>
           </a:xfrm>
           <a:prstGeom prst="rect">
             <a:avLst/>
@@ -8218,7 +9434,7 @@
               <a:buNone/>
             </a:pPr>
             <a:r>
-              <a:rPr lang="en-US" sz="950" dirty="0">
+              <a:rPr lang="en-US" sz="900" b="1" dirty="0">
                 <a:solidFill>
                   <a:srgbClr val="005AEE"/>
                 </a:solidFill>
@@ -8228,123 +9444,115 @@
               </a:rPr>
               <a:t>Agent 5</a:t>
             </a:r>
-            <a:endParaRPr lang="en-US" sz="950" dirty="0"/>
-          </a:p>
-        </p:txBody>
-      </p:sp>
-      <p:sp>
-        <p:nvSpPr>
-          <p:cNvPr id="52" name="Text 50"/>
-          <p:cNvSpPr/>
-          <p:nvPr/>
-        </p:nvSpPr>
-        <p:spPr>
-          <a:xfrm>
-            <a:off x="7242048" y="3566160"/>
-            <a:ext cx="1444752" cy="685800"/>
-          </a:xfrm>
-          <a:prstGeom prst="rect">
-            <a:avLst/>
-          </a:prstGeom>
-          <a:noFill/>
-          <a:ln/>
-        </p:spPr>
-        <p:txBody>
-          <a:bodyPr wrap="square" lIns="0" tIns="0" rIns="0" bIns="0" rtlCol="0" anchor="ctr"/>
-          <a:lstStyle/>
-          <a:p>
-            <a:pPr marL="0" indent="0" algn="ctr">
-              <a:buNone/>
-            </a:pPr>
-            <a:r>
-              <a:rPr lang="en-US" sz="950" dirty="0">
+            <a:endParaRPr lang="en-US" sz="900" dirty="0"/>
+          </a:p>
+        </p:txBody>
+      </p:sp>
+      <p:sp>
+        <p:nvSpPr>
+          <p:cNvPr id="56" name="Shape 54"/>
+          <p:cNvSpPr/>
+          <p:nvPr/>
+        </p:nvSpPr>
+        <p:spPr>
+          <a:xfrm>
+            <a:off x="7306056" y="3255264"/>
+            <a:ext cx="1316736" cy="18288"/>
+          </a:xfrm>
+          <a:prstGeom prst="rect">
+            <a:avLst/>
+          </a:prstGeom>
+          <a:solidFill>
+            <a:srgbClr val="E2E8F0"/>
+          </a:solidFill>
+          <a:ln w="12700">
+            <a:solidFill>
+              <a:srgbClr val="E2E8F0"/>
+            </a:solidFill>
+            <a:prstDash val="solid"/>
+          </a:ln>
+        </p:spPr>
+        <p:txBody>
+          <a:bodyPr/>
+          <a:lstStyle/>
+          <a:p>
+            <a:endParaRPr lang="de-DE"/>
+          </a:p>
+        </p:txBody>
+      </p:sp>
+      <p:sp>
+        <p:nvSpPr>
+          <p:cNvPr id="57" name="Text 55"/>
+          <p:cNvSpPr/>
+          <p:nvPr/>
+        </p:nvSpPr>
+        <p:spPr>
+          <a:xfrm>
+            <a:off x="7242048" y="3328416"/>
+            <a:ext cx="1444752" cy="1243584"/>
+          </a:xfrm>
+          <a:prstGeom prst="rect">
+            <a:avLst/>
+          </a:prstGeom>
+          <a:noFill/>
+          <a:ln/>
+        </p:spPr>
+        <p:txBody>
+          <a:bodyPr wrap="square" lIns="0" tIns="0" rIns="0" bIns="0" rtlCol="0" anchor="ctr"/>
+          <a:lstStyle/>
+          <a:p>
+            <a:pPr marL="92075" indent="-92075">
+              <a:buFont typeface="Arial" panose="020B0604020202020204" pitchFamily="34" charset="0"/>
+              <a:buChar char="•"/>
+            </a:pPr>
+            <a:r>
+              <a:rPr lang="en-US" sz="780" dirty="0">
                 <a:solidFill>
                   <a:srgbClr val="4A4A4A"/>
                 </a:solidFill>
                 <a:latin typeface="Arial" pitchFamily="34" charset="0"/>
-                <a:ea typeface="Arial" pitchFamily="34" charset="-122"/>
-                <a:cs typeface="Arial" pitchFamily="34" charset="-120"/>
-              </a:rPr>
-              <a:t>Live burn view by country/type/team</a:t>
-            </a:r>
-            <a:endParaRPr lang="en-US" sz="950" dirty="0"/>
-          </a:p>
-        </p:txBody>
-      </p:sp>
-      <p:sp>
-        <p:nvSpPr>
-          <p:cNvPr id="53" name="Shape 51"/>
-          <p:cNvSpPr/>
-          <p:nvPr/>
-        </p:nvSpPr>
-        <p:spPr>
-          <a:xfrm>
-            <a:off x="7598664" y="4279392"/>
-            <a:ext cx="731520" cy="219456"/>
-          </a:xfrm>
-          <a:prstGeom prst="rect">
-            <a:avLst/>
-          </a:prstGeom>
-          <a:solidFill>
-            <a:srgbClr val="E8F0FD"/>
-          </a:solidFill>
-          <a:ln w="12700">
-            <a:solidFill>
-              <a:srgbClr val="C5D9FA"/>
-            </a:solidFill>
-            <a:prstDash val="solid"/>
-          </a:ln>
-        </p:spPr>
-        <p:txBody>
-          <a:bodyPr/>
-          <a:lstStyle/>
-          <a:p>
-            <a:endParaRPr lang="de-DE"/>
-          </a:p>
-        </p:txBody>
-      </p:sp>
-      <p:sp>
-        <p:nvSpPr>
-          <p:cNvPr id="54" name="Text 52"/>
-          <p:cNvSpPr/>
-          <p:nvPr/>
-        </p:nvSpPr>
-        <p:spPr>
-          <a:xfrm>
-            <a:off x="7598664" y="4279392"/>
-            <a:ext cx="731520" cy="219456"/>
-          </a:xfrm>
-          <a:prstGeom prst="rect">
-            <a:avLst/>
-          </a:prstGeom>
-          <a:noFill/>
-          <a:ln/>
-        </p:spPr>
-        <p:txBody>
-          <a:bodyPr wrap="square" lIns="0" tIns="0" rIns="0" bIns="0" rtlCol="0" anchor="ctr"/>
-          <a:lstStyle/>
-          <a:p>
-            <a:pPr marL="0" indent="0" algn="ctr">
-              <a:buNone/>
-            </a:pPr>
-            <a:r>
-              <a:rPr lang="en-US" sz="850" b="1" dirty="0">
-                <a:solidFill>
-                  <a:srgbClr val="005AEE"/>
-                </a:solidFill>
-                <a:latin typeface="Arial" pitchFamily="34" charset="0"/>
-                <a:ea typeface="Arial" pitchFamily="34" charset="-122"/>
-                <a:cs typeface="Arial" pitchFamily="34" charset="-120"/>
-              </a:rPr>
-              <a:t>AI</a:t>
-            </a:r>
-            <a:endParaRPr lang="en-US" sz="850" dirty="0"/>
-          </a:p>
-        </p:txBody>
-      </p:sp>
-      <p:sp>
-        <p:nvSpPr>
-          <p:cNvPr id="55" name="Shape 53"/>
+                <a:cs typeface="Arial" pitchFamily="34" charset="-120"/>
+              </a:rPr>
+              <a:t>LLM normalises ambiguous spend descriptions and categorises all payments by country, contract type, team, and intermediary.</a:t>
+            </a:r>
+          </a:p>
+          <a:p>
+            <a:pPr marL="92075" indent="-92075">
+              <a:buFont typeface="Arial" panose="020B0604020202020204" pitchFamily="34" charset="0"/>
+              <a:buChar char="•"/>
+            </a:pPr>
+            <a:r>
+              <a:rPr lang="en-US" sz="780" dirty="0">
+                <a:solidFill>
+                  <a:srgbClr val="4A4A4A"/>
+                </a:solidFill>
+                <a:latin typeface="Arial" pitchFamily="34" charset="0"/>
+                <a:cs typeface="Arial" pitchFamily="34" charset="-120"/>
+              </a:rPr>
+              <a:t>Plain software aggregates and renders the dashboard.</a:t>
+            </a:r>
+          </a:p>
+          <a:p>
+            <a:pPr marL="92075" indent="-92075">
+              <a:buFont typeface="Arial" panose="020B0604020202020204" pitchFamily="34" charset="0"/>
+              <a:buChar char="•"/>
+            </a:pPr>
+            <a:r>
+              <a:rPr lang="en-US" sz="780" dirty="0">
+                <a:solidFill>
+                  <a:srgbClr val="4A4A4A"/>
+                </a:solidFill>
+                <a:latin typeface="Arial" pitchFamily="34" charset="0"/>
+                <a:cs typeface="Arial" pitchFamily="34" charset="-120"/>
+              </a:rPr>
+              <a:t>Output: categorised cost register + burn trend.</a:t>
+            </a:r>
+          </a:p>
+        </p:txBody>
+      </p:sp>
+      <p:sp>
+        <p:nvSpPr>
+          <p:cNvPr id="60" name="Shape 58"/>
           <p:cNvSpPr/>
           <p:nvPr/>
         </p:nvSpPr>
@@ -8376,7 +9584,7 @@
       </p:sp>
       <p:sp>
         <p:nvSpPr>
-          <p:cNvPr id="56" name="Shape 54"/>
+          <p:cNvPr id="61" name="Shape 59"/>
           <p:cNvSpPr/>
           <p:nvPr/>
         </p:nvSpPr>
@@ -8408,7 +9616,7 @@
       </p:sp>
       <p:sp>
         <p:nvSpPr>
-          <p:cNvPr id="57" name="Text 55"/>
+          <p:cNvPr id="62" name="Text 60"/>
           <p:cNvSpPr/>
           <p:nvPr/>
         </p:nvSpPr>
@@ -9597,6 +10805,1958 @@
 </file>
 
 <file path=ppt/slides/slide7.xml><?xml version="1.0" encoding="utf-8"?>
+<p:sld xmlns:a="http://schemas.openxmlformats.org/drawingml/2006/main" xmlns:r="http://schemas.openxmlformats.org/officeDocument/2006/relationships" xmlns:p="http://schemas.openxmlformats.org/presentationml/2006/main" show="0">
+  <p:cSld>
+    <p:spTree>
+      <p:nvGrpSpPr>
+        <p:cNvPr id="1" name=""/>
+        <p:cNvGrpSpPr/>
+        <p:nvPr/>
+      </p:nvGrpSpPr>
+      <p:grpSpPr>
+        <a:xfrm>
+          <a:off x="0" y="0"/>
+          <a:ext cx="0" cy="0"/>
+          <a:chOff x="0" y="0"/>
+          <a:chExt cx="0" cy="0"/>
+        </a:xfrm>
+      </p:grpSpPr>
+      <p:sp>
+        <p:nvSpPr>
+          <p:cNvPr id="4" name="Shape 2"/>
+          <p:cNvSpPr/>
+          <p:nvPr/>
+        </p:nvSpPr>
+        <p:spPr>
+          <a:xfrm>
+            <a:off x="457200" y="822960"/>
+            <a:ext cx="8229600" cy="27432"/>
+          </a:xfrm>
+          <a:prstGeom prst="rect">
+            <a:avLst/>
+          </a:prstGeom>
+          <a:solidFill>
+            <a:srgbClr val="005AEE"/>
+          </a:solidFill>
+          <a:ln w="12700">
+            <a:solidFill>
+              <a:srgbClr val="005AEE"/>
+            </a:solidFill>
+            <a:prstDash val="solid"/>
+          </a:ln>
+        </p:spPr>
+        <p:txBody>
+          <a:bodyPr/>
+          <a:lstStyle/>
+          <a:p>
+            <a:endParaRPr lang="de-DE"/>
+          </a:p>
+        </p:txBody>
+      </p:sp>
+      <p:sp>
+        <p:nvSpPr>
+          <p:cNvPr id="5" name="Text 3"/>
+          <p:cNvSpPr/>
+          <p:nvPr/>
+        </p:nvSpPr>
+        <p:spPr>
+          <a:xfrm>
+            <a:off x="457200" y="91440"/>
+            <a:ext cx="7955280" cy="694944"/>
+          </a:xfrm>
+          <a:prstGeom prst="rect">
+            <a:avLst/>
+          </a:prstGeom>
+          <a:noFill/>
+          <a:ln/>
+        </p:spPr>
+        <p:txBody>
+          <a:bodyPr wrap="square" lIns="0" tIns="0" rIns="0" bIns="0" rtlCol="0" anchor="ctr"/>
+          <a:lstStyle/>
+          <a:p>
+            <a:pPr marL="0" indent="0" algn="l">
+              <a:buNone/>
+            </a:pPr>
+            <a:r>
+              <a:rPr lang="en-US" sz="2400" b="1" dirty="0">
+                <a:solidFill>
+                  <a:srgbClr val="111111"/>
+                </a:solidFill>
+                <a:latin typeface="Arial" pitchFamily="34" charset="0"/>
+                <a:ea typeface="Arial" pitchFamily="34" charset="-122"/>
+                <a:cs typeface="Arial" pitchFamily="34" charset="-120"/>
+              </a:rPr>
+              <a:t>Technical Infrastructure Architecture</a:t>
+            </a:r>
+            <a:endParaRPr lang="en-US" sz="2400" dirty="0"/>
+          </a:p>
+        </p:txBody>
+      </p:sp>
+      <p:sp>
+        <p:nvSpPr>
+          <p:cNvPr id="6" name="Text 4"/>
+          <p:cNvSpPr/>
+          <p:nvPr/>
+        </p:nvSpPr>
+        <p:spPr>
+          <a:xfrm>
+            <a:off x="457200" y="868680"/>
+            <a:ext cx="8229600" cy="237744"/>
+          </a:xfrm>
+          <a:prstGeom prst="rect">
+            <a:avLst/>
+          </a:prstGeom>
+          <a:noFill/>
+          <a:ln/>
+        </p:spPr>
+        <p:txBody>
+          <a:bodyPr wrap="square" lIns="0" tIns="0" rIns="0" bIns="0" rtlCol="0" anchor="ctr"/>
+          <a:lstStyle/>
+          <a:p>
+            <a:pPr marL="0" indent="0" algn="r">
+              <a:buNone/>
+            </a:pPr>
+            <a:r>
+              <a:rPr lang="en-US" sz="850" b="1" dirty="0">
+                <a:solidFill>
+                  <a:srgbClr val="005AEE"/>
+                </a:solidFill>
+                <a:latin typeface="Arial" pitchFamily="34" charset="0"/>
+                <a:ea typeface="Arial" pitchFamily="34" charset="-122"/>
+                <a:cs typeface="Arial" pitchFamily="34" charset="-120"/>
+              </a:rPr>
+              <a:t>04  SOLUTION DESIGN</a:t>
+            </a:r>
+            <a:endParaRPr lang="en-US" sz="850" dirty="0"/>
+          </a:p>
+        </p:txBody>
+      </p:sp>
+      <p:sp>
+        <p:nvSpPr>
+          <p:cNvPr id="7" name="Shape 5"/>
+          <p:cNvSpPr/>
+          <p:nvPr/>
+        </p:nvSpPr>
+        <p:spPr>
+          <a:xfrm>
+            <a:off x="457200" y="1170432"/>
+            <a:ext cx="8229600" cy="347472"/>
+          </a:xfrm>
+          <a:prstGeom prst="rect">
+            <a:avLst/>
+          </a:prstGeom>
+          <a:solidFill>
+            <a:srgbClr val="E8F0FD"/>
+          </a:solidFill>
+          <a:ln w="12700">
+            <a:solidFill>
+              <a:srgbClr val="005AEE"/>
+            </a:solidFill>
+            <a:prstDash val="solid"/>
+          </a:ln>
+        </p:spPr>
+        <p:txBody>
+          <a:bodyPr/>
+          <a:lstStyle/>
+          <a:p>
+            <a:endParaRPr lang="de-DE"/>
+          </a:p>
+        </p:txBody>
+      </p:sp>
+      <p:sp>
+        <p:nvSpPr>
+          <p:cNvPr id="8" name="Shape 6"/>
+          <p:cNvSpPr/>
+          <p:nvPr/>
+        </p:nvSpPr>
+        <p:spPr>
+          <a:xfrm>
+            <a:off x="457200" y="1170432"/>
+            <a:ext cx="45720" cy="347472"/>
+          </a:xfrm>
+          <a:prstGeom prst="rect">
+            <a:avLst/>
+          </a:prstGeom>
+          <a:solidFill>
+            <a:srgbClr val="005AEE"/>
+          </a:solidFill>
+          <a:ln w="12700">
+            <a:solidFill>
+              <a:srgbClr val="005AEE"/>
+            </a:solidFill>
+            <a:prstDash val="solid"/>
+          </a:ln>
+        </p:spPr>
+        <p:txBody>
+          <a:bodyPr/>
+          <a:lstStyle/>
+          <a:p>
+            <a:endParaRPr lang="de-DE"/>
+          </a:p>
+        </p:txBody>
+      </p:sp>
+      <p:sp>
+        <p:nvSpPr>
+          <p:cNvPr id="9" name="Text 7"/>
+          <p:cNvSpPr/>
+          <p:nvPr/>
+        </p:nvSpPr>
+        <p:spPr>
+          <a:xfrm>
+            <a:off x="621792" y="1170432"/>
+            <a:ext cx="7955280" cy="347472"/>
+          </a:xfrm>
+          <a:prstGeom prst="rect">
+            <a:avLst/>
+          </a:prstGeom>
+          <a:noFill/>
+          <a:ln/>
+        </p:spPr>
+        <p:txBody>
+          <a:bodyPr wrap="square" lIns="0" tIns="0" rIns="0" bIns="0" rtlCol="0" anchor="ctr"/>
+          <a:lstStyle/>
+          <a:p>
+            <a:pPr marL="0" indent="0" algn="l">
+              <a:buNone/>
+            </a:pPr>
+            <a:r>
+              <a:rPr lang="en-US" sz="1100" b="1" i="1" dirty="0">
+                <a:solidFill>
+                  <a:srgbClr val="111111"/>
+                </a:solidFill>
+                <a:latin typeface="Arial" pitchFamily="34" charset="0"/>
+                <a:ea typeface="Arial" pitchFamily="34" charset="-122"/>
+                <a:cs typeface="Arial" pitchFamily="34" charset="-120"/>
+              </a:rPr>
+              <a:t>EU-hosted, privacy-first AI intelligence layer — n8n · LangChain · LangGraph · LangSmith — all data stays in EU infrastructure.</a:t>
+            </a:r>
+            <a:endParaRPr lang="en-US" sz="1100" dirty="0"/>
+          </a:p>
+        </p:txBody>
+      </p:sp>
+      <p:sp>
+        <p:nvSpPr>
+          <p:cNvPr id="10" name="Text 8"/>
+          <p:cNvSpPr/>
+          <p:nvPr/>
+        </p:nvSpPr>
+        <p:spPr>
+          <a:xfrm>
+            <a:off x="457200" y="1609344"/>
+            <a:ext cx="3840480" cy="274320"/>
+          </a:xfrm>
+          <a:prstGeom prst="rect">
+            <a:avLst/>
+          </a:prstGeom>
+          <a:noFill/>
+          <a:ln/>
+        </p:spPr>
+        <p:txBody>
+          <a:bodyPr wrap="square" lIns="0" tIns="0" rIns="0" bIns="0" rtlCol="0" anchor="ctr"/>
+          <a:lstStyle/>
+          <a:p>
+            <a:pPr marL="0" indent="0" algn="l">
+              <a:buNone/>
+            </a:pPr>
+            <a:r>
+              <a:rPr lang="en-US" sz="1100" b="1" dirty="0">
+                <a:solidFill>
+                  <a:srgbClr val="111111"/>
+                </a:solidFill>
+                <a:latin typeface="Arial" pitchFamily="34" charset="0"/>
+                <a:ea typeface="Arial" pitchFamily="34" charset="-122"/>
+                <a:cs typeface="Arial" pitchFamily="34" charset="-120"/>
+              </a:rPr>
+              <a:t>Tech Stack</a:t>
+            </a:r>
+            <a:endParaRPr lang="en-US" sz="1100" dirty="0"/>
+          </a:p>
+        </p:txBody>
+      </p:sp>
+      <p:sp>
+        <p:nvSpPr>
+          <p:cNvPr id="11" name="Shape 9"/>
+          <p:cNvSpPr/>
+          <p:nvPr/>
+        </p:nvSpPr>
+        <p:spPr>
+          <a:xfrm>
+            <a:off x="457200" y="1938528"/>
+            <a:ext cx="3840480" cy="475488"/>
+          </a:xfrm>
+          <a:prstGeom prst="rect">
+            <a:avLst/>
+          </a:prstGeom>
+          <a:solidFill>
+            <a:srgbClr val="FFFFFF"/>
+          </a:solidFill>
+          <a:ln w="12700">
+            <a:solidFill>
+              <a:srgbClr val="E2E8F0"/>
+            </a:solidFill>
+            <a:prstDash val="solid"/>
+          </a:ln>
+          <a:effectLst>
+            <a:outerShdw blurRad="76200" dist="25400" dir="8100000" algn="bl" rotWithShape="0">
+              <a:srgbClr val="000000">
+                <a:alpha val="6000"/>
+              </a:srgbClr>
+            </a:outerShdw>
+          </a:effectLst>
+        </p:spPr>
+        <p:txBody>
+          <a:bodyPr/>
+          <a:lstStyle/>
+          <a:p>
+            <a:endParaRPr lang="de-DE"/>
+          </a:p>
+        </p:txBody>
+      </p:sp>
+      <p:sp>
+        <p:nvSpPr>
+          <p:cNvPr id="12" name="Shape 10"/>
+          <p:cNvSpPr/>
+          <p:nvPr/>
+        </p:nvSpPr>
+        <p:spPr>
+          <a:xfrm>
+            <a:off x="457200" y="1938528"/>
+            <a:ext cx="45720" cy="475488"/>
+          </a:xfrm>
+          <a:prstGeom prst="rect">
+            <a:avLst/>
+          </a:prstGeom>
+          <a:solidFill>
+            <a:srgbClr val="005AEE"/>
+          </a:solidFill>
+          <a:ln w="12700">
+            <a:solidFill>
+              <a:srgbClr val="005AEE"/>
+            </a:solidFill>
+            <a:prstDash val="solid"/>
+          </a:ln>
+        </p:spPr>
+        <p:txBody>
+          <a:bodyPr/>
+          <a:lstStyle/>
+          <a:p>
+            <a:endParaRPr lang="de-DE"/>
+          </a:p>
+        </p:txBody>
+      </p:sp>
+      <p:sp>
+        <p:nvSpPr>
+          <p:cNvPr id="13" name="Shape 11"/>
+          <p:cNvSpPr/>
+          <p:nvPr/>
+        </p:nvSpPr>
+        <p:spPr>
+          <a:xfrm>
+            <a:off x="457200" y="1938528"/>
+            <a:ext cx="822960" cy="475488"/>
+          </a:xfrm>
+          <a:prstGeom prst="rect">
+            <a:avLst/>
+          </a:prstGeom>
+          <a:solidFill>
+            <a:srgbClr val="E8F0FD"/>
+          </a:solidFill>
+          <a:ln w="12700">
+            <a:solidFill>
+              <a:srgbClr val="E2E8F0"/>
+            </a:solidFill>
+            <a:prstDash val="solid"/>
+          </a:ln>
+        </p:spPr>
+        <p:txBody>
+          <a:bodyPr/>
+          <a:lstStyle/>
+          <a:p>
+            <a:endParaRPr lang="de-DE"/>
+          </a:p>
+        </p:txBody>
+      </p:sp>
+      <p:sp>
+        <p:nvSpPr>
+          <p:cNvPr id="14" name="Text 12"/>
+          <p:cNvSpPr/>
+          <p:nvPr/>
+        </p:nvSpPr>
+        <p:spPr>
+          <a:xfrm>
+            <a:off x="475488" y="1938528"/>
+            <a:ext cx="804672" cy="475488"/>
+          </a:xfrm>
+          <a:prstGeom prst="rect">
+            <a:avLst/>
+          </a:prstGeom>
+          <a:noFill/>
+          <a:ln/>
+        </p:spPr>
+        <p:txBody>
+          <a:bodyPr wrap="square" lIns="0" tIns="0" rIns="0" bIns="0" rtlCol="0" anchor="ctr"/>
+          <a:lstStyle/>
+          <a:p>
+            <a:pPr marL="0" indent="0" algn="ctr">
+              <a:buNone/>
+            </a:pPr>
+            <a:r>
+              <a:rPr lang="en-US" sz="950" b="1" dirty="0">
+                <a:solidFill>
+                  <a:srgbClr val="005AEE"/>
+                </a:solidFill>
+                <a:latin typeface="Arial" pitchFamily="34" charset="0"/>
+                <a:ea typeface="Arial" pitchFamily="34" charset="-122"/>
+                <a:cs typeface="Arial" pitchFamily="34" charset="-120"/>
+              </a:rPr>
+              <a:t>n8n</a:t>
+            </a:r>
+            <a:endParaRPr lang="en-US" sz="950" dirty="0"/>
+          </a:p>
+        </p:txBody>
+      </p:sp>
+      <p:sp>
+        <p:nvSpPr>
+          <p:cNvPr id="15" name="Text 13"/>
+          <p:cNvSpPr/>
+          <p:nvPr/>
+        </p:nvSpPr>
+        <p:spPr>
+          <a:xfrm>
+            <a:off x="1325880" y="1975104"/>
+            <a:ext cx="2880360" cy="402336"/>
+          </a:xfrm>
+          <a:prstGeom prst="rect">
+            <a:avLst/>
+          </a:prstGeom>
+          <a:noFill/>
+          <a:ln/>
+        </p:spPr>
+        <p:txBody>
+          <a:bodyPr wrap="square" lIns="0" tIns="0" rIns="0" bIns="0" rtlCol="0" anchor="ctr"/>
+          <a:lstStyle/>
+          <a:p>
+            <a:pPr marL="0" indent="0" algn="l">
+              <a:buNone/>
+            </a:pPr>
+            <a:r>
+              <a:rPr lang="en-US" sz="900" b="1" dirty="0">
+                <a:solidFill>
+                  <a:srgbClr val="111111"/>
+                </a:solidFill>
+                <a:latin typeface="Arial" pitchFamily="34" charset="0"/>
+                <a:ea typeface="Arial" pitchFamily="34" charset="-122"/>
+                <a:cs typeface="Arial" pitchFamily="34" charset="-120"/>
+              </a:rPr>
+              <a:t>Workflow &amp; Integration  </a:t>
+            </a:r>
+            <a:r>
+              <a:rPr lang="en-US" sz="900" dirty="0">
+                <a:solidFill>
+                  <a:srgbClr val="4A4A4A"/>
+                </a:solidFill>
+                <a:latin typeface="Arial" pitchFamily="34" charset="0"/>
+                <a:ea typeface="Arial" pitchFamily="34" charset="-122"/>
+                <a:cs typeface="Arial" pitchFamily="34" charset="-120"/>
+              </a:rPr>
+              <a:t>Connects all data sources: contracts, invoices, payroll exports, HR records, payment confirmations</a:t>
+            </a:r>
+            <a:endParaRPr lang="en-US" sz="900" dirty="0"/>
+          </a:p>
+        </p:txBody>
+      </p:sp>
+      <p:sp>
+        <p:nvSpPr>
+          <p:cNvPr id="16" name="Shape 14"/>
+          <p:cNvSpPr/>
+          <p:nvPr/>
+        </p:nvSpPr>
+        <p:spPr>
+          <a:xfrm>
+            <a:off x="457200" y="2487168"/>
+            <a:ext cx="3840480" cy="475488"/>
+          </a:xfrm>
+          <a:prstGeom prst="rect">
+            <a:avLst/>
+          </a:prstGeom>
+          <a:solidFill>
+            <a:srgbClr val="FFFFFF"/>
+          </a:solidFill>
+          <a:ln w="12700">
+            <a:solidFill>
+              <a:srgbClr val="E2E8F0"/>
+            </a:solidFill>
+            <a:prstDash val="solid"/>
+          </a:ln>
+          <a:effectLst>
+            <a:outerShdw blurRad="76200" dist="25400" dir="8100000" algn="bl" rotWithShape="0">
+              <a:srgbClr val="000000">
+                <a:alpha val="6000"/>
+              </a:srgbClr>
+            </a:outerShdw>
+          </a:effectLst>
+        </p:spPr>
+        <p:txBody>
+          <a:bodyPr/>
+          <a:lstStyle/>
+          <a:p>
+            <a:endParaRPr lang="de-DE"/>
+          </a:p>
+        </p:txBody>
+      </p:sp>
+      <p:sp>
+        <p:nvSpPr>
+          <p:cNvPr id="17" name="Shape 15"/>
+          <p:cNvSpPr/>
+          <p:nvPr/>
+        </p:nvSpPr>
+        <p:spPr>
+          <a:xfrm>
+            <a:off x="457200" y="2487168"/>
+            <a:ext cx="45720" cy="475488"/>
+          </a:xfrm>
+          <a:prstGeom prst="rect">
+            <a:avLst/>
+          </a:prstGeom>
+          <a:solidFill>
+            <a:srgbClr val="7C3AED"/>
+          </a:solidFill>
+          <a:ln w="12700">
+            <a:solidFill>
+              <a:srgbClr val="7C3AED"/>
+            </a:solidFill>
+            <a:prstDash val="solid"/>
+          </a:ln>
+        </p:spPr>
+        <p:txBody>
+          <a:bodyPr/>
+          <a:lstStyle/>
+          <a:p>
+            <a:endParaRPr lang="de-DE"/>
+          </a:p>
+        </p:txBody>
+      </p:sp>
+      <p:sp>
+        <p:nvSpPr>
+          <p:cNvPr id="18" name="Shape 16"/>
+          <p:cNvSpPr/>
+          <p:nvPr/>
+        </p:nvSpPr>
+        <p:spPr>
+          <a:xfrm>
+            <a:off x="457200" y="2487168"/>
+            <a:ext cx="822960" cy="475488"/>
+          </a:xfrm>
+          <a:prstGeom prst="rect">
+            <a:avLst/>
+          </a:prstGeom>
+          <a:solidFill>
+            <a:srgbClr val="E8F0FD"/>
+          </a:solidFill>
+          <a:ln w="12700">
+            <a:solidFill>
+              <a:srgbClr val="E2E8F0"/>
+            </a:solidFill>
+            <a:prstDash val="solid"/>
+          </a:ln>
+        </p:spPr>
+        <p:txBody>
+          <a:bodyPr/>
+          <a:lstStyle/>
+          <a:p>
+            <a:endParaRPr lang="de-DE"/>
+          </a:p>
+        </p:txBody>
+      </p:sp>
+      <p:sp>
+        <p:nvSpPr>
+          <p:cNvPr id="19" name="Text 17"/>
+          <p:cNvSpPr/>
+          <p:nvPr/>
+        </p:nvSpPr>
+        <p:spPr>
+          <a:xfrm>
+            <a:off x="475488" y="2487168"/>
+            <a:ext cx="804672" cy="475488"/>
+          </a:xfrm>
+          <a:prstGeom prst="rect">
+            <a:avLst/>
+          </a:prstGeom>
+          <a:noFill/>
+          <a:ln/>
+        </p:spPr>
+        <p:txBody>
+          <a:bodyPr wrap="square" lIns="0" tIns="0" rIns="0" bIns="0" rtlCol="0" anchor="ctr"/>
+          <a:lstStyle/>
+          <a:p>
+            <a:pPr marL="0" indent="0" algn="ctr">
+              <a:buNone/>
+            </a:pPr>
+            <a:r>
+              <a:rPr lang="en-US" sz="950" b="1" dirty="0">
+                <a:solidFill>
+                  <a:srgbClr val="7C3AED"/>
+                </a:solidFill>
+                <a:latin typeface="Arial" pitchFamily="34" charset="0"/>
+                <a:ea typeface="Arial" pitchFamily="34" charset="-122"/>
+                <a:cs typeface="Arial" pitchFamily="34" charset="-120"/>
+              </a:rPr>
+              <a:t>LangChain</a:t>
+            </a:r>
+            <a:endParaRPr lang="en-US" sz="950" dirty="0"/>
+          </a:p>
+        </p:txBody>
+      </p:sp>
+      <p:sp>
+        <p:nvSpPr>
+          <p:cNvPr id="20" name="Text 18"/>
+          <p:cNvSpPr/>
+          <p:nvPr/>
+        </p:nvSpPr>
+        <p:spPr>
+          <a:xfrm>
+            <a:off x="1325880" y="2523744"/>
+            <a:ext cx="2880360" cy="402336"/>
+          </a:xfrm>
+          <a:prstGeom prst="rect">
+            <a:avLst/>
+          </a:prstGeom>
+          <a:noFill/>
+          <a:ln/>
+        </p:spPr>
+        <p:txBody>
+          <a:bodyPr wrap="square" lIns="0" tIns="0" rIns="0" bIns="0" rtlCol="0" anchor="ctr"/>
+          <a:lstStyle/>
+          <a:p>
+            <a:pPr marL="0" indent="0" algn="l">
+              <a:buNone/>
+            </a:pPr>
+            <a:r>
+              <a:rPr lang="en-US" sz="900" b="1" dirty="0">
+                <a:solidFill>
+                  <a:srgbClr val="111111"/>
+                </a:solidFill>
+                <a:latin typeface="Arial" pitchFamily="34" charset="0"/>
+                <a:ea typeface="Arial" pitchFamily="34" charset="-122"/>
+                <a:cs typeface="Arial" pitchFamily="34" charset="-120"/>
+              </a:rPr>
+              <a:t>Document Processing  </a:t>
+            </a:r>
+            <a:r>
+              <a:rPr lang="en-US" sz="900" dirty="0">
+                <a:solidFill>
+                  <a:srgbClr val="4A4A4A"/>
+                </a:solidFill>
+                <a:latin typeface="Arial" pitchFamily="34" charset="0"/>
+                <a:ea typeface="Arial" pitchFamily="34" charset="-122"/>
+                <a:cs typeface="Arial" pitchFamily="34" charset="-120"/>
+              </a:rPr>
+              <a:t>Document loading, text extraction, chunking, retrieval, structured extraction</a:t>
+            </a:r>
+            <a:endParaRPr lang="en-US" sz="900" dirty="0"/>
+          </a:p>
+        </p:txBody>
+      </p:sp>
+      <p:sp>
+        <p:nvSpPr>
+          <p:cNvPr id="21" name="Shape 19"/>
+          <p:cNvSpPr/>
+          <p:nvPr/>
+        </p:nvSpPr>
+        <p:spPr>
+          <a:xfrm>
+            <a:off x="457200" y="3035808"/>
+            <a:ext cx="3840480" cy="475488"/>
+          </a:xfrm>
+          <a:prstGeom prst="rect">
+            <a:avLst/>
+          </a:prstGeom>
+          <a:solidFill>
+            <a:srgbClr val="FFFFFF"/>
+          </a:solidFill>
+          <a:ln w="12700">
+            <a:solidFill>
+              <a:srgbClr val="E2E8F0"/>
+            </a:solidFill>
+            <a:prstDash val="solid"/>
+          </a:ln>
+          <a:effectLst>
+            <a:outerShdw blurRad="76200" dist="25400" dir="8100000" algn="bl" rotWithShape="0">
+              <a:srgbClr val="000000">
+                <a:alpha val="6000"/>
+              </a:srgbClr>
+            </a:outerShdw>
+          </a:effectLst>
+        </p:spPr>
+        <p:txBody>
+          <a:bodyPr/>
+          <a:lstStyle/>
+          <a:p>
+            <a:endParaRPr lang="de-DE"/>
+          </a:p>
+        </p:txBody>
+      </p:sp>
+      <p:sp>
+        <p:nvSpPr>
+          <p:cNvPr id="22" name="Shape 20"/>
+          <p:cNvSpPr/>
+          <p:nvPr/>
+        </p:nvSpPr>
+        <p:spPr>
+          <a:xfrm>
+            <a:off x="457200" y="3035808"/>
+            <a:ext cx="45720" cy="475488"/>
+          </a:xfrm>
+          <a:prstGeom prst="rect">
+            <a:avLst/>
+          </a:prstGeom>
+          <a:solidFill>
+            <a:srgbClr val="0891B2"/>
+          </a:solidFill>
+          <a:ln w="12700">
+            <a:solidFill>
+              <a:srgbClr val="0891B2"/>
+            </a:solidFill>
+            <a:prstDash val="solid"/>
+          </a:ln>
+        </p:spPr>
+        <p:txBody>
+          <a:bodyPr/>
+          <a:lstStyle/>
+          <a:p>
+            <a:endParaRPr lang="de-DE"/>
+          </a:p>
+        </p:txBody>
+      </p:sp>
+      <p:sp>
+        <p:nvSpPr>
+          <p:cNvPr id="23" name="Shape 21"/>
+          <p:cNvSpPr/>
+          <p:nvPr/>
+        </p:nvSpPr>
+        <p:spPr>
+          <a:xfrm>
+            <a:off x="457200" y="3035808"/>
+            <a:ext cx="822960" cy="475488"/>
+          </a:xfrm>
+          <a:prstGeom prst="rect">
+            <a:avLst/>
+          </a:prstGeom>
+          <a:solidFill>
+            <a:srgbClr val="E8F0FD"/>
+          </a:solidFill>
+          <a:ln w="12700">
+            <a:solidFill>
+              <a:srgbClr val="E2E8F0"/>
+            </a:solidFill>
+            <a:prstDash val="solid"/>
+          </a:ln>
+        </p:spPr>
+        <p:txBody>
+          <a:bodyPr/>
+          <a:lstStyle/>
+          <a:p>
+            <a:endParaRPr lang="de-DE"/>
+          </a:p>
+        </p:txBody>
+      </p:sp>
+      <p:sp>
+        <p:nvSpPr>
+          <p:cNvPr id="24" name="Text 22"/>
+          <p:cNvSpPr/>
+          <p:nvPr/>
+        </p:nvSpPr>
+        <p:spPr>
+          <a:xfrm>
+            <a:off x="475488" y="3035808"/>
+            <a:ext cx="804672" cy="475488"/>
+          </a:xfrm>
+          <a:prstGeom prst="rect">
+            <a:avLst/>
+          </a:prstGeom>
+          <a:noFill/>
+          <a:ln/>
+        </p:spPr>
+        <p:txBody>
+          <a:bodyPr wrap="square" lIns="0" tIns="0" rIns="0" bIns="0" rtlCol="0" anchor="ctr"/>
+          <a:lstStyle/>
+          <a:p>
+            <a:pPr marL="0" indent="0" algn="ctr">
+              <a:buNone/>
+            </a:pPr>
+            <a:r>
+              <a:rPr lang="en-US" sz="950" b="1" dirty="0">
+                <a:solidFill>
+                  <a:srgbClr val="0891B2"/>
+                </a:solidFill>
+                <a:latin typeface="Arial" pitchFamily="34" charset="0"/>
+                <a:ea typeface="Arial" pitchFamily="34" charset="-122"/>
+                <a:cs typeface="Arial" pitchFamily="34" charset="-120"/>
+              </a:rPr>
+              <a:t>LangGraph</a:t>
+            </a:r>
+            <a:endParaRPr lang="en-US" sz="950" dirty="0"/>
+          </a:p>
+        </p:txBody>
+      </p:sp>
+      <p:sp>
+        <p:nvSpPr>
+          <p:cNvPr id="25" name="Text 23"/>
+          <p:cNvSpPr/>
+          <p:nvPr/>
+        </p:nvSpPr>
+        <p:spPr>
+          <a:xfrm>
+            <a:off x="1325880" y="3072384"/>
+            <a:ext cx="2880360" cy="402336"/>
+          </a:xfrm>
+          <a:prstGeom prst="rect">
+            <a:avLst/>
+          </a:prstGeom>
+          <a:noFill/>
+          <a:ln/>
+        </p:spPr>
+        <p:txBody>
+          <a:bodyPr wrap="square" lIns="0" tIns="0" rIns="0" bIns="0" rtlCol="0" anchor="ctr"/>
+          <a:lstStyle/>
+          <a:p>
+            <a:pPr marL="0" indent="0" algn="l">
+              <a:buNone/>
+            </a:pPr>
+            <a:r>
+              <a:rPr lang="en-US" sz="900" b="1" dirty="0">
+                <a:solidFill>
+                  <a:srgbClr val="111111"/>
+                </a:solidFill>
+                <a:latin typeface="Arial" pitchFamily="34" charset="0"/>
+                <a:ea typeface="Arial" pitchFamily="34" charset="-122"/>
+                <a:cs typeface="Arial" pitchFamily="34" charset="-120"/>
+              </a:rPr>
+              <a:t>Agent Orchestration  </a:t>
+            </a:r>
+            <a:r>
+              <a:rPr lang="en-US" sz="900" dirty="0">
+                <a:solidFill>
+                  <a:srgbClr val="4A4A4A"/>
+                </a:solidFill>
+                <a:latin typeface="Arial" pitchFamily="34" charset="0"/>
+                <a:ea typeface="Arial" pitchFamily="34" charset="-122"/>
+                <a:cs typeface="Arial" pitchFamily="34" charset="-120"/>
+              </a:rPr>
+              <a:t>Coordinates 5 AI agents, manages state, routes outputs to human review</a:t>
+            </a:r>
+            <a:endParaRPr lang="en-US" sz="900" dirty="0"/>
+          </a:p>
+        </p:txBody>
+      </p:sp>
+      <p:sp>
+        <p:nvSpPr>
+          <p:cNvPr id="26" name="Shape 24"/>
+          <p:cNvSpPr/>
+          <p:nvPr/>
+        </p:nvSpPr>
+        <p:spPr>
+          <a:xfrm>
+            <a:off x="457200" y="3584448"/>
+            <a:ext cx="3840480" cy="475488"/>
+          </a:xfrm>
+          <a:prstGeom prst="rect">
+            <a:avLst/>
+          </a:prstGeom>
+          <a:solidFill>
+            <a:srgbClr val="FFFFFF"/>
+          </a:solidFill>
+          <a:ln w="12700">
+            <a:solidFill>
+              <a:srgbClr val="E2E8F0"/>
+            </a:solidFill>
+            <a:prstDash val="solid"/>
+          </a:ln>
+          <a:effectLst>
+            <a:outerShdw blurRad="76200" dist="25400" dir="8100000" algn="bl" rotWithShape="0">
+              <a:srgbClr val="000000">
+                <a:alpha val="6000"/>
+              </a:srgbClr>
+            </a:outerShdw>
+          </a:effectLst>
+        </p:spPr>
+        <p:txBody>
+          <a:bodyPr/>
+          <a:lstStyle/>
+          <a:p>
+            <a:endParaRPr lang="de-DE"/>
+          </a:p>
+        </p:txBody>
+      </p:sp>
+      <p:sp>
+        <p:nvSpPr>
+          <p:cNvPr id="27" name="Shape 25"/>
+          <p:cNvSpPr/>
+          <p:nvPr/>
+        </p:nvSpPr>
+        <p:spPr>
+          <a:xfrm>
+            <a:off x="457200" y="3584448"/>
+            <a:ext cx="45720" cy="475488"/>
+          </a:xfrm>
+          <a:prstGeom prst="rect">
+            <a:avLst/>
+          </a:prstGeom>
+          <a:solidFill>
+            <a:srgbClr val="16A34A"/>
+          </a:solidFill>
+          <a:ln w="12700">
+            <a:solidFill>
+              <a:srgbClr val="16A34A"/>
+            </a:solidFill>
+            <a:prstDash val="solid"/>
+          </a:ln>
+        </p:spPr>
+        <p:txBody>
+          <a:bodyPr/>
+          <a:lstStyle/>
+          <a:p>
+            <a:endParaRPr lang="de-DE"/>
+          </a:p>
+        </p:txBody>
+      </p:sp>
+      <p:sp>
+        <p:nvSpPr>
+          <p:cNvPr id="28" name="Shape 26"/>
+          <p:cNvSpPr/>
+          <p:nvPr/>
+        </p:nvSpPr>
+        <p:spPr>
+          <a:xfrm>
+            <a:off x="457200" y="3584448"/>
+            <a:ext cx="822960" cy="475488"/>
+          </a:xfrm>
+          <a:prstGeom prst="rect">
+            <a:avLst/>
+          </a:prstGeom>
+          <a:solidFill>
+            <a:srgbClr val="E8F0FD"/>
+          </a:solidFill>
+          <a:ln w="12700">
+            <a:solidFill>
+              <a:srgbClr val="E2E8F0"/>
+            </a:solidFill>
+            <a:prstDash val="solid"/>
+          </a:ln>
+        </p:spPr>
+        <p:txBody>
+          <a:bodyPr/>
+          <a:lstStyle/>
+          <a:p>
+            <a:endParaRPr lang="de-DE"/>
+          </a:p>
+        </p:txBody>
+      </p:sp>
+      <p:sp>
+        <p:nvSpPr>
+          <p:cNvPr id="29" name="Text 27"/>
+          <p:cNvSpPr/>
+          <p:nvPr/>
+        </p:nvSpPr>
+        <p:spPr>
+          <a:xfrm>
+            <a:off x="475488" y="3584448"/>
+            <a:ext cx="804672" cy="475488"/>
+          </a:xfrm>
+          <a:prstGeom prst="rect">
+            <a:avLst/>
+          </a:prstGeom>
+          <a:noFill/>
+          <a:ln/>
+        </p:spPr>
+        <p:txBody>
+          <a:bodyPr wrap="square" lIns="0" tIns="0" rIns="0" bIns="0" rtlCol="0" anchor="ctr"/>
+          <a:lstStyle/>
+          <a:p>
+            <a:pPr marL="0" indent="0" algn="ctr">
+              <a:buNone/>
+            </a:pPr>
+            <a:r>
+              <a:rPr lang="en-US" sz="950" b="1" dirty="0">
+                <a:solidFill>
+                  <a:srgbClr val="16A34A"/>
+                </a:solidFill>
+                <a:latin typeface="Arial" pitchFamily="34" charset="0"/>
+                <a:ea typeface="Arial" pitchFamily="34" charset="-122"/>
+                <a:cs typeface="Arial" pitchFamily="34" charset="-120"/>
+              </a:rPr>
+              <a:t>LangSmith</a:t>
+            </a:r>
+            <a:endParaRPr lang="en-US" sz="950" dirty="0"/>
+          </a:p>
+        </p:txBody>
+      </p:sp>
+      <p:sp>
+        <p:nvSpPr>
+          <p:cNvPr id="30" name="Text 28"/>
+          <p:cNvSpPr/>
+          <p:nvPr/>
+        </p:nvSpPr>
+        <p:spPr>
+          <a:xfrm>
+            <a:off x="1325880" y="3621024"/>
+            <a:ext cx="2880360" cy="402336"/>
+          </a:xfrm>
+          <a:prstGeom prst="rect">
+            <a:avLst/>
+          </a:prstGeom>
+          <a:noFill/>
+          <a:ln/>
+        </p:spPr>
+        <p:txBody>
+          <a:bodyPr wrap="square" lIns="0" tIns="0" rIns="0" bIns="0" rtlCol="0" anchor="ctr"/>
+          <a:lstStyle/>
+          <a:p>
+            <a:pPr marL="0" indent="0" algn="l">
+              <a:buNone/>
+            </a:pPr>
+            <a:r>
+              <a:rPr lang="en-US" sz="900" b="1" dirty="0">
+                <a:solidFill>
+                  <a:srgbClr val="111111"/>
+                </a:solidFill>
+                <a:latin typeface="Arial" pitchFamily="34" charset="0"/>
+                <a:ea typeface="Arial" pitchFamily="34" charset="-122"/>
+                <a:cs typeface="Arial" pitchFamily="34" charset="-120"/>
+              </a:rPr>
+              <a:t>Observability  </a:t>
+            </a:r>
+            <a:r>
+              <a:rPr lang="en-US" sz="900" dirty="0">
+                <a:solidFill>
+                  <a:srgbClr val="4A4A4A"/>
+                </a:solidFill>
+                <a:latin typeface="Arial" pitchFamily="34" charset="0"/>
+                <a:ea typeface="Arial" pitchFamily="34" charset="-122"/>
+                <a:cs typeface="Arial" pitchFamily="34" charset="-120"/>
+              </a:rPr>
+              <a:t>Traces every LLM call, audit trail, error analysis, model behaviour, prompt versioning</a:t>
+            </a:r>
+            <a:endParaRPr lang="en-US" sz="900" dirty="0"/>
+          </a:p>
+        </p:txBody>
+      </p:sp>
+      <p:sp>
+        <p:nvSpPr>
+          <p:cNvPr id="31" name="Shape 29"/>
+          <p:cNvSpPr/>
+          <p:nvPr/>
+        </p:nvSpPr>
+        <p:spPr>
+          <a:xfrm>
+            <a:off x="457200" y="4133088"/>
+            <a:ext cx="3840480" cy="475488"/>
+          </a:xfrm>
+          <a:prstGeom prst="rect">
+            <a:avLst/>
+          </a:prstGeom>
+          <a:solidFill>
+            <a:srgbClr val="FFFFFF"/>
+          </a:solidFill>
+          <a:ln w="12700">
+            <a:solidFill>
+              <a:srgbClr val="E2E8F0"/>
+            </a:solidFill>
+            <a:prstDash val="solid"/>
+          </a:ln>
+          <a:effectLst>
+            <a:outerShdw blurRad="76200" dist="25400" dir="8100000" algn="bl" rotWithShape="0">
+              <a:srgbClr val="000000">
+                <a:alpha val="6000"/>
+              </a:srgbClr>
+            </a:outerShdw>
+          </a:effectLst>
+        </p:spPr>
+        <p:txBody>
+          <a:bodyPr/>
+          <a:lstStyle/>
+          <a:p>
+            <a:endParaRPr lang="de-DE"/>
+          </a:p>
+        </p:txBody>
+      </p:sp>
+      <p:sp>
+        <p:nvSpPr>
+          <p:cNvPr id="32" name="Shape 30"/>
+          <p:cNvSpPr/>
+          <p:nvPr/>
+        </p:nvSpPr>
+        <p:spPr>
+          <a:xfrm>
+            <a:off x="457200" y="4133088"/>
+            <a:ext cx="45720" cy="475488"/>
+          </a:xfrm>
+          <a:prstGeom prst="rect">
+            <a:avLst/>
+          </a:prstGeom>
+          <a:solidFill>
+            <a:srgbClr val="D97706"/>
+          </a:solidFill>
+          <a:ln w="12700">
+            <a:solidFill>
+              <a:srgbClr val="D97706"/>
+            </a:solidFill>
+            <a:prstDash val="solid"/>
+          </a:ln>
+        </p:spPr>
+        <p:txBody>
+          <a:bodyPr/>
+          <a:lstStyle/>
+          <a:p>
+            <a:endParaRPr lang="de-DE"/>
+          </a:p>
+        </p:txBody>
+      </p:sp>
+      <p:sp>
+        <p:nvSpPr>
+          <p:cNvPr id="33" name="Shape 31"/>
+          <p:cNvSpPr/>
+          <p:nvPr/>
+        </p:nvSpPr>
+        <p:spPr>
+          <a:xfrm>
+            <a:off x="457200" y="4133088"/>
+            <a:ext cx="822960" cy="475488"/>
+          </a:xfrm>
+          <a:prstGeom prst="rect">
+            <a:avLst/>
+          </a:prstGeom>
+          <a:solidFill>
+            <a:srgbClr val="E8F0FD"/>
+          </a:solidFill>
+          <a:ln w="12700">
+            <a:solidFill>
+              <a:srgbClr val="E2E8F0"/>
+            </a:solidFill>
+            <a:prstDash val="solid"/>
+          </a:ln>
+        </p:spPr>
+        <p:txBody>
+          <a:bodyPr/>
+          <a:lstStyle/>
+          <a:p>
+            <a:endParaRPr lang="de-DE"/>
+          </a:p>
+        </p:txBody>
+      </p:sp>
+      <p:sp>
+        <p:nvSpPr>
+          <p:cNvPr id="34" name="Text 32"/>
+          <p:cNvSpPr/>
+          <p:nvPr/>
+        </p:nvSpPr>
+        <p:spPr>
+          <a:xfrm>
+            <a:off x="475488" y="4133088"/>
+            <a:ext cx="804672" cy="475488"/>
+          </a:xfrm>
+          <a:prstGeom prst="rect">
+            <a:avLst/>
+          </a:prstGeom>
+          <a:noFill/>
+          <a:ln/>
+        </p:spPr>
+        <p:txBody>
+          <a:bodyPr wrap="square" lIns="0" tIns="0" rIns="0" bIns="0" rtlCol="0" anchor="ctr"/>
+          <a:lstStyle/>
+          <a:p>
+            <a:pPr marL="0" indent="0" algn="ctr">
+              <a:buNone/>
+            </a:pPr>
+            <a:r>
+              <a:rPr lang="en-US" sz="950" b="1" dirty="0">
+                <a:solidFill>
+                  <a:srgbClr val="D97706"/>
+                </a:solidFill>
+                <a:latin typeface="Arial" pitchFamily="34" charset="0"/>
+                <a:ea typeface="Arial" pitchFamily="34" charset="-122"/>
+                <a:cs typeface="Arial" pitchFamily="34" charset="-120"/>
+              </a:rPr>
+              <a:t>EU Infra</a:t>
+            </a:r>
+            <a:endParaRPr lang="en-US" sz="950" dirty="0"/>
+          </a:p>
+        </p:txBody>
+      </p:sp>
+      <p:sp>
+        <p:nvSpPr>
+          <p:cNvPr id="35" name="Text 33"/>
+          <p:cNvSpPr/>
+          <p:nvPr/>
+        </p:nvSpPr>
+        <p:spPr>
+          <a:xfrm>
+            <a:off x="1325880" y="4169664"/>
+            <a:ext cx="2880360" cy="402336"/>
+          </a:xfrm>
+          <a:prstGeom prst="rect">
+            <a:avLst/>
+          </a:prstGeom>
+          <a:noFill/>
+          <a:ln/>
+        </p:spPr>
+        <p:txBody>
+          <a:bodyPr wrap="square" lIns="0" tIns="0" rIns="0" bIns="0" rtlCol="0" anchor="ctr"/>
+          <a:lstStyle/>
+          <a:p>
+            <a:pPr marL="0" indent="0" algn="l">
+              <a:buNone/>
+            </a:pPr>
+            <a:r>
+              <a:rPr lang="en-US" sz="900" b="1" dirty="0">
+                <a:solidFill>
+                  <a:srgbClr val="111111"/>
+                </a:solidFill>
+                <a:latin typeface="Arial" pitchFamily="34" charset="0"/>
+                <a:ea typeface="Arial" pitchFamily="34" charset="-122"/>
+                <a:cs typeface="Arial" pitchFamily="34" charset="-120"/>
+              </a:rPr>
+              <a:t>Hosting  </a:t>
+            </a:r>
+            <a:r>
+              <a:rPr lang="en-US" sz="900" dirty="0">
+                <a:solidFill>
+                  <a:srgbClr val="4A4A4A"/>
+                </a:solidFill>
+                <a:latin typeface="Arial" pitchFamily="34" charset="0"/>
+                <a:ea typeface="Arial" pitchFamily="34" charset="-122"/>
+                <a:cs typeface="Arial" pitchFamily="34" charset="-120"/>
+              </a:rPr>
+              <a:t>Role-based access, encrypted storage, minimal data retention, human approval gates</a:t>
+            </a:r>
+            <a:endParaRPr lang="en-US" sz="900" dirty="0"/>
+          </a:p>
+        </p:txBody>
+      </p:sp>
+      <p:sp>
+        <p:nvSpPr>
+          <p:cNvPr id="36" name="Text 34"/>
+          <p:cNvSpPr/>
+          <p:nvPr/>
+        </p:nvSpPr>
+        <p:spPr>
+          <a:xfrm>
+            <a:off x="4663440" y="1609344"/>
+            <a:ext cx="4023360" cy="274320"/>
+          </a:xfrm>
+          <a:prstGeom prst="rect">
+            <a:avLst/>
+          </a:prstGeom>
+          <a:noFill/>
+          <a:ln/>
+        </p:spPr>
+        <p:txBody>
+          <a:bodyPr wrap="square" lIns="0" tIns="0" rIns="0" bIns="0" rtlCol="0" anchor="ctr"/>
+          <a:lstStyle/>
+          <a:p>
+            <a:pPr marL="0" indent="0" algn="l">
+              <a:buNone/>
+            </a:pPr>
+            <a:r>
+              <a:rPr lang="en-US" sz="1100" b="1" dirty="0">
+                <a:solidFill>
+                  <a:srgbClr val="111111"/>
+                </a:solidFill>
+                <a:latin typeface="Arial" pitchFamily="34" charset="0"/>
+                <a:ea typeface="Arial" pitchFamily="34" charset="-122"/>
+                <a:cs typeface="Arial" pitchFamily="34" charset="-120"/>
+              </a:rPr>
+              <a:t>Human Review Layer — Non-Negotiable</a:t>
+            </a:r>
+            <a:endParaRPr lang="en-US" sz="1100" dirty="0"/>
+          </a:p>
+        </p:txBody>
+      </p:sp>
+      <p:sp>
+        <p:nvSpPr>
+          <p:cNvPr id="37" name="Shape 35"/>
+          <p:cNvSpPr/>
+          <p:nvPr/>
+        </p:nvSpPr>
+        <p:spPr>
+          <a:xfrm>
+            <a:off x="4663440" y="1938528"/>
+            <a:ext cx="4023360" cy="310896"/>
+          </a:xfrm>
+          <a:prstGeom prst="rect">
+            <a:avLst/>
+          </a:prstGeom>
+          <a:solidFill>
+            <a:srgbClr val="FEF2F2"/>
+          </a:solidFill>
+          <a:ln w="12700">
+            <a:solidFill>
+              <a:srgbClr val="FECACA"/>
+            </a:solidFill>
+            <a:prstDash val="solid"/>
+          </a:ln>
+        </p:spPr>
+        <p:txBody>
+          <a:bodyPr/>
+          <a:lstStyle/>
+          <a:p>
+            <a:endParaRPr lang="de-DE"/>
+          </a:p>
+        </p:txBody>
+      </p:sp>
+      <p:sp>
+        <p:nvSpPr>
+          <p:cNvPr id="38" name="Text 36"/>
+          <p:cNvSpPr/>
+          <p:nvPr/>
+        </p:nvSpPr>
+        <p:spPr>
+          <a:xfrm>
+            <a:off x="4709160" y="1938528"/>
+            <a:ext cx="3931920" cy="310896"/>
+          </a:xfrm>
+          <a:prstGeom prst="rect">
+            <a:avLst/>
+          </a:prstGeom>
+          <a:noFill/>
+          <a:ln/>
+        </p:spPr>
+        <p:txBody>
+          <a:bodyPr wrap="square" lIns="0" tIns="0" rIns="0" bIns="0" rtlCol="0" anchor="ctr"/>
+          <a:lstStyle/>
+          <a:p>
+            <a:pPr marL="0" indent="0" algn="l">
+              <a:buNone/>
+            </a:pPr>
+            <a:r>
+              <a:rPr lang="en-US" sz="950" b="1" dirty="0">
+                <a:solidFill>
+                  <a:srgbClr val="991B1B"/>
+                </a:solidFill>
+                <a:latin typeface="Arial" pitchFamily="34" charset="0"/>
+                <a:ea typeface="Arial" pitchFamily="34" charset="-122"/>
+                <a:cs typeface="Arial" pitchFamily="34" charset="-120"/>
+              </a:rPr>
+              <a:t>⚠  All agent outputs → human approval queue → only then action</a:t>
+            </a:r>
+            <a:endParaRPr lang="en-US" sz="950" dirty="0"/>
+          </a:p>
+        </p:txBody>
+      </p:sp>
+      <p:sp>
+        <p:nvSpPr>
+          <p:cNvPr id="39" name="Shape 37"/>
+          <p:cNvSpPr/>
+          <p:nvPr/>
+        </p:nvSpPr>
+        <p:spPr>
+          <a:xfrm>
+            <a:off x="4663440" y="2304288"/>
+            <a:ext cx="4023360" cy="420624"/>
+          </a:xfrm>
+          <a:prstGeom prst="rect">
+            <a:avLst/>
+          </a:prstGeom>
+          <a:solidFill>
+            <a:srgbClr val="FFFFFF"/>
+          </a:solidFill>
+          <a:ln w="12700">
+            <a:solidFill>
+              <a:srgbClr val="E2E8F0"/>
+            </a:solidFill>
+            <a:prstDash val="solid"/>
+          </a:ln>
+          <a:effectLst>
+            <a:outerShdw blurRad="76200" dist="25400" dir="8100000" algn="bl" rotWithShape="0">
+              <a:srgbClr val="000000">
+                <a:alpha val="6000"/>
+              </a:srgbClr>
+            </a:outerShdw>
+          </a:effectLst>
+        </p:spPr>
+        <p:txBody>
+          <a:bodyPr/>
+          <a:lstStyle/>
+          <a:p>
+            <a:endParaRPr lang="de-DE"/>
+          </a:p>
+        </p:txBody>
+      </p:sp>
+      <p:sp>
+        <p:nvSpPr>
+          <p:cNvPr id="40" name="Shape 38"/>
+          <p:cNvSpPr/>
+          <p:nvPr/>
+        </p:nvSpPr>
+        <p:spPr>
+          <a:xfrm>
+            <a:off x="4736592" y="2432304"/>
+            <a:ext cx="164592" cy="164592"/>
+          </a:xfrm>
+          <a:prstGeom prst="ellipse">
+            <a:avLst/>
+          </a:prstGeom>
+          <a:solidFill>
+            <a:srgbClr val="005AEE"/>
+          </a:solidFill>
+          <a:ln w="12700">
+            <a:solidFill>
+              <a:srgbClr val="005AEE"/>
+            </a:solidFill>
+            <a:prstDash val="solid"/>
+          </a:ln>
+        </p:spPr>
+        <p:txBody>
+          <a:bodyPr/>
+          <a:lstStyle/>
+          <a:p>
+            <a:endParaRPr lang="de-DE"/>
+          </a:p>
+        </p:txBody>
+      </p:sp>
+      <p:sp>
+        <p:nvSpPr>
+          <p:cNvPr id="41" name="Text 39"/>
+          <p:cNvSpPr/>
+          <p:nvPr/>
+        </p:nvSpPr>
+        <p:spPr>
+          <a:xfrm>
+            <a:off x="4983480" y="2304288"/>
+            <a:ext cx="3611880" cy="420624"/>
+          </a:xfrm>
+          <a:prstGeom prst="rect">
+            <a:avLst/>
+          </a:prstGeom>
+          <a:noFill/>
+          <a:ln/>
+        </p:spPr>
+        <p:txBody>
+          <a:bodyPr wrap="square" lIns="0" tIns="0" rIns="0" bIns="0" rtlCol="0" anchor="ctr"/>
+          <a:lstStyle/>
+          <a:p>
+            <a:pPr marL="0" indent="0" algn="l">
+              <a:buNone/>
+            </a:pPr>
+            <a:r>
+              <a:rPr lang="en-US" sz="950" b="1" dirty="0">
+                <a:solidFill>
+                  <a:srgbClr val="005AEE"/>
+                </a:solidFill>
+                <a:latin typeface="Arial" pitchFamily="34" charset="0"/>
+                <a:ea typeface="Arial" pitchFamily="34" charset="-122"/>
+                <a:cs typeface="Arial" pitchFamily="34" charset="-120"/>
+              </a:rPr>
+              <a:t>Finance Team:  </a:t>
+            </a:r>
+            <a:r>
+              <a:rPr lang="en-US" sz="950" dirty="0">
+                <a:solidFill>
+                  <a:srgbClr val="4A4A4A"/>
+                </a:solidFill>
+                <a:latin typeface="Arial" pitchFamily="34" charset="0"/>
+                <a:ea typeface="Arial" pitchFamily="34" charset="-122"/>
+                <a:cs typeface="Arial" pitchFamily="34" charset="-120"/>
+              </a:rPr>
+              <a:t>Approve / reject invoice payments</a:t>
+            </a:r>
+            <a:endParaRPr lang="en-US" sz="950" dirty="0"/>
+          </a:p>
+        </p:txBody>
+      </p:sp>
+      <p:sp>
+        <p:nvSpPr>
+          <p:cNvPr id="42" name="Shape 40"/>
+          <p:cNvSpPr/>
+          <p:nvPr/>
+        </p:nvSpPr>
+        <p:spPr>
+          <a:xfrm>
+            <a:off x="4663440" y="2779776"/>
+            <a:ext cx="4023360" cy="420624"/>
+          </a:xfrm>
+          <a:prstGeom prst="rect">
+            <a:avLst/>
+          </a:prstGeom>
+          <a:solidFill>
+            <a:srgbClr val="F5F6F8"/>
+          </a:solidFill>
+          <a:ln w="12700">
+            <a:solidFill>
+              <a:srgbClr val="E2E8F0"/>
+            </a:solidFill>
+            <a:prstDash val="solid"/>
+          </a:ln>
+          <a:effectLst>
+            <a:outerShdw blurRad="76200" dist="25400" dir="8100000" algn="bl" rotWithShape="0">
+              <a:srgbClr val="000000">
+                <a:alpha val="6000"/>
+              </a:srgbClr>
+            </a:outerShdw>
+          </a:effectLst>
+        </p:spPr>
+        <p:txBody>
+          <a:bodyPr/>
+          <a:lstStyle/>
+          <a:p>
+            <a:endParaRPr lang="de-DE"/>
+          </a:p>
+        </p:txBody>
+      </p:sp>
+      <p:sp>
+        <p:nvSpPr>
+          <p:cNvPr id="43" name="Shape 41"/>
+          <p:cNvSpPr/>
+          <p:nvPr/>
+        </p:nvSpPr>
+        <p:spPr>
+          <a:xfrm>
+            <a:off x="4736592" y="2907792"/>
+            <a:ext cx="164592" cy="164592"/>
+          </a:xfrm>
+          <a:prstGeom prst="ellipse">
+            <a:avLst/>
+          </a:prstGeom>
+          <a:solidFill>
+            <a:srgbClr val="005AEE"/>
+          </a:solidFill>
+          <a:ln w="12700">
+            <a:solidFill>
+              <a:srgbClr val="005AEE"/>
+            </a:solidFill>
+            <a:prstDash val="solid"/>
+          </a:ln>
+        </p:spPr>
+        <p:txBody>
+          <a:bodyPr/>
+          <a:lstStyle/>
+          <a:p>
+            <a:endParaRPr lang="de-DE"/>
+          </a:p>
+        </p:txBody>
+      </p:sp>
+      <p:sp>
+        <p:nvSpPr>
+          <p:cNvPr id="44" name="Text 42"/>
+          <p:cNvSpPr/>
+          <p:nvPr/>
+        </p:nvSpPr>
+        <p:spPr>
+          <a:xfrm>
+            <a:off x="4983480" y="2779776"/>
+            <a:ext cx="3611880" cy="420624"/>
+          </a:xfrm>
+          <a:prstGeom prst="rect">
+            <a:avLst/>
+          </a:prstGeom>
+          <a:noFill/>
+          <a:ln/>
+        </p:spPr>
+        <p:txBody>
+          <a:bodyPr wrap="square" lIns="0" tIns="0" rIns="0" bIns="0" rtlCol="0" anchor="ctr"/>
+          <a:lstStyle/>
+          <a:p>
+            <a:pPr marL="0" indent="0" algn="l">
+              <a:buNone/>
+            </a:pPr>
+            <a:r>
+              <a:rPr lang="en-US" sz="950" b="1" dirty="0">
+                <a:solidFill>
+                  <a:srgbClr val="005AEE"/>
+                </a:solidFill>
+                <a:latin typeface="Arial" pitchFamily="34" charset="0"/>
+                <a:ea typeface="Arial" pitchFamily="34" charset="-122"/>
+                <a:cs typeface="Arial" pitchFamily="34" charset="-120"/>
+              </a:rPr>
+              <a:t>Legal / Compliance:  </a:t>
+            </a:r>
+            <a:r>
+              <a:rPr lang="en-US" sz="950" dirty="0">
+                <a:solidFill>
+                  <a:srgbClr val="4A4A4A"/>
+                </a:solidFill>
+                <a:latin typeface="Arial" pitchFamily="34" charset="0"/>
+                <a:ea typeface="Arial" pitchFamily="34" charset="-122"/>
+                <a:cs typeface="Arial" pitchFamily="34" charset="-120"/>
+              </a:rPr>
+              <a:t>Escalate compliance risks, review misclassification flags</a:t>
+            </a:r>
+            <a:endParaRPr lang="en-US" sz="950" dirty="0"/>
+          </a:p>
+        </p:txBody>
+      </p:sp>
+      <p:sp>
+        <p:nvSpPr>
+          <p:cNvPr id="45" name="Shape 43"/>
+          <p:cNvSpPr/>
+          <p:nvPr/>
+        </p:nvSpPr>
+        <p:spPr>
+          <a:xfrm>
+            <a:off x="4663440" y="3255264"/>
+            <a:ext cx="4023360" cy="420624"/>
+          </a:xfrm>
+          <a:prstGeom prst="rect">
+            <a:avLst/>
+          </a:prstGeom>
+          <a:solidFill>
+            <a:srgbClr val="FFFFFF"/>
+          </a:solidFill>
+          <a:ln w="12700">
+            <a:solidFill>
+              <a:srgbClr val="E2E8F0"/>
+            </a:solidFill>
+            <a:prstDash val="solid"/>
+          </a:ln>
+          <a:effectLst>
+            <a:outerShdw blurRad="76200" dist="25400" dir="8100000" algn="bl" rotWithShape="0">
+              <a:srgbClr val="000000">
+                <a:alpha val="6000"/>
+              </a:srgbClr>
+            </a:outerShdw>
+          </a:effectLst>
+        </p:spPr>
+        <p:txBody>
+          <a:bodyPr/>
+          <a:lstStyle/>
+          <a:p>
+            <a:endParaRPr lang="de-DE"/>
+          </a:p>
+        </p:txBody>
+      </p:sp>
+      <p:sp>
+        <p:nvSpPr>
+          <p:cNvPr id="46" name="Shape 44"/>
+          <p:cNvSpPr/>
+          <p:nvPr/>
+        </p:nvSpPr>
+        <p:spPr>
+          <a:xfrm>
+            <a:off x="4736592" y="3383280"/>
+            <a:ext cx="164592" cy="164592"/>
+          </a:xfrm>
+          <a:prstGeom prst="ellipse">
+            <a:avLst/>
+          </a:prstGeom>
+          <a:solidFill>
+            <a:srgbClr val="005AEE"/>
+          </a:solidFill>
+          <a:ln w="12700">
+            <a:solidFill>
+              <a:srgbClr val="005AEE"/>
+            </a:solidFill>
+            <a:prstDash val="solid"/>
+          </a:ln>
+        </p:spPr>
+        <p:txBody>
+          <a:bodyPr/>
+          <a:lstStyle/>
+          <a:p>
+            <a:endParaRPr lang="de-DE"/>
+          </a:p>
+        </p:txBody>
+      </p:sp>
+      <p:sp>
+        <p:nvSpPr>
+          <p:cNvPr id="47" name="Text 45"/>
+          <p:cNvSpPr/>
+          <p:nvPr/>
+        </p:nvSpPr>
+        <p:spPr>
+          <a:xfrm>
+            <a:off x="4983480" y="3255264"/>
+            <a:ext cx="3611880" cy="420624"/>
+          </a:xfrm>
+          <a:prstGeom prst="rect">
+            <a:avLst/>
+          </a:prstGeom>
+          <a:noFill/>
+          <a:ln/>
+        </p:spPr>
+        <p:txBody>
+          <a:bodyPr wrap="square" lIns="0" tIns="0" rIns="0" bIns="0" rtlCol="0" anchor="ctr"/>
+          <a:lstStyle/>
+          <a:p>
+            <a:pPr marL="0" indent="0" algn="l">
+              <a:buNone/>
+            </a:pPr>
+            <a:r>
+              <a:rPr lang="en-US" sz="950" b="1" dirty="0">
+                <a:solidFill>
+                  <a:srgbClr val="005AEE"/>
+                </a:solidFill>
+                <a:latin typeface="Arial" pitchFamily="34" charset="0"/>
+                <a:ea typeface="Arial" pitchFamily="34" charset="-122"/>
+                <a:cs typeface="Arial" pitchFamily="34" charset="-120"/>
+              </a:rPr>
+              <a:t>HR:  </a:t>
+            </a:r>
+            <a:r>
+              <a:rPr lang="en-US" sz="950" dirty="0">
+                <a:solidFill>
+                  <a:srgbClr val="4A4A4A"/>
+                </a:solidFill>
+                <a:latin typeface="Arial" pitchFamily="34" charset="0"/>
+                <a:ea typeface="Arial" pitchFamily="34" charset="-122"/>
+                <a:cs typeface="Arial" pitchFamily="34" charset="-120"/>
+              </a:rPr>
+              <a:t>Investigate duplicate work, update contractor register</a:t>
+            </a:r>
+            <a:endParaRPr lang="en-US" sz="950" dirty="0"/>
+          </a:p>
+        </p:txBody>
+      </p:sp>
+      <p:sp>
+        <p:nvSpPr>
+          <p:cNvPr id="48" name="Shape 46"/>
+          <p:cNvSpPr/>
+          <p:nvPr/>
+        </p:nvSpPr>
+        <p:spPr>
+          <a:xfrm>
+            <a:off x="4663440" y="3730752"/>
+            <a:ext cx="4023360" cy="420624"/>
+          </a:xfrm>
+          <a:prstGeom prst="rect">
+            <a:avLst/>
+          </a:prstGeom>
+          <a:solidFill>
+            <a:srgbClr val="F5F6F8"/>
+          </a:solidFill>
+          <a:ln w="12700">
+            <a:solidFill>
+              <a:srgbClr val="E2E8F0"/>
+            </a:solidFill>
+            <a:prstDash val="solid"/>
+          </a:ln>
+          <a:effectLst>
+            <a:outerShdw blurRad="76200" dist="25400" dir="8100000" algn="bl" rotWithShape="0">
+              <a:srgbClr val="000000">
+                <a:alpha val="6000"/>
+              </a:srgbClr>
+            </a:outerShdw>
+          </a:effectLst>
+        </p:spPr>
+        <p:txBody>
+          <a:bodyPr/>
+          <a:lstStyle/>
+          <a:p>
+            <a:endParaRPr lang="de-DE"/>
+          </a:p>
+        </p:txBody>
+      </p:sp>
+      <p:sp>
+        <p:nvSpPr>
+          <p:cNvPr id="49" name="Shape 47"/>
+          <p:cNvSpPr/>
+          <p:nvPr/>
+        </p:nvSpPr>
+        <p:spPr>
+          <a:xfrm>
+            <a:off x="4736592" y="3858768"/>
+            <a:ext cx="164592" cy="164592"/>
+          </a:xfrm>
+          <a:prstGeom prst="ellipse">
+            <a:avLst/>
+          </a:prstGeom>
+          <a:solidFill>
+            <a:srgbClr val="005AEE"/>
+          </a:solidFill>
+          <a:ln w="12700">
+            <a:solidFill>
+              <a:srgbClr val="005AEE"/>
+            </a:solidFill>
+            <a:prstDash val="solid"/>
+          </a:ln>
+        </p:spPr>
+        <p:txBody>
+          <a:bodyPr/>
+          <a:lstStyle/>
+          <a:p>
+            <a:endParaRPr lang="de-DE"/>
+          </a:p>
+        </p:txBody>
+      </p:sp>
+      <p:sp>
+        <p:nvSpPr>
+          <p:cNvPr id="50" name="Text 48"/>
+          <p:cNvSpPr/>
+          <p:nvPr/>
+        </p:nvSpPr>
+        <p:spPr>
+          <a:xfrm>
+            <a:off x="4983480" y="3730752"/>
+            <a:ext cx="3611880" cy="420624"/>
+          </a:xfrm>
+          <a:prstGeom prst="rect">
+            <a:avLst/>
+          </a:prstGeom>
+          <a:noFill/>
+          <a:ln/>
+        </p:spPr>
+        <p:txBody>
+          <a:bodyPr wrap="square" lIns="0" tIns="0" rIns="0" bIns="0" rtlCol="0" anchor="ctr"/>
+          <a:lstStyle/>
+          <a:p>
+            <a:pPr marL="0" indent="0" algn="l">
+              <a:buNone/>
+            </a:pPr>
+            <a:r>
+              <a:rPr lang="en-US" sz="950" b="1" dirty="0">
+                <a:solidFill>
+                  <a:srgbClr val="005AEE"/>
+                </a:solidFill>
+                <a:latin typeface="Arial" pitchFamily="34" charset="0"/>
+                <a:ea typeface="Arial" pitchFamily="34" charset="-122"/>
+                <a:cs typeface="Arial" pitchFamily="34" charset="-120"/>
+              </a:rPr>
+              <a:t>CEO / CTO (Eugen):  </a:t>
+            </a:r>
+            <a:r>
+              <a:rPr lang="en-US" sz="950" dirty="0">
+                <a:solidFill>
+                  <a:srgbClr val="4A4A4A"/>
+                </a:solidFill>
+                <a:latin typeface="Arial" pitchFamily="34" charset="0"/>
+                <a:ea typeface="Arial" pitchFamily="34" charset="-122"/>
+                <a:cs typeface="Arial" pitchFamily="34" charset="-120"/>
+              </a:rPr>
+              <a:t>Review cost dashboard, approve strategic decisions</a:t>
+            </a:r>
+            <a:endParaRPr lang="en-US" sz="950" dirty="0"/>
+          </a:p>
+        </p:txBody>
+      </p:sp>
+      <p:sp>
+        <p:nvSpPr>
+          <p:cNvPr id="51" name="Shape 49"/>
+          <p:cNvSpPr/>
+          <p:nvPr/>
+        </p:nvSpPr>
+        <p:spPr>
+          <a:xfrm>
+            <a:off x="4663440" y="4206240"/>
+            <a:ext cx="4023360" cy="420624"/>
+          </a:xfrm>
+          <a:prstGeom prst="rect">
+            <a:avLst/>
+          </a:prstGeom>
+          <a:solidFill>
+            <a:srgbClr val="FFFFFF"/>
+          </a:solidFill>
+          <a:ln w="12700">
+            <a:solidFill>
+              <a:srgbClr val="E2E8F0"/>
+            </a:solidFill>
+            <a:prstDash val="solid"/>
+          </a:ln>
+          <a:effectLst>
+            <a:outerShdw blurRad="76200" dist="25400" dir="8100000" algn="bl" rotWithShape="0">
+              <a:srgbClr val="000000">
+                <a:alpha val="6000"/>
+              </a:srgbClr>
+            </a:outerShdw>
+          </a:effectLst>
+        </p:spPr>
+        <p:txBody>
+          <a:bodyPr/>
+          <a:lstStyle/>
+          <a:p>
+            <a:endParaRPr lang="de-DE"/>
+          </a:p>
+        </p:txBody>
+      </p:sp>
+      <p:sp>
+        <p:nvSpPr>
+          <p:cNvPr id="52" name="Shape 50"/>
+          <p:cNvSpPr/>
+          <p:nvPr/>
+        </p:nvSpPr>
+        <p:spPr>
+          <a:xfrm>
+            <a:off x="4736592" y="4334256"/>
+            <a:ext cx="164592" cy="164592"/>
+          </a:xfrm>
+          <a:prstGeom prst="ellipse">
+            <a:avLst/>
+          </a:prstGeom>
+          <a:solidFill>
+            <a:srgbClr val="005AEE"/>
+          </a:solidFill>
+          <a:ln w="12700">
+            <a:solidFill>
+              <a:srgbClr val="005AEE"/>
+            </a:solidFill>
+            <a:prstDash val="solid"/>
+          </a:ln>
+        </p:spPr>
+        <p:txBody>
+          <a:bodyPr/>
+          <a:lstStyle/>
+          <a:p>
+            <a:endParaRPr lang="de-DE"/>
+          </a:p>
+        </p:txBody>
+      </p:sp>
+      <p:sp>
+        <p:nvSpPr>
+          <p:cNvPr id="53" name="Text 51"/>
+          <p:cNvSpPr/>
+          <p:nvPr/>
+        </p:nvSpPr>
+        <p:spPr>
+          <a:xfrm>
+            <a:off x="4983480" y="4206240"/>
+            <a:ext cx="3611880" cy="420624"/>
+          </a:xfrm>
+          <a:prstGeom prst="rect">
+            <a:avLst/>
+          </a:prstGeom>
+          <a:noFill/>
+          <a:ln/>
+        </p:spPr>
+        <p:txBody>
+          <a:bodyPr wrap="square" lIns="0" tIns="0" rIns="0" bIns="0" rtlCol="0" anchor="ctr"/>
+          <a:lstStyle/>
+          <a:p>
+            <a:pPr marL="0" indent="0" algn="l">
+              <a:buNone/>
+            </a:pPr>
+            <a:r>
+              <a:rPr lang="en-US" sz="950" b="1" dirty="0">
+                <a:solidFill>
+                  <a:srgbClr val="005AEE"/>
+                </a:solidFill>
+                <a:latin typeface="Arial" pitchFamily="34" charset="0"/>
+                <a:ea typeface="Arial" pitchFamily="34" charset="-122"/>
+                <a:cs typeface="Arial" pitchFamily="34" charset="-120"/>
+              </a:rPr>
+              <a:t>CFO (Thibaud):  </a:t>
+            </a:r>
+            <a:r>
+              <a:rPr lang="en-US" sz="950" dirty="0">
+                <a:solidFill>
+                  <a:srgbClr val="4A4A4A"/>
+                </a:solidFill>
+                <a:latin typeface="Arial" pitchFamily="34" charset="0"/>
+                <a:ea typeface="Arial" pitchFamily="34" charset="-122"/>
+                <a:cs typeface="Arial" pitchFamily="34" charset="-120"/>
+              </a:rPr>
+              <a:t>Approve payment holds, review cost reduction flags</a:t>
+            </a:r>
+            <a:endParaRPr lang="en-US" sz="950" dirty="0"/>
+          </a:p>
+        </p:txBody>
+      </p:sp>
+    </p:spTree>
+  </p:cSld>
+  <p:clrMapOvr>
+    <a:masterClrMapping/>
+  </p:clrMapOvr>
+</p:sld>
+</file>
+
+<file path=ppt/slides/slide8.xml><?xml version="1.0" encoding="utf-8"?>
 <p:sld xmlns:a="http://schemas.openxmlformats.org/drawingml/2006/main" xmlns:r="http://schemas.openxmlformats.org/officeDocument/2006/relationships" xmlns:p="http://schemas.openxmlformats.org/presentationml/2006/main">
   <p:cSld name="Slide 7">
     <p:bg>
@@ -10619,7 +13779,7 @@
                 <a:ea typeface="Arial" pitchFamily="34" charset="-122"/>
                 <a:cs typeface="Arial" pitchFamily="34" charset="-120"/>
               </a:rPr>
-              <a:t>Oracle = DEPLOYER</a:t>
+              <a:t>Oracle Game Studio = DEPLOYER</a:t>
             </a:r>
             <a:endParaRPr lang="en-US" sz="1100" dirty="0"/>
           </a:p>
@@ -10750,7 +13910,7 @@
 </p:sld>
 </file>
 
-<file path=ppt/slides/slide8.xml><?xml version="1.0" encoding="utf-8"?>
+<file path=ppt/slides/slide9.xml><?xml version="1.0" encoding="utf-8"?>
 <p:sld xmlns:a="http://schemas.openxmlformats.org/drawingml/2006/main" xmlns:r="http://schemas.openxmlformats.org/officeDocument/2006/relationships" xmlns:p="http://schemas.openxmlformats.org/presentationml/2006/main">
   <p:cSld name="Slide 8">
     <p:bg>
@@ -12681,1198 +15841,6 @@
                 <a:cs typeface="Arial" pitchFamily="34" charset="-120"/>
               </a:rPr>
               <a:t>Out of scope v1 — sanctions + data localisation require specialist legal advice</a:t>
-            </a:r>
-            <a:endParaRPr lang="en-US" sz="1050" dirty="0"/>
-          </a:p>
-        </p:txBody>
-      </p:sp>
-    </p:spTree>
-  </p:cSld>
-  <p:clrMapOvr>
-    <a:masterClrMapping/>
-  </p:clrMapOvr>
-</p:sld>
-</file>
-
-<file path=ppt/slides/slide9.xml><?xml version="1.0" encoding="utf-8"?>
-<p:sld xmlns:a="http://schemas.openxmlformats.org/drawingml/2006/main" xmlns:r="http://schemas.openxmlformats.org/officeDocument/2006/relationships" xmlns:p="http://schemas.openxmlformats.org/presentationml/2006/main">
-  <p:cSld name="Slide 9">
-    <p:bg>
-      <p:bgPr>
-        <a:solidFill>
-          <a:srgbClr val="FFFFFF"/>
-        </a:solidFill>
-        <a:effectLst/>
-      </p:bgPr>
-    </p:bg>
-    <p:spTree>
-      <p:nvGrpSpPr>
-        <p:cNvPr id="1" name=""/>
-        <p:cNvGrpSpPr/>
-        <p:nvPr/>
-      </p:nvGrpSpPr>
-      <p:grpSpPr>
-        <a:xfrm>
-          <a:off x="0" y="0"/>
-          <a:ext cx="0" cy="0"/>
-          <a:chOff x="0" y="0"/>
-          <a:chExt cx="0" cy="0"/>
-        </a:xfrm>
-      </p:grpSpPr>
-      <p:sp>
-        <p:nvSpPr>
-          <p:cNvPr id="3" name="Text 1"/>
-          <p:cNvSpPr/>
-          <p:nvPr/>
-        </p:nvSpPr>
-        <p:spPr>
-          <a:xfrm>
-            <a:off x="8430768" y="4681728"/>
-            <a:ext cx="530352" cy="329184"/>
-          </a:xfrm>
-          <a:prstGeom prst="rect">
-            <a:avLst/>
-          </a:prstGeom>
-          <a:noFill/>
-          <a:ln/>
-        </p:spPr>
-        <p:txBody>
-          <a:bodyPr wrap="square" lIns="0" tIns="0" rIns="0" bIns="0" rtlCol="0" anchor="ctr"/>
-          <a:lstStyle/>
-          <a:p>
-            <a:pPr marL="0" indent="0" algn="ctr">
-              <a:buNone/>
-            </a:pPr>
-            <a:r>
-              <a:rPr lang="en-US" sz="1200" b="1" dirty="0">
-                <a:solidFill>
-                  <a:srgbClr val="FFFFFF"/>
-                </a:solidFill>
-                <a:latin typeface="Arial" pitchFamily="34" charset="0"/>
-                <a:ea typeface="Arial" pitchFamily="34" charset="-122"/>
-                <a:cs typeface="Arial" pitchFamily="34" charset="-120"/>
-              </a:rPr>
-              <a:t>ih</a:t>
-            </a:r>
-            <a:endParaRPr lang="en-US" sz="1200" dirty="0"/>
-          </a:p>
-        </p:txBody>
-      </p:sp>
-      <p:sp>
-        <p:nvSpPr>
-          <p:cNvPr id="4" name="Shape 2"/>
-          <p:cNvSpPr/>
-          <p:nvPr/>
-        </p:nvSpPr>
-        <p:spPr>
-          <a:xfrm>
-            <a:off x="457200" y="822960"/>
-            <a:ext cx="8229600" cy="27432"/>
-          </a:xfrm>
-          <a:prstGeom prst="rect">
-            <a:avLst/>
-          </a:prstGeom>
-          <a:solidFill>
-            <a:srgbClr val="005AEE"/>
-          </a:solidFill>
-          <a:ln w="12700">
-            <a:solidFill>
-              <a:srgbClr val="005AEE"/>
-            </a:solidFill>
-            <a:prstDash val="solid"/>
-          </a:ln>
-        </p:spPr>
-        <p:txBody>
-          <a:bodyPr/>
-          <a:lstStyle/>
-          <a:p>
-            <a:endParaRPr lang="de-DE"/>
-          </a:p>
-        </p:txBody>
-      </p:sp>
-      <p:sp>
-        <p:nvSpPr>
-          <p:cNvPr id="5" name="Text 3"/>
-          <p:cNvSpPr/>
-          <p:nvPr/>
-        </p:nvSpPr>
-        <p:spPr>
-          <a:xfrm>
-            <a:off x="457200" y="109728"/>
-            <a:ext cx="7955280" cy="676656"/>
-          </a:xfrm>
-          <a:prstGeom prst="rect">
-            <a:avLst/>
-          </a:prstGeom>
-          <a:noFill/>
-          <a:ln/>
-        </p:spPr>
-        <p:txBody>
-          <a:bodyPr wrap="square" lIns="0" tIns="0" rIns="0" bIns="0" rtlCol="0" anchor="ctr"/>
-          <a:lstStyle/>
-          <a:p>
-            <a:pPr marL="0" indent="0" algn="l">
-              <a:buNone/>
-            </a:pPr>
-            <a:r>
-              <a:rPr lang="en-US" sz="2600" b="1" dirty="0">
-                <a:solidFill>
-                  <a:srgbClr val="111111"/>
-                </a:solidFill>
-                <a:latin typeface="Arial" pitchFamily="34" charset="0"/>
-                <a:ea typeface="Arial" pitchFamily="34" charset="-122"/>
-                <a:cs typeface="Arial" pitchFamily="34" charset="-120"/>
-              </a:rPr>
-              <a:t>The black box has windows — every AI decision is logged and auditable</a:t>
-            </a:r>
-            <a:endParaRPr lang="en-US" sz="2600" dirty="0"/>
-          </a:p>
-        </p:txBody>
-      </p:sp>
-      <p:sp>
-        <p:nvSpPr>
-          <p:cNvPr id="6" name="Text 4"/>
-          <p:cNvSpPr/>
-          <p:nvPr/>
-        </p:nvSpPr>
-        <p:spPr>
-          <a:xfrm>
-            <a:off x="457200" y="868680"/>
-            <a:ext cx="8229600" cy="237744"/>
-          </a:xfrm>
-          <a:prstGeom prst="rect">
-            <a:avLst/>
-          </a:prstGeom>
-          <a:noFill/>
-          <a:ln/>
-        </p:spPr>
-        <p:txBody>
-          <a:bodyPr wrap="square" lIns="0" tIns="0" rIns="0" bIns="0" rtlCol="0" anchor="ctr"/>
-          <a:lstStyle/>
-          <a:p>
-            <a:pPr marL="0" indent="0" algn="r">
-              <a:buNone/>
-            </a:pPr>
-            <a:r>
-              <a:rPr lang="en-US" sz="850" b="1" dirty="0">
-                <a:solidFill>
-                  <a:srgbClr val="005AEE"/>
-                </a:solidFill>
-                <a:latin typeface="Arial" pitchFamily="34" charset="0"/>
-                <a:ea typeface="Arial" pitchFamily="34" charset="-122"/>
-                <a:cs typeface="Arial" pitchFamily="34" charset="-120"/>
-              </a:rPr>
-              <a:t>04  MONITORING</a:t>
-            </a:r>
-            <a:endParaRPr lang="en-US" sz="850" dirty="0"/>
-          </a:p>
-        </p:txBody>
-      </p:sp>
-      <p:sp>
-        <p:nvSpPr>
-          <p:cNvPr id="7" name="Shape 5"/>
-          <p:cNvSpPr/>
-          <p:nvPr/>
-        </p:nvSpPr>
-        <p:spPr>
-          <a:xfrm>
-            <a:off x="457200" y="1261872"/>
-            <a:ext cx="8229600" cy="475488"/>
-          </a:xfrm>
-          <a:prstGeom prst="rect">
-            <a:avLst/>
-          </a:prstGeom>
-          <a:solidFill>
-            <a:srgbClr val="E8F0FD"/>
-          </a:solidFill>
-          <a:ln w="12700">
-            <a:solidFill>
-              <a:srgbClr val="005AEE"/>
-            </a:solidFill>
-            <a:prstDash val="solid"/>
-          </a:ln>
-        </p:spPr>
-        <p:txBody>
-          <a:bodyPr/>
-          <a:lstStyle/>
-          <a:p>
-            <a:endParaRPr lang="de-DE"/>
-          </a:p>
-        </p:txBody>
-      </p:sp>
-      <p:sp>
-        <p:nvSpPr>
-          <p:cNvPr id="8" name="Shape 6"/>
-          <p:cNvSpPr/>
-          <p:nvPr/>
-        </p:nvSpPr>
-        <p:spPr>
-          <a:xfrm>
-            <a:off x="457200" y="1261872"/>
-            <a:ext cx="54864" cy="475488"/>
-          </a:xfrm>
-          <a:prstGeom prst="rect">
-            <a:avLst/>
-          </a:prstGeom>
-          <a:solidFill>
-            <a:srgbClr val="005AEE"/>
-          </a:solidFill>
-          <a:ln w="12700">
-            <a:solidFill>
-              <a:srgbClr val="005AEE"/>
-            </a:solidFill>
-            <a:prstDash val="solid"/>
-          </a:ln>
-        </p:spPr>
-        <p:txBody>
-          <a:bodyPr/>
-          <a:lstStyle/>
-          <a:p>
-            <a:endParaRPr lang="de-DE"/>
-          </a:p>
-        </p:txBody>
-      </p:sp>
-      <p:sp>
-        <p:nvSpPr>
-          <p:cNvPr id="9" name="Text 7"/>
-          <p:cNvSpPr/>
-          <p:nvPr/>
-        </p:nvSpPr>
-        <p:spPr>
-          <a:xfrm>
-            <a:off x="640080" y="1261872"/>
-            <a:ext cx="7955280" cy="475488"/>
-          </a:xfrm>
-          <a:prstGeom prst="rect">
-            <a:avLst/>
-          </a:prstGeom>
-          <a:noFill/>
-          <a:ln/>
-        </p:spPr>
-        <p:txBody>
-          <a:bodyPr wrap="square" lIns="0" tIns="0" rIns="0" bIns="0" rtlCol="0" anchor="ctr"/>
-          <a:lstStyle/>
-          <a:p>
-            <a:pPr marL="0" indent="0" algn="l">
-              <a:buNone/>
-            </a:pPr>
-            <a:r>
-              <a:rPr lang="en-US" sz="1300" b="1" i="1" dirty="0">
-                <a:solidFill>
-                  <a:srgbClr val="222222"/>
-                </a:solidFill>
-                <a:latin typeface="Arial" pitchFamily="34" charset="0"/>
-                <a:ea typeface="Arial" pitchFamily="34" charset="-122"/>
-                <a:cs typeface="Arial" pitchFamily="34" charset="-120"/>
-              </a:rPr>
-              <a:t>If a regulator asks what happened with a specific contractor's data, we show the complete chain in under five minutes.</a:t>
-            </a:r>
-            <a:endParaRPr lang="en-US" sz="1300" dirty="0"/>
-          </a:p>
-        </p:txBody>
-      </p:sp>
-      <p:sp>
-        <p:nvSpPr>
-          <p:cNvPr id="10" name="Shape 8"/>
-          <p:cNvSpPr/>
-          <p:nvPr/>
-        </p:nvSpPr>
-        <p:spPr>
-          <a:xfrm>
-            <a:off x="457200" y="1847088"/>
-            <a:ext cx="4023360" cy="530352"/>
-          </a:xfrm>
-          <a:prstGeom prst="rect">
-            <a:avLst/>
-          </a:prstGeom>
-          <a:solidFill>
-            <a:srgbClr val="FFFFFF"/>
-          </a:solidFill>
-          <a:ln w="12700">
-            <a:solidFill>
-              <a:srgbClr val="E2E8F0"/>
-            </a:solidFill>
-            <a:prstDash val="solid"/>
-          </a:ln>
-          <a:effectLst>
-            <a:outerShdw blurRad="127000" dist="25400" dir="8100000" algn="bl" rotWithShape="0">
-              <a:srgbClr val="000000">
-                <a:alpha val="7000"/>
-              </a:srgbClr>
-            </a:outerShdw>
-          </a:effectLst>
-        </p:spPr>
-        <p:txBody>
-          <a:bodyPr/>
-          <a:lstStyle/>
-          <a:p>
-            <a:endParaRPr lang="de-DE"/>
-          </a:p>
-        </p:txBody>
-      </p:sp>
-      <p:sp>
-        <p:nvSpPr>
-          <p:cNvPr id="11" name="Shape 9"/>
-          <p:cNvSpPr/>
-          <p:nvPr/>
-        </p:nvSpPr>
-        <p:spPr>
-          <a:xfrm>
-            <a:off x="457200" y="1847088"/>
-            <a:ext cx="45720" cy="530352"/>
-          </a:xfrm>
-          <a:prstGeom prst="rect">
-            <a:avLst/>
-          </a:prstGeom>
-          <a:solidFill>
-            <a:srgbClr val="005AEE"/>
-          </a:solidFill>
-          <a:ln w="12700">
-            <a:solidFill>
-              <a:srgbClr val="005AEE"/>
-            </a:solidFill>
-            <a:prstDash val="solid"/>
-          </a:ln>
-        </p:spPr>
-        <p:txBody>
-          <a:bodyPr/>
-          <a:lstStyle/>
-          <a:p>
-            <a:endParaRPr lang="de-DE"/>
-          </a:p>
-        </p:txBody>
-      </p:sp>
-      <p:sp>
-        <p:nvSpPr>
-          <p:cNvPr id="12" name="Text 10"/>
-          <p:cNvSpPr/>
-          <p:nvPr/>
-        </p:nvSpPr>
-        <p:spPr>
-          <a:xfrm>
-            <a:off x="621792" y="1847088"/>
-            <a:ext cx="3730752" cy="530352"/>
-          </a:xfrm>
-          <a:prstGeom prst="rect">
-            <a:avLst/>
-          </a:prstGeom>
-          <a:noFill/>
-          <a:ln/>
-        </p:spPr>
-        <p:txBody>
-          <a:bodyPr wrap="square" lIns="0" tIns="0" rIns="0" bIns="0" rtlCol="0" anchor="ctr"/>
-          <a:lstStyle/>
-          <a:p>
-            <a:pPr marL="0" indent="0" algn="l">
-              <a:buNone/>
-            </a:pPr>
-            <a:r>
-              <a:rPr lang="en-US" sz="1100" b="1" dirty="0">
-                <a:solidFill>
-                  <a:srgbClr val="111111"/>
-                </a:solidFill>
-                <a:latin typeface="Arial" pitchFamily="34" charset="0"/>
-                <a:ea typeface="Arial" pitchFamily="34" charset="-122"/>
-                <a:cs typeface="Arial" pitchFamily="34" charset="-120"/>
-              </a:rPr>
-              <a:t>Extraction confidence  </a:t>
-            </a:r>
-            <a:r>
-              <a:rPr lang="en-US" sz="1100" dirty="0">
-                <a:solidFill>
-                  <a:srgbClr val="4A4A4A"/>
-                </a:solidFill>
-                <a:latin typeface="Arial" pitchFamily="34" charset="0"/>
-                <a:ea typeface="Arial" pitchFamily="34" charset="-122"/>
-                <a:cs typeface="Arial" pitchFamily="34" charset="-120"/>
-              </a:rPr>
-              <a:t>Alert &lt; 0.80 on rate, jurisdiction, IP</a:t>
-            </a:r>
-            <a:endParaRPr lang="en-US" sz="1100" dirty="0"/>
-          </a:p>
-        </p:txBody>
-      </p:sp>
-      <p:sp>
-        <p:nvSpPr>
-          <p:cNvPr id="13" name="Shape 11"/>
-          <p:cNvSpPr/>
-          <p:nvPr/>
-        </p:nvSpPr>
-        <p:spPr>
-          <a:xfrm>
-            <a:off x="457200" y="2450592"/>
-            <a:ext cx="4023360" cy="530352"/>
-          </a:xfrm>
-          <a:prstGeom prst="rect">
-            <a:avLst/>
-          </a:prstGeom>
-          <a:solidFill>
-            <a:srgbClr val="FFFFFF"/>
-          </a:solidFill>
-          <a:ln w="12700">
-            <a:solidFill>
-              <a:srgbClr val="E2E8F0"/>
-            </a:solidFill>
-            <a:prstDash val="solid"/>
-          </a:ln>
-          <a:effectLst>
-            <a:outerShdw blurRad="127000" dist="25400" dir="8100000" algn="bl" rotWithShape="0">
-              <a:srgbClr val="000000">
-                <a:alpha val="7000"/>
-              </a:srgbClr>
-            </a:outerShdw>
-          </a:effectLst>
-        </p:spPr>
-        <p:txBody>
-          <a:bodyPr/>
-          <a:lstStyle/>
-          <a:p>
-            <a:endParaRPr lang="de-DE"/>
-          </a:p>
-        </p:txBody>
-      </p:sp>
-      <p:sp>
-        <p:nvSpPr>
-          <p:cNvPr id="14" name="Shape 12"/>
-          <p:cNvSpPr/>
-          <p:nvPr/>
-        </p:nvSpPr>
-        <p:spPr>
-          <a:xfrm>
-            <a:off x="457200" y="2450592"/>
-            <a:ext cx="45720" cy="530352"/>
-          </a:xfrm>
-          <a:prstGeom prst="rect">
-            <a:avLst/>
-          </a:prstGeom>
-          <a:solidFill>
-            <a:srgbClr val="005AEE"/>
-          </a:solidFill>
-          <a:ln w="12700">
-            <a:solidFill>
-              <a:srgbClr val="005AEE"/>
-            </a:solidFill>
-            <a:prstDash val="solid"/>
-          </a:ln>
-        </p:spPr>
-        <p:txBody>
-          <a:bodyPr/>
-          <a:lstStyle/>
-          <a:p>
-            <a:endParaRPr lang="de-DE"/>
-          </a:p>
-        </p:txBody>
-      </p:sp>
-      <p:sp>
-        <p:nvSpPr>
-          <p:cNvPr id="15" name="Text 13"/>
-          <p:cNvSpPr/>
-          <p:nvPr/>
-        </p:nvSpPr>
-        <p:spPr>
-          <a:xfrm>
-            <a:off x="621792" y="2450592"/>
-            <a:ext cx="3730752" cy="530352"/>
-          </a:xfrm>
-          <a:prstGeom prst="rect">
-            <a:avLst/>
-          </a:prstGeom>
-          <a:noFill/>
-          <a:ln/>
-        </p:spPr>
-        <p:txBody>
-          <a:bodyPr wrap="square" lIns="0" tIns="0" rIns="0" bIns="0" rtlCol="0" anchor="ctr"/>
-          <a:lstStyle/>
-          <a:p>
-            <a:pPr marL="0" indent="0" algn="l">
-              <a:buNone/>
-            </a:pPr>
-            <a:r>
-              <a:rPr lang="en-US" sz="1100" b="1" dirty="0">
-                <a:solidFill>
-                  <a:srgbClr val="111111"/>
-                </a:solidFill>
-                <a:latin typeface="Arial" pitchFamily="34" charset="0"/>
-                <a:ea typeface="Arial" pitchFamily="34" charset="-122"/>
-                <a:cs typeface="Arial" pitchFamily="34" charset="-120"/>
-              </a:rPr>
-              <a:t>Human override rate  </a:t>
-            </a:r>
-            <a:r>
-              <a:rPr lang="en-US" sz="1100" dirty="0">
-                <a:solidFill>
-                  <a:srgbClr val="4A4A4A"/>
-                </a:solidFill>
-                <a:latin typeface="Arial" pitchFamily="34" charset="0"/>
-                <a:ea typeface="Arial" pitchFamily="34" charset="-122"/>
-                <a:cs typeface="Arial" pitchFamily="34" charset="-120"/>
-              </a:rPr>
-              <a:t>Alert &gt; 20% in 7-day window</a:t>
-            </a:r>
-            <a:endParaRPr lang="en-US" sz="1100" dirty="0"/>
-          </a:p>
-        </p:txBody>
-      </p:sp>
-      <p:sp>
-        <p:nvSpPr>
-          <p:cNvPr id="16" name="Shape 14"/>
-          <p:cNvSpPr/>
-          <p:nvPr/>
-        </p:nvSpPr>
-        <p:spPr>
-          <a:xfrm>
-            <a:off x="457200" y="3054096"/>
-            <a:ext cx="4023360" cy="530352"/>
-          </a:xfrm>
-          <a:prstGeom prst="rect">
-            <a:avLst/>
-          </a:prstGeom>
-          <a:solidFill>
-            <a:srgbClr val="FFFFFF"/>
-          </a:solidFill>
-          <a:ln w="12700">
-            <a:solidFill>
-              <a:srgbClr val="E2E8F0"/>
-            </a:solidFill>
-            <a:prstDash val="solid"/>
-          </a:ln>
-          <a:effectLst>
-            <a:outerShdw blurRad="127000" dist="25400" dir="8100000" algn="bl" rotWithShape="0">
-              <a:srgbClr val="000000">
-                <a:alpha val="7000"/>
-              </a:srgbClr>
-            </a:outerShdw>
-          </a:effectLst>
-        </p:spPr>
-        <p:txBody>
-          <a:bodyPr/>
-          <a:lstStyle/>
-          <a:p>
-            <a:endParaRPr lang="de-DE"/>
-          </a:p>
-        </p:txBody>
-      </p:sp>
-      <p:sp>
-        <p:nvSpPr>
-          <p:cNvPr id="17" name="Shape 15"/>
-          <p:cNvSpPr/>
-          <p:nvPr/>
-        </p:nvSpPr>
-        <p:spPr>
-          <a:xfrm>
-            <a:off x="457200" y="3054096"/>
-            <a:ext cx="45720" cy="530352"/>
-          </a:xfrm>
-          <a:prstGeom prst="rect">
-            <a:avLst/>
-          </a:prstGeom>
-          <a:solidFill>
-            <a:srgbClr val="005AEE"/>
-          </a:solidFill>
-          <a:ln w="12700">
-            <a:solidFill>
-              <a:srgbClr val="005AEE"/>
-            </a:solidFill>
-            <a:prstDash val="solid"/>
-          </a:ln>
-        </p:spPr>
-        <p:txBody>
-          <a:bodyPr/>
-          <a:lstStyle/>
-          <a:p>
-            <a:endParaRPr lang="de-DE"/>
-          </a:p>
-        </p:txBody>
-      </p:sp>
-      <p:sp>
-        <p:nvSpPr>
-          <p:cNvPr id="18" name="Text 16"/>
-          <p:cNvSpPr/>
-          <p:nvPr/>
-        </p:nvSpPr>
-        <p:spPr>
-          <a:xfrm>
-            <a:off x="621792" y="3054096"/>
-            <a:ext cx="3730752" cy="530352"/>
-          </a:xfrm>
-          <a:prstGeom prst="rect">
-            <a:avLst/>
-          </a:prstGeom>
-          <a:noFill/>
-          <a:ln/>
-        </p:spPr>
-        <p:txBody>
-          <a:bodyPr wrap="square" lIns="0" tIns="0" rIns="0" bIns="0" rtlCol="0" anchor="ctr"/>
-          <a:lstStyle/>
-          <a:p>
-            <a:pPr marL="0" indent="0" algn="l">
-              <a:buNone/>
-            </a:pPr>
-            <a:r>
-              <a:rPr lang="en-US" sz="1100" b="1" dirty="0">
-                <a:solidFill>
-                  <a:srgbClr val="111111"/>
-                </a:solidFill>
-                <a:latin typeface="Arial" pitchFamily="34" charset="0"/>
-                <a:ea typeface="Arial" pitchFamily="34" charset="-122"/>
-                <a:cs typeface="Arial" pitchFamily="34" charset="-120"/>
-              </a:rPr>
-              <a:t>Latency per agent  </a:t>
-            </a:r>
-            <a:r>
-              <a:rPr lang="en-US" sz="1100" dirty="0">
-                <a:solidFill>
-                  <a:srgbClr val="4A4A4A"/>
-                </a:solidFill>
-                <a:latin typeface="Arial" pitchFamily="34" charset="0"/>
-                <a:ea typeface="Arial" pitchFamily="34" charset="-122"/>
-                <a:cs typeface="Arial" pitchFamily="34" charset="-120"/>
-              </a:rPr>
-              <a:t>Alert p95 &gt; 30 seconds</a:t>
-            </a:r>
-            <a:endParaRPr lang="en-US" sz="1100" dirty="0"/>
-          </a:p>
-        </p:txBody>
-      </p:sp>
-      <p:sp>
-        <p:nvSpPr>
-          <p:cNvPr id="19" name="Shape 17"/>
-          <p:cNvSpPr/>
-          <p:nvPr/>
-        </p:nvSpPr>
-        <p:spPr>
-          <a:xfrm>
-            <a:off x="4663440" y="1847088"/>
-            <a:ext cx="4023360" cy="530352"/>
-          </a:xfrm>
-          <a:prstGeom prst="rect">
-            <a:avLst/>
-          </a:prstGeom>
-          <a:solidFill>
-            <a:srgbClr val="FFFFFF"/>
-          </a:solidFill>
-          <a:ln w="12700">
-            <a:solidFill>
-              <a:srgbClr val="E2E8F0"/>
-            </a:solidFill>
-            <a:prstDash val="solid"/>
-          </a:ln>
-          <a:effectLst>
-            <a:outerShdw blurRad="127000" dist="25400" dir="8100000" algn="bl" rotWithShape="0">
-              <a:srgbClr val="000000">
-                <a:alpha val="7000"/>
-              </a:srgbClr>
-            </a:outerShdw>
-          </a:effectLst>
-        </p:spPr>
-        <p:txBody>
-          <a:bodyPr/>
-          <a:lstStyle/>
-          <a:p>
-            <a:endParaRPr lang="de-DE"/>
-          </a:p>
-        </p:txBody>
-      </p:sp>
-      <p:sp>
-        <p:nvSpPr>
-          <p:cNvPr id="20" name="Shape 18"/>
-          <p:cNvSpPr/>
-          <p:nvPr/>
-        </p:nvSpPr>
-        <p:spPr>
-          <a:xfrm>
-            <a:off x="4663440" y="1847088"/>
-            <a:ext cx="45720" cy="530352"/>
-          </a:xfrm>
-          <a:prstGeom prst="rect">
-            <a:avLst/>
-          </a:prstGeom>
-          <a:solidFill>
-            <a:srgbClr val="005AEE"/>
-          </a:solidFill>
-          <a:ln w="12700">
-            <a:solidFill>
-              <a:srgbClr val="005AEE"/>
-            </a:solidFill>
-            <a:prstDash val="solid"/>
-          </a:ln>
-        </p:spPr>
-        <p:txBody>
-          <a:bodyPr/>
-          <a:lstStyle/>
-          <a:p>
-            <a:endParaRPr lang="de-DE"/>
-          </a:p>
-        </p:txBody>
-      </p:sp>
-      <p:sp>
-        <p:nvSpPr>
-          <p:cNvPr id="21" name="Text 19"/>
-          <p:cNvSpPr/>
-          <p:nvPr/>
-        </p:nvSpPr>
-        <p:spPr>
-          <a:xfrm>
-            <a:off x="4828032" y="1847088"/>
-            <a:ext cx="3730752" cy="530352"/>
-          </a:xfrm>
-          <a:prstGeom prst="rect">
-            <a:avLst/>
-          </a:prstGeom>
-          <a:noFill/>
-          <a:ln/>
-        </p:spPr>
-        <p:txBody>
-          <a:bodyPr wrap="square" lIns="0" tIns="0" rIns="0" bIns="0" rtlCol="0" anchor="ctr"/>
-          <a:lstStyle/>
-          <a:p>
-            <a:pPr marL="0" indent="0" algn="l">
-              <a:buNone/>
-            </a:pPr>
-            <a:r>
-              <a:rPr lang="en-US" sz="1100" b="1" dirty="0">
-                <a:solidFill>
-                  <a:srgbClr val="111111"/>
-                </a:solidFill>
-                <a:latin typeface="Arial" pitchFamily="34" charset="0"/>
-                <a:ea typeface="Arial" pitchFamily="34" charset="-122"/>
-                <a:cs typeface="Arial" pitchFamily="34" charset="-120"/>
-              </a:rPr>
-              <a:t>Failed extractions  </a:t>
-            </a:r>
-            <a:r>
-              <a:rPr lang="en-US" sz="1100" dirty="0">
-                <a:solidFill>
-                  <a:srgbClr val="4A4A4A"/>
-                </a:solidFill>
-                <a:latin typeface="Arial" pitchFamily="34" charset="0"/>
-                <a:ea typeface="Arial" pitchFamily="34" charset="-122"/>
-                <a:cs typeface="Arial" pitchFamily="34" charset="-120"/>
-              </a:rPr>
-              <a:t>Zero tolerance — immediate alert</a:t>
-            </a:r>
-            <a:endParaRPr lang="en-US" sz="1100" dirty="0"/>
-          </a:p>
-        </p:txBody>
-      </p:sp>
-      <p:sp>
-        <p:nvSpPr>
-          <p:cNvPr id="22" name="Shape 20"/>
-          <p:cNvSpPr/>
-          <p:nvPr/>
-        </p:nvSpPr>
-        <p:spPr>
-          <a:xfrm>
-            <a:off x="4663440" y="2450592"/>
-            <a:ext cx="4023360" cy="530352"/>
-          </a:xfrm>
-          <a:prstGeom prst="rect">
-            <a:avLst/>
-          </a:prstGeom>
-          <a:solidFill>
-            <a:srgbClr val="FFFFFF"/>
-          </a:solidFill>
-          <a:ln w="12700">
-            <a:solidFill>
-              <a:srgbClr val="E2E8F0"/>
-            </a:solidFill>
-            <a:prstDash val="solid"/>
-          </a:ln>
-          <a:effectLst>
-            <a:outerShdw blurRad="127000" dist="25400" dir="8100000" algn="bl" rotWithShape="0">
-              <a:srgbClr val="000000">
-                <a:alpha val="7000"/>
-              </a:srgbClr>
-            </a:outerShdw>
-          </a:effectLst>
-        </p:spPr>
-        <p:txBody>
-          <a:bodyPr/>
-          <a:lstStyle/>
-          <a:p>
-            <a:endParaRPr lang="de-DE"/>
-          </a:p>
-        </p:txBody>
-      </p:sp>
-      <p:sp>
-        <p:nvSpPr>
-          <p:cNvPr id="23" name="Shape 21"/>
-          <p:cNvSpPr/>
-          <p:nvPr/>
-        </p:nvSpPr>
-        <p:spPr>
-          <a:xfrm>
-            <a:off x="4663440" y="2450592"/>
-            <a:ext cx="45720" cy="530352"/>
-          </a:xfrm>
-          <a:prstGeom prst="rect">
-            <a:avLst/>
-          </a:prstGeom>
-          <a:solidFill>
-            <a:srgbClr val="005AEE"/>
-          </a:solidFill>
-          <a:ln w="12700">
-            <a:solidFill>
-              <a:srgbClr val="005AEE"/>
-            </a:solidFill>
-            <a:prstDash val="solid"/>
-          </a:ln>
-        </p:spPr>
-        <p:txBody>
-          <a:bodyPr/>
-          <a:lstStyle/>
-          <a:p>
-            <a:endParaRPr lang="de-DE"/>
-          </a:p>
-        </p:txBody>
-      </p:sp>
-      <p:sp>
-        <p:nvSpPr>
-          <p:cNvPr id="24" name="Text 22"/>
-          <p:cNvSpPr/>
-          <p:nvPr/>
-        </p:nvSpPr>
-        <p:spPr>
-          <a:xfrm>
-            <a:off x="4828032" y="2450592"/>
-            <a:ext cx="3730752" cy="530352"/>
-          </a:xfrm>
-          <a:prstGeom prst="rect">
-            <a:avLst/>
-          </a:prstGeom>
-          <a:noFill/>
-          <a:ln/>
-        </p:spPr>
-        <p:txBody>
-          <a:bodyPr wrap="square" lIns="0" tIns="0" rIns="0" bIns="0" rtlCol="0" anchor="ctr"/>
-          <a:lstStyle/>
-          <a:p>
-            <a:pPr marL="0" indent="0" algn="l">
-              <a:buNone/>
-            </a:pPr>
-            <a:r>
-              <a:rPr lang="en-US" sz="1100" b="1" dirty="0">
-                <a:solidFill>
-                  <a:srgbClr val="111111"/>
-                </a:solidFill>
-                <a:latin typeface="Arial" pitchFamily="34" charset="0"/>
-                <a:ea typeface="Arial" pitchFamily="34" charset="-122"/>
-                <a:cs typeface="Arial" pitchFamily="34" charset="-120"/>
-              </a:rPr>
-              <a:t>Compliance flag trend  </a:t>
-            </a:r>
-            <a:r>
-              <a:rPr lang="en-US" sz="1100" dirty="0">
-                <a:solidFill>
-                  <a:srgbClr val="4A4A4A"/>
-                </a:solidFill>
-                <a:latin typeface="Arial" pitchFamily="34" charset="0"/>
-                <a:ea typeface="Arial" pitchFamily="34" charset="-122"/>
-                <a:cs typeface="Arial" pitchFamily="34" charset="-120"/>
-              </a:rPr>
-              <a:t>Alert if Red &gt; 10% of new contracts</a:t>
-            </a:r>
-            <a:endParaRPr lang="en-US" sz="1100" dirty="0"/>
-          </a:p>
-        </p:txBody>
-      </p:sp>
-      <p:sp>
-        <p:nvSpPr>
-          <p:cNvPr id="25" name="Shape 23"/>
-          <p:cNvSpPr/>
-          <p:nvPr/>
-        </p:nvSpPr>
-        <p:spPr>
-          <a:xfrm>
-            <a:off x="4663440" y="3054096"/>
-            <a:ext cx="4023360" cy="530352"/>
-          </a:xfrm>
-          <a:prstGeom prst="rect">
-            <a:avLst/>
-          </a:prstGeom>
-          <a:solidFill>
-            <a:srgbClr val="FFFFFF"/>
-          </a:solidFill>
-          <a:ln w="12700">
-            <a:solidFill>
-              <a:srgbClr val="E2E8F0"/>
-            </a:solidFill>
-            <a:prstDash val="solid"/>
-          </a:ln>
-          <a:effectLst>
-            <a:outerShdw blurRad="127000" dist="25400" dir="8100000" algn="bl" rotWithShape="0">
-              <a:srgbClr val="000000">
-                <a:alpha val="7000"/>
-              </a:srgbClr>
-            </a:outerShdw>
-          </a:effectLst>
-        </p:spPr>
-        <p:txBody>
-          <a:bodyPr/>
-          <a:lstStyle/>
-          <a:p>
-            <a:endParaRPr lang="de-DE"/>
-          </a:p>
-        </p:txBody>
-      </p:sp>
-      <p:sp>
-        <p:nvSpPr>
-          <p:cNvPr id="26" name="Shape 24"/>
-          <p:cNvSpPr/>
-          <p:nvPr/>
-        </p:nvSpPr>
-        <p:spPr>
-          <a:xfrm>
-            <a:off x="4663440" y="3054096"/>
-            <a:ext cx="45720" cy="530352"/>
-          </a:xfrm>
-          <a:prstGeom prst="rect">
-            <a:avLst/>
-          </a:prstGeom>
-          <a:solidFill>
-            <a:srgbClr val="005AEE"/>
-          </a:solidFill>
-          <a:ln w="12700">
-            <a:solidFill>
-              <a:srgbClr val="005AEE"/>
-            </a:solidFill>
-            <a:prstDash val="solid"/>
-          </a:ln>
-        </p:spPr>
-        <p:txBody>
-          <a:bodyPr/>
-          <a:lstStyle/>
-          <a:p>
-            <a:endParaRPr lang="de-DE"/>
-          </a:p>
-        </p:txBody>
-      </p:sp>
-      <p:sp>
-        <p:nvSpPr>
-          <p:cNvPr id="27" name="Text 25"/>
-          <p:cNvSpPr/>
-          <p:nvPr/>
-        </p:nvSpPr>
-        <p:spPr>
-          <a:xfrm>
-            <a:off x="4828032" y="3054096"/>
-            <a:ext cx="3730752" cy="530352"/>
-          </a:xfrm>
-          <a:prstGeom prst="rect">
-            <a:avLst/>
-          </a:prstGeom>
-          <a:noFill/>
-          <a:ln/>
-        </p:spPr>
-        <p:txBody>
-          <a:bodyPr wrap="square" lIns="0" tIns="0" rIns="0" bIns="0" rtlCol="0" anchor="ctr"/>
-          <a:lstStyle/>
-          <a:p>
-            <a:pPr marL="0" indent="0" algn="l">
-              <a:buNone/>
-            </a:pPr>
-            <a:r>
-              <a:rPr lang="en-US" sz="1100" b="1" dirty="0">
-                <a:solidFill>
-                  <a:srgbClr val="111111"/>
-                </a:solidFill>
-                <a:latin typeface="Arial" pitchFamily="34" charset="0"/>
-                <a:ea typeface="Arial" pitchFamily="34" charset="-122"/>
-                <a:cs typeface="Arial" pitchFamily="34" charset="-120"/>
-              </a:rPr>
-              <a:t>PII redaction audit  </a:t>
-            </a:r>
-            <a:r>
-              <a:rPr lang="en-US" sz="1100" dirty="0">
-                <a:solidFill>
-                  <a:srgbClr val="4A4A4A"/>
-                </a:solidFill>
-                <a:latin typeface="Arial" pitchFamily="34" charset="0"/>
-                <a:ea typeface="Arial" pitchFamily="34" charset="-122"/>
-                <a:cs typeface="Arial" pitchFamily="34" charset="-120"/>
-              </a:rPr>
-              <a:t>Weekly — zero tolerance for PII in traces</a:t>
-            </a:r>
-            <a:endParaRPr lang="en-US" sz="1100" dirty="0"/>
-          </a:p>
-        </p:txBody>
-      </p:sp>
-      <p:sp>
-        <p:nvSpPr>
-          <p:cNvPr id="28" name="Shape 26"/>
-          <p:cNvSpPr/>
-          <p:nvPr/>
-        </p:nvSpPr>
-        <p:spPr>
-          <a:xfrm>
-            <a:off x="457200" y="3712464"/>
-            <a:ext cx="8229600" cy="1353312"/>
-          </a:xfrm>
-          <a:prstGeom prst="rect">
-            <a:avLst/>
-          </a:prstGeom>
-          <a:solidFill>
-            <a:srgbClr val="F0FDF4"/>
-          </a:solidFill>
-          <a:ln w="12700">
-            <a:solidFill>
-              <a:srgbClr val="16A34A"/>
-            </a:solidFill>
-            <a:prstDash val="solid"/>
-          </a:ln>
-        </p:spPr>
-        <p:txBody>
-          <a:bodyPr/>
-          <a:lstStyle/>
-          <a:p>
-            <a:endParaRPr lang="de-DE"/>
-          </a:p>
-        </p:txBody>
-      </p:sp>
-      <p:sp>
-        <p:nvSpPr>
-          <p:cNvPr id="29" name="Shape 27"/>
-          <p:cNvSpPr/>
-          <p:nvPr/>
-        </p:nvSpPr>
-        <p:spPr>
-          <a:xfrm>
-            <a:off x="457200" y="3712464"/>
-            <a:ext cx="45720" cy="1353312"/>
-          </a:xfrm>
-          <a:prstGeom prst="rect">
-            <a:avLst/>
-          </a:prstGeom>
-          <a:solidFill>
-            <a:srgbClr val="16A34A"/>
-          </a:solidFill>
-          <a:ln w="12700">
-            <a:solidFill>
-              <a:srgbClr val="16A34A"/>
-            </a:solidFill>
-            <a:prstDash val="solid"/>
-          </a:ln>
-        </p:spPr>
-        <p:txBody>
-          <a:bodyPr/>
-          <a:lstStyle/>
-          <a:p>
-            <a:endParaRPr lang="de-DE"/>
-          </a:p>
-        </p:txBody>
-      </p:sp>
-      <p:sp>
-        <p:nvSpPr>
-          <p:cNvPr id="30" name="Text 28"/>
-          <p:cNvSpPr/>
-          <p:nvPr/>
-        </p:nvSpPr>
-        <p:spPr>
-          <a:xfrm>
-            <a:off x="640080" y="3767328"/>
-            <a:ext cx="7863840" cy="329184"/>
-          </a:xfrm>
-          <a:prstGeom prst="rect">
-            <a:avLst/>
-          </a:prstGeom>
-          <a:noFill/>
-          <a:ln/>
-        </p:spPr>
-        <p:txBody>
-          <a:bodyPr wrap="square" lIns="0" tIns="0" rIns="0" bIns="0" rtlCol="0" anchor="ctr"/>
-          <a:lstStyle/>
-          <a:p>
-            <a:pPr marL="0" indent="0" algn="l">
-              <a:buNone/>
-            </a:pPr>
-            <a:r>
-              <a:rPr lang="en-US" sz="1200" b="1" dirty="0">
-                <a:solidFill>
-                  <a:srgbClr val="16A34A"/>
-                </a:solidFill>
-                <a:latin typeface="Arial" pitchFamily="34" charset="0"/>
-                <a:ea typeface="Arial" pitchFamily="34" charset="-122"/>
-                <a:cs typeface="Arial" pitchFamily="34" charset="-120"/>
-              </a:rPr>
-              <a:t>✓  Live — contractos-oracle-prod</a:t>
-            </a:r>
-            <a:endParaRPr lang="en-US" sz="1200" dirty="0"/>
-          </a:p>
-        </p:txBody>
-      </p:sp>
-      <p:sp>
-        <p:nvSpPr>
-          <p:cNvPr id="31" name="Text 29"/>
-          <p:cNvSpPr/>
-          <p:nvPr/>
-        </p:nvSpPr>
-        <p:spPr>
-          <a:xfrm>
-            <a:off x="640080" y="4114800"/>
-            <a:ext cx="7863840" cy="274320"/>
-          </a:xfrm>
-          <a:prstGeom prst="rect">
-            <a:avLst/>
-          </a:prstGeom>
-          <a:noFill/>
-          <a:ln/>
-        </p:spPr>
-        <p:txBody>
-          <a:bodyPr wrap="square" lIns="0" tIns="0" rIns="0" bIns="0" rtlCol="0" anchor="ctr"/>
-          <a:lstStyle/>
-          <a:p>
-            <a:pPr marL="0" indent="0" algn="l">
-              <a:buNone/>
-            </a:pPr>
-            <a:r>
-              <a:rPr lang="en-US" sz="1050" dirty="0">
-                <a:solidFill>
-                  <a:srgbClr val="166534"/>
-                </a:solidFill>
-                <a:latin typeface="Arial" pitchFamily="34" charset="0"/>
-                <a:ea typeface="Arial" pitchFamily="34" charset="-122"/>
-                <a:cs typeface="Arial" pitchFamily="34" charset="-120"/>
-              </a:rPr>
-              <a:t>6 runs complete  ·  All 5 agents traced  ·  EU endpoint: eu.api.smith.langchain.com  ·  PII redacted</a:t>
-            </a:r>
-            <a:endParaRPr lang="en-US" sz="1050" dirty="0"/>
-          </a:p>
-        </p:txBody>
-      </p:sp>
-      <p:sp>
-        <p:nvSpPr>
-          <p:cNvPr id="32" name="Text 30"/>
-          <p:cNvSpPr/>
-          <p:nvPr/>
-        </p:nvSpPr>
-        <p:spPr>
-          <a:xfrm>
-            <a:off x="640080" y="4434840"/>
-            <a:ext cx="7863840" cy="548640"/>
-          </a:xfrm>
-          <a:prstGeom prst="rect">
-            <a:avLst/>
-          </a:prstGeom>
-          <a:noFill/>
-          <a:ln/>
-        </p:spPr>
-        <p:txBody>
-          <a:bodyPr wrap="square" lIns="0" tIns="0" rIns="0" bIns="0" rtlCol="0" anchor="ctr"/>
-          <a:lstStyle/>
-          <a:p>
-            <a:pPr marL="0" indent="0" algn="l">
-              <a:buNone/>
-            </a:pPr>
-            <a:r>
-              <a:rPr lang="en-US" sz="1050" i="1" dirty="0">
-                <a:solidFill>
-                  <a:srgbClr val="166534"/>
-                </a:solidFill>
-                <a:latin typeface="Arial" pitchFamily="34" charset="0"/>
-                <a:ea typeface="Arial" pitchFamily="34" charset="-122"/>
-                <a:cs typeface="Arial" pitchFamily="34" charset="-120"/>
-              </a:rPr>
-              <a:t>"Here is where you can see everything the AI did, catch a mistake before it costs you money, and prove to an auditor exactly what happened — in under five minutes."</a:t>
             </a:r>
             <a:endParaRPr lang="en-US" sz="1050" dirty="0"/>
           </a:p>
